--- a/slides/datasets-in-10-minutes-multilexsum.pptx
+++ b/slides/datasets-in-10-minutes-multilexsum.pptx
@@ -33,7 +33,6 @@
     <p:sldId id="281" r:id="rId31"/>
     <p:sldId id="282" r:id="rId32"/>
     <p:sldId id="283" r:id="rId33"/>
-    <p:sldId id="284" r:id="rId34"/>
     <p:sldId id="285" r:id="rId35"/>
     <p:sldId id="286" r:id="rId36"/>
     <p:sldId id="287" r:id="rId37"/>
@@ -63,17 +62,12 @@
     <p:sldId id="311" r:id="rId61"/>
     <p:sldId id="312" r:id="rId62"/>
     <p:sldId id="313" r:id="rId63"/>
-    <p:sldId id="314" r:id="rId64"/>
-    <p:sldId id="315" r:id="rId65"/>
     <p:sldId id="316" r:id="rId66"/>
-    <p:sldId id="317" r:id="rId67"/>
-    <p:sldId id="318" r:id="rId68"/>
     <p:sldId id="319" r:id="rId69"/>
     <p:sldId id="320" r:id="rId70"/>
     <p:sldId id="321" r:id="rId71"/>
     <p:sldId id="322" r:id="rId72"/>
     <p:sldId id="323" r:id="rId73"/>
-    <p:sldId id="324" r:id="rId74"/>
   </p:sldIdLst>
   <p:sldSz cx="9144000" cy="5143500" type="screen16x9"/>
   <p:notesSz cx="6858000" cy="9144000"/>
@@ -7766,18 +7760,7 @@
                 <a:ea typeface="Noto Sans CJK JP"/>
                 <a:cs typeface="Noto Sans"/>
               </a:rPr>
-              <a:t>[1] Shen et al. Multi-LexSum v20220616, 公開testレコード。 EE-KS-0025 / test / Short→Tiny</a:t>
-            </a:r>
-            <a:r>
-              <a:rPr sz="810" b="0" lang="ja-JP" altLang="en-US">
-                <a:solidFill>
-                  <a:srgbClr val="626669"/>
-                </a:solidFill>
-                <a:latin typeface="Noto Sans"/>
-                <a:ea typeface="Noto Sans CJK JP"/>
-                <a:cs typeface="Noto Sans"/>
-              </a:rPr>
-              <a:t>  </a:t>
+              <a:t>[1] Shen et al. Multi-LexSum (2022).  </a:t>
             </a:r>
             <a:r>
               <a:rPr sz="810" b="0" lang="ja-JP" altLang="en-US">
@@ -8193,18 +8176,7 @@
                 <a:ea typeface="Noto Sans CJK JP"/>
                 <a:cs typeface="Noto Sans"/>
               </a:rPr>
-              <a:t>[1] Shen et al. Multi-LexSum v20220616, 公開testレコード。 EE-KS-0025 / test / Short→Tiny</a:t>
-            </a:r>
-            <a:r>
-              <a:rPr sz="810" b="0" lang="ja-JP" altLang="en-US">
-                <a:solidFill>
-                  <a:srgbClr val="626669"/>
-                </a:solidFill>
-                <a:latin typeface="Noto Sans"/>
-                <a:ea typeface="Noto Sans CJK JP"/>
-                <a:cs typeface="Noto Sans"/>
-              </a:rPr>
-              <a:t>  </a:t>
+              <a:t>[1] Shen et al. Multi-LexSum (2022).  </a:t>
             </a:r>
             <a:r>
               <a:rPr sz="810" b="0" lang="ja-JP" altLang="en-US">
@@ -8620,18 +8592,7 @@
                 <a:ea typeface="Noto Sans CJK JP"/>
                 <a:cs typeface="Noto Sans"/>
               </a:rPr>
-              <a:t>[1] Shen et al. Multi-LexSum v20220616, 公開testレコード。 PA-FL-0001 / test / Short→Tiny</a:t>
-            </a:r>
-            <a:r>
-              <a:rPr sz="810" b="0" lang="ja-JP" altLang="en-US">
-                <a:solidFill>
-                  <a:srgbClr val="626669"/>
-                </a:solidFill>
-                <a:latin typeface="Noto Sans"/>
-                <a:ea typeface="Noto Sans CJK JP"/>
-                <a:cs typeface="Noto Sans"/>
-              </a:rPr>
-              <a:t>  </a:t>
+              <a:t>[1] Shen et al. Multi-LexSum (2022).  </a:t>
             </a:r>
             <a:r>
               <a:rPr sz="810" b="0" lang="ja-JP" altLang="en-US">
@@ -9047,18 +9008,7 @@
                 <a:ea typeface="Noto Sans CJK JP"/>
                 <a:cs typeface="Noto Sans"/>
               </a:rPr>
-              <a:t>[1] Shen et al. Multi-LexSum v20220616, 公開testレコード。 PA-FL-0001 / test / Short→Tiny</a:t>
-            </a:r>
-            <a:r>
-              <a:rPr sz="810" b="0" lang="ja-JP" altLang="en-US">
-                <a:solidFill>
-                  <a:srgbClr val="626669"/>
-                </a:solidFill>
-                <a:latin typeface="Noto Sans"/>
-                <a:ea typeface="Noto Sans CJK JP"/>
-                <a:cs typeface="Noto Sans"/>
-              </a:rPr>
-              <a:t>  </a:t>
+              <a:t>[1] Shen et al. Multi-LexSum (2022).  </a:t>
             </a:r>
             <a:r>
               <a:rPr sz="810" b="0" lang="ja-JP" altLang="en-US">
@@ -9189,7 +9139,7 @@
                 <a:ea typeface="Noto Sans CJK JP"/>
                 <a:cs typeface="Noto Sans"/>
               </a:rPr>
-              <a:t>実例2のShortは集団を「1,700人弱」と書くが、Tinyは1,697人と特定する。Tinyは、Shortの語句を機械的に縮めた文ではない。</a:t>
+              <a:t>実例2のShortは集団を「1,700人弱」と書くが、Tinyは1,697人と特定する。Tinyは、Shortとは別に事件の情報を要約した文である。</a:t>
             </a:r>
           </a:p>
           <a:p>
@@ -9219,7 +9169,7 @@
                 <a:ea typeface="Noto Sans CJK JP"/>
                 <a:cs typeface="Noto Sans"/>
               </a:rPr>
-              <a:t>実例3のShortには方針変更と取下げまであるが、Tinyは乗船券の拒否と訴訟提起に絞る。参照文との一致と、事件の最新状況を正しく伝えることは分けて読む。</a:t>
+              <a:t>実例3のShortには方針変更と取下げまであるが、Tinyは乗船券の拒否と訴訟提起に絞る。参照要約には、事件の異なる時点や詳しさが反映される。</a:t>
             </a:r>
           </a:p>
         </p:txBody>
@@ -9321,18 +9271,7 @@
                 <a:ea typeface="Noto Sans CJK JP"/>
                 <a:cs typeface="Noto Sans"/>
               </a:rPr>
-              <a:t>[1] Shen et al. Multi-LexSum v20220616, 公開testレコード。</a:t>
-            </a:r>
-            <a:r>
-              <a:rPr sz="810" b="0" lang="ja-JP" altLang="en-US">
-                <a:solidFill>
-                  <a:srgbClr val="626669"/>
-                </a:solidFill>
-                <a:latin typeface="Noto Sans"/>
-                <a:ea typeface="Noto Sans CJK JP"/>
-                <a:cs typeface="Noto Sans"/>
-              </a:rPr>
-              <a:t>  </a:t>
+              <a:t>[1] Shen et al. Multi-LexSum (2022).  </a:t>
             </a:r>
             <a:r>
               <a:rPr sz="810" b="0" lang="ja-JP" altLang="en-US">
@@ -11001,7 +10940,7 @@
                 <a:ea typeface="Noto Sans CJK JP"/>
                 <a:cs typeface="Noto Sans"/>
               </a:rPr>
-              <a:t>事件数・文書数・要約数を区別する</a:t>
+              <a:t>4,539事件に、9,280件の要約がある</a:t>
             </a:r>
           </a:p>
         </p:txBody>
@@ -11763,7 +11702,7 @@
                 <a:ea typeface="Noto Sans CJK JP"/>
                 <a:cs typeface="Noto Sans"/>
               </a:rPr>
-              <a:t>v20220616全分割の実集計。要約は計9,280件。</a:t>
+              <a:t>2022年版。Longは全事件にあり、ShortとTinyは一部の事件にある。</a:t>
             </a:r>
           </a:p>
         </p:txBody>
@@ -11817,18 +11756,7 @@
                 <a:ea typeface="Noto Sans CJK JP"/>
                 <a:cs typeface="Noto Sans"/>
               </a:rPr>
-              <a:t>[1] Shen et al. Multi-LexSum v20220616, 公開testレコード。</a:t>
-            </a:r>
-            <a:r>
-              <a:rPr sz="810" b="0" lang="ja-JP" altLang="en-US">
-                <a:solidFill>
-                  <a:srgbClr val="626669"/>
-                </a:solidFill>
-                <a:latin typeface="Noto Sans"/>
-                <a:ea typeface="Noto Sans CJK JP"/>
-                <a:cs typeface="Noto Sans"/>
-              </a:rPr>
-              <a:t>  </a:t>
+              <a:t>[1] Shen et al. Multi-LexSum (2022).  </a:t>
             </a:r>
             <a:r>
               <a:rPr sz="810" b="0" lang="ja-JP" altLang="en-US">
@@ -12032,18 +11960,7 @@
                 <a:ea typeface="Noto Sans CJK JP"/>
                 <a:cs typeface="Noto Sans"/>
               </a:rPr>
-              <a:t>[1] Multi-LexSum. 公式サイト。2026-10-18確認。</a:t>
-            </a:r>
-            <a:r>
-              <a:rPr sz="810" b="0" lang="ja-JP" altLang="en-US">
-                <a:solidFill>
-                  <a:srgbClr val="626669"/>
-                </a:solidFill>
-                <a:latin typeface="Noto Sans"/>
-                <a:ea typeface="Noto Sans CJK JP"/>
-                <a:cs typeface="Noto Sans"/>
-              </a:rPr>
-              <a:t>  </a:t>
+              <a:t>[1] Multi-LexSum. 公式サイト。  </a:t>
             </a:r>
             <a:r>
               <a:rPr sz="810" b="0" lang="ja-JP" altLang="en-US">
@@ -12121,7 +12038,7 @@
                 <a:ea typeface="Noto Sans CJK JP"/>
                 <a:cs typeface="Noto Sans"/>
               </a:rPr>
-              <a:t>同じ事件をまたがない単位で分割する</a:t>
+              <a:t>事件ごとに、学習・検証・テストへ分ける</a:t>
             </a:r>
           </a:p>
         </p:txBody>
@@ -13159,18 +13076,7 @@
                 <a:ea typeface="Noto Sans CJK JP"/>
                 <a:cs typeface="Noto Sans"/>
               </a:rPr>
-              <a:t>[1] Shen et al. Multi-LexSum v20220616, 公開testレコード。</a:t>
-            </a:r>
-            <a:r>
-              <a:rPr sz="810" b="0" lang="ja-JP" altLang="en-US">
-                <a:solidFill>
-                  <a:srgbClr val="626669"/>
-                </a:solidFill>
-                <a:latin typeface="Noto Sans"/>
-                <a:ea typeface="Noto Sans CJK JP"/>
-                <a:cs typeface="Noto Sans"/>
-              </a:rPr>
-              <a:t>  </a:t>
+              <a:t>[1] Shen et al. Multi-LexSum (2022).  </a:t>
             </a:r>
             <a:r>
               <a:rPr sz="810" b="0" lang="ja-JP" altLang="en-US">
@@ -13301,7 +13207,7 @@
                 <a:ea typeface="Noto Sans CJK JP"/>
                 <a:cs typeface="Noto Sans"/>
               </a:rPr>
-              <a:t>原文書群は1事件あたり平均約75,500語。Longの平均は約650語、Shortは約130語、Tinyは約25語である。これらは公表されたspaCyによる集計値。</a:t>
+              <a:t>原文書群は1事件あたり平均約75,500語。Longの平均は約650語、Shortは約130語、Tinyは約25語である。</a:t>
             </a:r>
           </a:p>
           <a:p>
@@ -13331,7 +13237,7 @@
                 <a:ea typeface="Noto Sans CJK JP"/>
                 <a:cs typeface="Noto Sans"/>
               </a:rPr>
-              <a:t>長い訴訟の中から、当事者・主張・決定・結果をつなげる必要がある。単に各文書の冒頭を抜き出すだけでは、後の和解や命令を落としやすい。</a:t>
+              <a:t>長い訴訟の中から、当事者・主張・決定・結果をつなげる必要がある。各文書の冒頭だけでは、その後の和解や命令を落としやすい。</a:t>
             </a:r>
           </a:p>
           <a:p>
@@ -13361,7 +13267,7 @@
                 <a:ea typeface="Noto Sans CJK JP"/>
                 <a:cs typeface="Noto Sans"/>
               </a:rPr>
-              <a:t>オンラインで訴訟記録を入手できる連邦事件が対象。原告が勝つ事件が集まりやすく、あらゆる裁判の分布を表すわけではない。</a:t>
+              <a:t>オンラインで訴訟記録を入手できる連邦事件が対象。原告が勝つ事件が集まりやすく、事件の構成には偏りがある。</a:t>
             </a:r>
           </a:p>
         </p:txBody>
@@ -16046,7 +15952,7 @@
                 <a:ea typeface="Noto Sans CJK JP"/>
                 <a:cs typeface="Noto Sans"/>
               </a:rPr>
-              <a:t>文脈長・学習・生成条件を結果と対応させる</a:t>
+              <a:t>モデルの文脈長が、読める文書の範囲を決める</a:t>
             </a:r>
           </a:p>
         </p:txBody>
@@ -16129,37 +16035,7 @@
                 <a:ea typeface="Noto Sans CJK JP"/>
                 <a:cs typeface="Noto Sans"/>
               </a:rPr>
-              <a:t>各課題へ追加学習し、本文の基本条件は6エポック・学習率5×10⁻⁵。長文モデルの細かな設定は別途調整された。生成時はビーム数5で、4-gram以上の反復を抑える。</a:t>
-            </a:r>
-          </a:p>
-          <a:p>
-            <a:pPr marL="457200" indent="-355600">
-              <a:lnSpc>
-                <a:spcPts val="2320"/>
-              </a:lnSpc>
-              <a:spcAft>
-                <a:spcPts val="0"/>
-              </a:spcAft>
-              <a:buSzPct val="68205"/>
-              <a:buFont typeface="Noto Sans CJK JP"/>
-              <a:buChar char="●"/>
-              <a:defRPr sz="1950" b="0">
-                <a:solidFill>
-                  <a:srgbClr val="303437"/>
-                </a:solidFill>
-                <a:latin typeface="Noto Sans"/>
-              </a:defRPr>
-            </a:pPr>
-            <a:r>
-              <a:rPr sz="1950" b="0" lang="ja-JP" altLang="en-US">
-                <a:solidFill>
-                  <a:srgbClr val="303437"/>
-                </a:solidFill>
-                <a:latin typeface="Noto Sans"/>
-                <a:ea typeface="Noto Sans CJK JP"/>
-                <a:cs typeface="Noto Sans"/>
-              </a:rPr>
-              <a:t>原文書からの生成と、人が書いた要約の圧縮は入力条件が違う。同じ列の得点として混ぜず、用途に対応させて比較する。</a:t>
+              <a:t>モデルは、それぞれの要約課題で追加学習した。複数文書からの生成と、人が書いた要約の圧縮では、入力に含まれる情報量が大きく異なる。</a:t>
             </a:r>
           </a:p>
         </p:txBody>
@@ -16666,7 +16542,7 @@
                 <a:ea typeface="Noto Sans CJK JP"/>
                 <a:cs typeface="Noto Sans"/>
               </a:rPr>
-              <a:t>HELMの設定と現在の配布</a:t>
+              <a:t>公開配布と利用条件</a:t>
             </a:r>
           </a:p>
         </p:txBody>
@@ -16714,317 +16590,7 @@
                 <a:ea typeface="Noto Sans CJK JP"/>
                 <a:cs typeface="Noto Sans"/>
               </a:rPr>
-              <a:t>4. HELMの設定と現在の配布</a:t>
-            </a:r>
-          </a:p>
-        </p:txBody>
-      </p:sp>
-    </p:spTree>
-  </p:cSld>
-  <p:clrMapOvr>
-    <a:masterClrMapping/>
-  </p:clrMapOvr>
-</p:sld>
-</file>
-
-<file path=ppt/slides/slide29.xml><?xml version="1.0" encoding="utf-8"?>
-<p:sld xmlns:a="http://schemas.openxmlformats.org/drawingml/2006/main" xmlns:p="http://schemas.openxmlformats.org/presentationml/2006/main" xmlns:r="http://schemas.openxmlformats.org/officeDocument/2006/relationships">
-  <p:cSld>
-    <p:spTree>
-      <p:nvGrpSpPr>
-        <p:cNvPr id="1" name=""/>
-        <p:cNvGrpSpPr/>
-        <p:nvPr/>
-      </p:nvGrpSpPr>
-      <p:grpSpPr/>
-      <p:sp>
-        <p:nvSpPr>
-          <p:cNvPr id="2" name="Title 1"/>
-          <p:cNvSpPr>
-            <a:spLocks noGrp="1"/>
-          </p:cNvSpPr>
-          <p:nvPr>
-            <p:ph type="title"/>
-          </p:nvPr>
-        </p:nvSpPr>
-        <p:spPr>
-          <a:xfrm>
-            <a:off x="468172" y="650138"/>
-            <a:ext cx="8206740" cy="616305"/>
-          </a:xfrm>
-        </p:spPr>
-        <p:txBody>
-          <a:bodyPr wrap="square" lIns="0" rIns="0" tIns="0" bIns="0">
-            <a:noAutofit/>
-          </a:bodyPr>
-          <a:lstStyle/>
-          <a:p>
-            <a:pPr algn="l">
-              <a:lnSpc>
-                <a:spcPct val="110000"/>
-              </a:lnSpc>
-              <a:buNone/>
-              <a:defRPr sz="2800" b="0">
-                <a:solidFill>
-                  <a:srgbClr val="303437"/>
-                </a:solidFill>
-                <a:latin typeface="Noto Sans"/>
-              </a:defRPr>
-            </a:pPr>
-            <a:r>
-              <a:rPr sz="2800" b="1" lang="ja-JP" altLang="en-US">
-                <a:solidFill>
-                  <a:srgbClr val="303437"/>
-                </a:solidFill>
-                <a:latin typeface="Noto Sans"/>
-                <a:ea typeface="Noto Sans CJK JP"/>
-                <a:cs typeface="Noto Sans"/>
-              </a:rPr>
-              <a:t>HELMは、LongをShortへ要約する</a:t>
-            </a:r>
-          </a:p>
-        </p:txBody>
-      </p:sp>
-      <p:sp>
-        <p:nvSpPr>
-          <p:cNvPr id="3" name="Text Placeholder 2"/>
-          <p:cNvSpPr>
-            <a:spLocks noGrp="1"/>
-          </p:cNvSpPr>
-          <p:nvPr>
-            <p:ph type="body" idx="1"/>
-          </p:nvPr>
-        </p:nvSpPr>
-        <p:spPr>
-          <a:xfrm>
-            <a:off x="594360" y="1463040"/>
-            <a:ext cx="7955279" cy="3044952"/>
-          </a:xfrm>
-        </p:spPr>
-        <p:txBody>
-          <a:bodyPr wrap="square" tIns="91440" bIns="91440">
-            <a:noAutofit/>
-          </a:bodyPr>
-          <a:lstStyle/>
-          <a:p>
-            <a:pPr marL="457200" indent="-355600">
-              <a:lnSpc>
-                <a:spcPts val="2320"/>
-              </a:lnSpc>
-              <a:spcAft>
-                <a:spcPts val="700"/>
-              </a:spcAft>
-              <a:buSzPct val="68205"/>
-              <a:buFont typeface="Noto Sans CJK JP"/>
-              <a:buChar char="●"/>
-              <a:defRPr sz="1950" b="0">
-                <a:solidFill>
-                  <a:srgbClr val="303437"/>
-                </a:solidFill>
-                <a:latin typeface="Noto Sans"/>
-              </a:defRPr>
-            </a:pPr>
-            <a:r>
-              <a:rPr sz="1950" b="0" lang="ja-JP" altLang="en-US">
-                <a:solidFill>
-                  <a:srgbClr val="303437"/>
-                </a:solidFill>
-                <a:latin typeface="Noto Sans"/>
-                <a:ea typeface="Noto Sans CJK JP"/>
-                <a:cs typeface="Noto Sans"/>
-              </a:rPr>
-              <a:t>HELM v0.4.0は、MultiLexSumを共通のLegalSummarizationScenarioで受け付ける。v20220616を読み、入力をsummary/long、参照をsummary/shortにする。</a:t>
-            </a:r>
-          </a:p>
-          <a:p>
-            <a:pPr marL="457200" indent="-355600">
-              <a:lnSpc>
-                <a:spcPts val="2320"/>
-              </a:lnSpc>
-              <a:spcAft>
-                <a:spcPts val="700"/>
-              </a:spcAft>
-              <a:buSzPct val="68205"/>
-              <a:buFont typeface="Noto Sans CJK JP"/>
-              <a:buChar char="●"/>
-              <a:defRPr sz="1950" b="0">
-                <a:solidFill>
-                  <a:srgbClr val="303437"/>
-                </a:solidFill>
-                <a:latin typeface="Noto Sans"/>
-              </a:defRPr>
-            </a:pPr>
-            <a:r>
-              <a:rPr sz="1950" b="0" lang="ja-JP" altLang="en-US">
-                <a:solidFill>
-                  <a:srgbClr val="303437"/>
-                </a:solidFill>
-                <a:latin typeface="Noto Sans"/>
-                <a:ea typeface="Noto Sans CJK JP"/>
-                <a:cs typeface="Noto Sans"/>
-              </a:rPr>
-              <a:t>Shortが空の事件は除く。改行を空白に変えて空白区切りで整形し、doc_max_lengthを指定すれば入力をその語数で切る。学習用の長さ範囲による抽出も設定できる。</a:t>
-            </a:r>
-          </a:p>
-          <a:p>
-            <a:pPr marL="457200" indent="-355600">
-              <a:lnSpc>
-                <a:spcPts val="2320"/>
-              </a:lnSpc>
-              <a:spcAft>
-                <a:spcPts val="0"/>
-              </a:spcAft>
-              <a:buSzPct val="68205"/>
-              <a:buFont typeface="Noto Sans CJK JP"/>
-              <a:buChar char="●"/>
-              <a:defRPr sz="1950" b="0">
-                <a:solidFill>
-                  <a:srgbClr val="303437"/>
-                </a:solidFill>
-                <a:latin typeface="Noto Sans"/>
-              </a:defRPr>
-            </a:pPr>
-            <a:r>
-              <a:rPr sz="1950" b="0" lang="ja-JP" altLang="en-US">
-                <a:solidFill>
-                  <a:srgbClr val="303437"/>
-                </a:solidFill>
-                <a:latin typeface="Noto Sans"/>
-                <a:ea typeface="Noto Sans CJK JP"/>
-                <a:cs typeface="Noto Sans"/>
-              </a:rPr>
-              <a:t>Classic v0.4.0の公開run_specsには、この課題の実行が0件だった。ここで示したモデル値はMulti-LexSumの2022年の実験結果である。</a:t>
-            </a:r>
-          </a:p>
-        </p:txBody>
-      </p:sp>
-      <p:sp>
-        <p:nvSpPr>
-          <p:cNvPr id="4" name="Title 3"/>
-          <p:cNvSpPr>
-            <a:spLocks noGrp="1"/>
-          </p:cNvSpPr>
-          <p:nvPr>
-            <p:ph type="title" idx="2"/>
-          </p:nvPr>
-        </p:nvSpPr>
-        <p:spPr>
-          <a:xfrm>
-            <a:off x="75895" y="0"/>
-            <a:ext cx="8115300" cy="480060"/>
-          </a:xfrm>
-        </p:spPr>
-        <p:txBody>
-          <a:bodyPr wrap="square" lIns="0" rIns="0" tIns="0" bIns="0" anchor="ctr">
-            <a:noAutofit/>
-          </a:bodyPr>
-          <a:lstStyle/>
-          <a:p>
-            <a:pPr algn="l">
-              <a:lnSpc>
-                <a:spcPct val="110000"/>
-              </a:lnSpc>
-              <a:buNone/>
-              <a:defRPr sz="1400" b="0">
-                <a:solidFill>
-                  <a:srgbClr val="303437"/>
-                </a:solidFill>
-                <a:latin typeface="Noto Sans"/>
-              </a:defRPr>
-            </a:pPr>
-            <a:r>
-              <a:rPr sz="1400" b="1" lang="ja-JP" altLang="en-US">
-                <a:solidFill>
-                  <a:srgbClr val="FFFEF8"/>
-                </a:solidFill>
-                <a:latin typeface="Noto Sans"/>
-                <a:ea typeface="Noto Sans CJK JP"/>
-                <a:cs typeface="Noto Sans"/>
-              </a:rPr>
-              <a:t>4. HELMの設定と現在の配布</a:t>
-            </a:r>
-          </a:p>
-        </p:txBody>
-      </p:sp>
-      <p:sp>
-        <p:nvSpPr>
-          <p:cNvPr id="5" name="sources"/>
-          <p:cNvSpPr txBox="1"/>
-          <p:nvPr/>
-        </p:nvSpPr>
-        <p:spPr>
-          <a:xfrm>
-            <a:off x="502920" y="4700016"/>
-            <a:ext cx="8183879" cy="530352"/>
-          </a:xfrm>
-          <a:prstGeom prst="rect">
-            <a:avLst/>
-          </a:prstGeom>
-          <a:noFill/>
-        </p:spPr>
-        <p:txBody>
-          <a:bodyPr wrap="square" lIns="0" rIns="0" tIns="0" bIns="0">
-            <a:noAutofit/>
-          </a:bodyPr>
-          <a:lstStyle/>
-          <a:p>
-            <a:pPr algn="l">
-              <a:lnSpc>
-                <a:spcPts val="940"/>
-              </a:lnSpc>
-              <a:spcBef>
-                <a:spcPts val="0"/>
-              </a:spcBef>
-              <a:spcAft>
-                <a:spcPts val="350"/>
-              </a:spcAft>
-              <a:buNone/>
-              <a:defRPr sz="810" b="0">
-                <a:solidFill>
-                  <a:srgbClr val="303437"/>
-                </a:solidFill>
-                <a:latin typeface="Noto Sans"/>
-              </a:defRPr>
-            </a:pPr>
-            <a:r>
-              <a:rPr sz="810" b="0" lang="ja-JP" altLang="en-US">
-                <a:solidFill>
-                  <a:srgbClr val="626669"/>
-                </a:solidFill>
-                <a:latin typeface="Noto Sans"/>
-                <a:ea typeface="Noto Sans CJK JP"/>
-                <a:cs typeface="Noto Sans"/>
-              </a:rPr>
-              <a:t>[1] Stanford CRFM. LegalSummarizationScenario, HELM v0.4.0.</a:t>
-            </a:r>
-          </a:p>
-          <a:p>
-            <a:pPr>
-              <a:lnSpc>
-                <a:spcPts val="940"/>
-              </a:lnSpc>
-              <a:spcAft>
-                <a:spcPts val="350"/>
-              </a:spcAft>
-              <a:buNone/>
-              <a:defRPr sz="810" b="0">
-                <a:solidFill>
-                  <a:srgbClr val="303437"/>
-                </a:solidFill>
-                <a:latin typeface="Noto Sans"/>
-              </a:defRPr>
-            </a:pPr>
-            <a:r>
-              <a:rPr sz="810" b="0" lang="ja-JP" altLang="en-US">
-                <a:solidFill>
-                  <a:srgbClr val="626669"/>
-                </a:solidFill>
-                <a:latin typeface="Noto Sans"/>
-                <a:ea typeface="Noto Sans CJK JP"/>
-                <a:cs typeface="Noto Sans"/>
-                <a:hlinkClick r:id="rId2"/>
-              </a:rPr>
-              <a:t>https://github.com/stanford-crfm/helm/blob/v0.4.0/src/helm/benchmark/scenarios/legal_summarization_scenario.py</a:t>
+              <a:t>4. 公開配布と利用条件</a:t>
             </a:r>
           </a:p>
         </p:txBody>
@@ -17233,7 +16799,7 @@
                 <a:ea typeface="Noto Sans CJK JP"/>
                 <a:cs typeface="Noto Sans"/>
               </a:rPr>
-              <a:t>HELMの設定と現在の配布</a:t>
+              <a:t>公開配布と利用条件</a:t>
             </a:r>
           </a:p>
         </p:txBody>
@@ -17400,7 +16966,7 @@
                 <a:ea typeface="Noto Sans CJK JP"/>
                 <a:cs typeface="Noto Sans"/>
               </a:rPr>
-              <a:t>v20220616が初期公開版。v20230518は、事件名・提訴日・事件URLなどの事件情報と、文書種別・題名・OCRかどうか・文書URLなどを追加したv1.1である。</a:t>
+              <a:t>2022年版が初期公開版。2023年版のv1.1は、事件名・提訴日・事件URLなどの事件情報と、文書種別・題名・OCRかどうか・文書URLなどを追加した。</a:t>
             </a:r>
           </a:p>
           <a:p>
@@ -17460,7 +17026,7 @@
                 <a:ea typeface="Noto Sans CJK JP"/>
                 <a:cs typeface="Noto Sans"/>
               </a:rPr>
-              <a:t>2026年10月18日に公式配布と実装を確認した。実例と集計はv20220616、現在の配布の説明はv1.1までを対象とする。</a:t>
+              <a:t>ここで示す実例と集計は2022年版、現在の配布の説明はv1.1までを対象とする。</a:t>
             </a:r>
           </a:p>
         </p:txBody>
@@ -17508,7 +17074,7 @@
                 <a:ea typeface="Noto Sans CJK JP"/>
                 <a:cs typeface="Noto Sans"/>
               </a:rPr>
-              <a:t>4. HELMの設定と現在の配布</a:t>
+              <a:t>4. 公開配布と利用条件</a:t>
             </a:r>
           </a:p>
         </p:txBody>
@@ -17785,7 +17351,7 @@
                 <a:ea typeface="Noto Sans CJK JP"/>
                 <a:cs typeface="Noto Sans"/>
               </a:rPr>
-              <a:t>商用利用者向けの別ライセンスはClearinghouseへ連絡する方式で、要約の再掲載に条件がある。データカードのODC-Byだけで要約本文の条件を代替しない。</a:t>
+              <a:t>要約を商用利用する場合の別ライセンスは、Clearinghouseへ連絡して確認する方式である。</a:t>
             </a:r>
           </a:p>
           <a:p>
@@ -17815,7 +17381,7 @@
                 <a:ea typeface="Noto Sans CJK JP"/>
                 <a:cs typeface="Noto Sans"/>
               </a:rPr>
-              <a:t>ダウンロードと読み込みのコードはApache-2.0。利用する本文・メタデータ・コードを区別して、対応する条件と帰属を確認する。</a:t>
+              <a:t>ダウンロードと読み込みのコードはApache-2.0。データベース・要約本文・コードのそれぞれに利用条件がある。</a:t>
             </a:r>
           </a:p>
         </p:txBody>
@@ -17863,7 +17429,7 @@
                 <a:ea typeface="Noto Sans CJK JP"/>
                 <a:cs typeface="Noto Sans"/>
               </a:rPr>
-              <a:t>4. HELMの設定と現在の配布</a:t>
+              <a:t>4. 公開配布と利用条件</a:t>
             </a:r>
           </a:p>
         </p:txBody>
@@ -18089,7 +17655,7 @@
                 <a:ea typeface="Noto Sans CJK JP"/>
                 <a:cs typeface="Noto Sans"/>
               </a:rPr>
-              <a:t>4,539事件と9,280要約は異なる単位である。欠ける粒度、長い原文書、事件の偏りを踏まえ、入力と参照の組を選ぶ。</a:t>
+              <a:t>要約の種類によって利用できる事件数は異なる。長い原文書や事件の偏りも、このデータの特徴である。</a:t>
             </a:r>
           </a:p>
           <a:p>
@@ -18119,7 +17685,7 @@
                 <a:ea typeface="Noto Sans CJK JP"/>
                 <a:cs typeface="Noto Sans"/>
               </a:rPr>
-              <a:t>参照との重なりに加え、当事者・経過・結末の正しさと、人の作業に役立つかを評価する。HELMのLong→Shortも、この全体の一つの設定である。</a:t>
+              <a:t>参照との重なりに加え、当事者・経過・結末の正しさと、人の作業に役立つかを評価する。</a:t>
             </a:r>
           </a:p>
         </p:txBody>
@@ -18167,7 +17733,7 @@
                 <a:ea typeface="Noto Sans CJK JP"/>
                 <a:cs typeface="Noto Sans"/>
               </a:rPr>
-              <a:t>4. HELMの設定と現在の配布</a:t>
+              <a:t>4. 公開配布と利用条件</a:t>
             </a:r>
           </a:p>
         </p:txBody>
@@ -19109,18 +18675,7 @@
                 <a:ea typeface="Noto Sans CJK JP"/>
                 <a:cs typeface="Noto Sans"/>
               </a:rPr>
-              <a:t>[1] Shen et al. Multi-LexSum v20220616, 公開testレコード。 PN-PA-0023 / test / Short→Tiny</a:t>
-            </a:r>
-            <a:r>
-              <a:rPr sz="810" b="0" lang="ja-JP" altLang="en-US">
-                <a:solidFill>
-                  <a:srgbClr val="626669"/>
-                </a:solidFill>
-                <a:latin typeface="Noto Sans"/>
-                <a:ea typeface="Noto Sans CJK JP"/>
-                <a:cs typeface="Noto Sans"/>
-              </a:rPr>
-              <a:t>  </a:t>
+              <a:t>[1] Shen et al. Multi-LexSum (2022).  </a:t>
             </a:r>
             <a:r>
               <a:rPr sz="810" b="0" lang="ja-JP" altLang="en-US">
@@ -19536,18 +19091,7 @@
                 <a:ea typeface="Noto Sans CJK JP"/>
                 <a:cs typeface="Noto Sans"/>
               </a:rPr>
-              <a:t>[1] Shen et al. Multi-LexSum v20220616, 公開testレコード。 PN-PA-0023 / test / Short→Tiny</a:t>
-            </a:r>
-            <a:r>
-              <a:rPr sz="810" b="0" lang="ja-JP" altLang="en-US">
-                <a:solidFill>
-                  <a:srgbClr val="626669"/>
-                </a:solidFill>
-                <a:latin typeface="Noto Sans"/>
-                <a:ea typeface="Noto Sans CJK JP"/>
-                <a:cs typeface="Noto Sans"/>
-              </a:rPr>
-              <a:t>  </a:t>
+              <a:t>[1] Shen et al. Multi-LexSum (2022).  </a:t>
             </a:r>
             <a:r>
               <a:rPr sz="810" b="0" lang="ja-JP" altLang="en-US">
@@ -19963,18 +19507,7 @@
                 <a:ea typeface="Noto Sans CJK JP"/>
                 <a:cs typeface="Noto Sans"/>
               </a:rPr>
-              <a:t>[1] Shen et al. Multi-LexSum v20220616, 公開testレコード。 IM-DC-0035 / test / Short→Tiny</a:t>
-            </a:r>
-            <a:r>
-              <a:rPr sz="810" b="0" lang="ja-JP" altLang="en-US">
-                <a:solidFill>
-                  <a:srgbClr val="626669"/>
-                </a:solidFill>
-                <a:latin typeface="Noto Sans"/>
-                <a:ea typeface="Noto Sans CJK JP"/>
-                <a:cs typeface="Noto Sans"/>
-              </a:rPr>
-              <a:t>  </a:t>
+              <a:t>[1] Shen et al. Multi-LexSum (2022).  </a:t>
             </a:r>
             <a:r>
               <a:rPr sz="810" b="0" lang="ja-JP" altLang="en-US">
@@ -20390,18 +19923,7 @@
                 <a:ea typeface="Noto Sans CJK JP"/>
                 <a:cs typeface="Noto Sans"/>
               </a:rPr>
-              <a:t>[1] Shen et al. Multi-LexSum v20220616, 公開testレコード。 IM-DC-0035 / test / Short→Tiny</a:t>
-            </a:r>
-            <a:r>
-              <a:rPr sz="810" b="0" lang="ja-JP" altLang="en-US">
-                <a:solidFill>
-                  <a:srgbClr val="626669"/>
-                </a:solidFill>
-                <a:latin typeface="Noto Sans"/>
-                <a:ea typeface="Noto Sans CJK JP"/>
-                <a:cs typeface="Noto Sans"/>
-              </a:rPr>
-              <a:t>  </a:t>
+              <a:t>[1] Shen et al. Multi-LexSum (2022).  </a:t>
             </a:r>
             <a:r>
               <a:rPr sz="810" b="0" lang="ja-JP" altLang="en-US">
@@ -20931,18 +20453,7 @@
                 <a:ea typeface="Noto Sans CJK JP"/>
                 <a:cs typeface="Noto Sans"/>
               </a:rPr>
-              <a:t>[1] Shen et al. Multi-LexSum v20220616, 公開testレコード。 PN-OH-0010 / test / Short→Tiny</a:t>
-            </a:r>
-            <a:r>
-              <a:rPr sz="810" b="0" lang="ja-JP" altLang="en-US">
-                <a:solidFill>
-                  <a:srgbClr val="626669"/>
-                </a:solidFill>
-                <a:latin typeface="Noto Sans"/>
-                <a:ea typeface="Noto Sans CJK JP"/>
-                <a:cs typeface="Noto Sans"/>
-              </a:rPr>
-              <a:t>  </a:t>
+              <a:t>[1] Shen et al. Multi-LexSum (2022).  </a:t>
             </a:r>
             <a:r>
               <a:rPr sz="810" b="0" lang="ja-JP" altLang="en-US">
@@ -21264,7 +20775,7 @@
         <p:spPr>
           <a:xfrm>
             <a:off x="548640" y="2916385"/>
-            <a:ext cx="8046720" cy="985012"/>
+            <a:ext cx="8046720" cy="1239012"/>
           </a:xfrm>
           <a:prstGeom prst="rect">
             <a:avLst/>
@@ -21272,7 +20783,7 @@
           <a:noFill/>
         </p:spPr>
         <p:txBody>
-          <a:bodyPr wrap="square" lIns="0" rIns="0" tIns="0" bIns="0">
+          <a:bodyPr wrap="square" lIns="0" rIns="0" tIns="0" bIns="254000">
             <a:noAutofit/>
           </a:bodyPr>
           <a:lstStyle/>
@@ -21358,18 +20869,7 @@
                 <a:ea typeface="Noto Sans CJK JP"/>
                 <a:cs typeface="Noto Sans"/>
               </a:rPr>
-              <a:t>[1] Shen et al. Multi-LexSum v20220616, 公開testレコード。 PN-OH-0010 / test / Short→Tiny</a:t>
-            </a:r>
-            <a:r>
-              <a:rPr sz="810" b="0" lang="ja-JP" altLang="en-US">
-                <a:solidFill>
-                  <a:srgbClr val="626669"/>
-                </a:solidFill>
-                <a:latin typeface="Noto Sans"/>
-                <a:ea typeface="Noto Sans CJK JP"/>
-                <a:cs typeface="Noto Sans"/>
-              </a:rPr>
-              <a:t>  </a:t>
+              <a:t>[1] Shen et al. Multi-LexSum (2022).  </a:t>
             </a:r>
             <a:r>
               <a:rPr sz="810" b="0" lang="ja-JP" altLang="en-US">
@@ -21785,18 +21285,7 @@
                 <a:ea typeface="Noto Sans CJK JP"/>
                 <a:cs typeface="Noto Sans"/>
               </a:rPr>
-              <a:t>[1] Shen et al. Multi-LexSum v20220616, 公開testレコード。 EE-IN-0131 / test / Short→Tiny</a:t>
-            </a:r>
-            <a:r>
-              <a:rPr sz="810" b="0" lang="ja-JP" altLang="en-US">
-                <a:solidFill>
-                  <a:srgbClr val="626669"/>
-                </a:solidFill>
-                <a:latin typeface="Noto Sans"/>
-                <a:ea typeface="Noto Sans CJK JP"/>
-                <a:cs typeface="Noto Sans"/>
-              </a:rPr>
-              <a:t>  </a:t>
+              <a:t>[1] Shen et al. Multi-LexSum (2022).  </a:t>
             </a:r>
             <a:r>
               <a:rPr sz="810" b="0" lang="ja-JP" altLang="en-US">
@@ -22050,7 +21539,7 @@
                 <a:ea typeface="Noto Sans CJK JP"/>
                 <a:cs typeface="Noto Sans"/>
               </a:rPr>
-              <a:t>2013年12月、雇用機会均等委員会は、性差別を同委員会へ申し立てた女性従業員を監視・懲戒・解雇したとしてBright Petroleumを訴えた。2014年12月12日に、両者の間で3年間の同意判決が成立した。</a:t>
+              <a:t>2013年12月、雇用機会均等委員会は、性差別を同委員会へ申し立てた女性従業員を監視・懲戒・解雇したとしてBright Petroleumを訴えた。2014年12月12日に、両者の間で3年間有効な同意判決が成立した。</a:t>
             </a:r>
           </a:p>
         </p:txBody>
@@ -22158,7 +21647,7 @@
                 <a:ea typeface="Noto Sans CJK JP"/>
                 <a:cs typeface="Noto Sans"/>
               </a:rPr>
-              <a:t>雇用機会均等委員会が2013年12月にBright Petroleumを報復的解雇で訴え、2014年に同意判決へ到達した（インディアナ南部地区）。</a:t>
+              <a:t>雇用機会均等委員会が2013年12月にBright Petroleumを報復的解雇で訴え、2014年に同意判決が成立した（インディアナ南部地区）。</a:t>
             </a:r>
           </a:p>
         </p:txBody>
@@ -22212,18 +21701,7 @@
                 <a:ea typeface="Noto Sans CJK JP"/>
                 <a:cs typeface="Noto Sans"/>
               </a:rPr>
-              <a:t>[1] Shen et al. Multi-LexSum v20220616, 公開testレコード。 EE-IN-0131 / test / Short→Tiny</a:t>
-            </a:r>
-            <a:r>
-              <a:rPr sz="810" b="0" lang="ja-JP" altLang="en-US">
-                <a:solidFill>
-                  <a:srgbClr val="626669"/>
-                </a:solidFill>
-                <a:latin typeface="Noto Sans"/>
-                <a:ea typeface="Noto Sans CJK JP"/>
-                <a:cs typeface="Noto Sans"/>
-              </a:rPr>
-              <a:t>  </a:t>
+              <a:t>[1] Shen et al. Multi-LexSum (2022).  </a:t>
             </a:r>
             <a:r>
               <a:rPr sz="810" b="0" lang="ja-JP" altLang="en-US">
@@ -22639,18 +22117,7 @@
                 <a:ea typeface="Noto Sans CJK JP"/>
                 <a:cs typeface="Noto Sans"/>
               </a:rPr>
-              <a:t>[1] Shen et al. Multi-LexSum v20220616, 公開testレコード。 NS-DC-0106 / test / Short→Tiny</a:t>
-            </a:r>
-            <a:r>
-              <a:rPr sz="810" b="0" lang="ja-JP" altLang="en-US">
-                <a:solidFill>
-                  <a:srgbClr val="626669"/>
-                </a:solidFill>
-                <a:latin typeface="Noto Sans"/>
-                <a:ea typeface="Noto Sans CJK JP"/>
-                <a:cs typeface="Noto Sans"/>
-              </a:rPr>
-              <a:t>  </a:t>
+              <a:t>[1] Shen et al. Multi-LexSum (2022).  </a:t>
             </a:r>
             <a:r>
               <a:rPr sz="810" b="0" lang="ja-JP" altLang="en-US">
@@ -23066,18 +22533,7 @@
                 <a:ea typeface="Noto Sans CJK JP"/>
                 <a:cs typeface="Noto Sans"/>
               </a:rPr>
-              <a:t>[1] Shen et al. Multi-LexSum v20220616, 公開testレコード。 NS-DC-0106 / test / Short→Tiny</a:t>
-            </a:r>
-            <a:r>
-              <a:rPr sz="810" b="0" lang="ja-JP" altLang="en-US">
-                <a:solidFill>
-                  <a:srgbClr val="626669"/>
-                </a:solidFill>
-                <a:latin typeface="Noto Sans"/>
-                <a:ea typeface="Noto Sans CJK JP"/>
-                <a:cs typeface="Noto Sans"/>
-              </a:rPr>
-              <a:t>  </a:t>
+              <a:t>[1] Shen et al. Multi-LexSum (2022).  </a:t>
             </a:r>
             <a:r>
               <a:rPr sz="810" b="0" lang="ja-JP" altLang="en-US">
@@ -23493,18 +22949,7 @@
                 <a:ea typeface="Noto Sans CJK JP"/>
                 <a:cs typeface="Noto Sans"/>
               </a:rPr>
-              <a:t>[1] Shen et al. Multi-LexSum v20220616, 公開testレコード。 NS-VA-0007 / test / Short→Tiny</a:t>
-            </a:r>
-            <a:r>
-              <a:rPr sz="810" b="0" lang="ja-JP" altLang="en-US">
-                <a:solidFill>
-                  <a:srgbClr val="626669"/>
-                </a:solidFill>
-                <a:latin typeface="Noto Sans"/>
-                <a:ea typeface="Noto Sans CJK JP"/>
-                <a:cs typeface="Noto Sans"/>
-              </a:rPr>
-              <a:t>  </a:t>
+              <a:t>[1] Shen et al. Multi-LexSum (2022).  </a:t>
             </a:r>
             <a:r>
               <a:rPr sz="810" b="0" lang="ja-JP" altLang="en-US">
@@ -23920,18 +23365,7 @@
                 <a:ea typeface="Noto Sans CJK JP"/>
                 <a:cs typeface="Noto Sans"/>
               </a:rPr>
-              <a:t>[1] Shen et al. Multi-LexSum v20220616, 公開testレコード。 NS-VA-0007 / test / Short→Tiny</a:t>
-            </a:r>
-            <a:r>
-              <a:rPr sz="810" b="0" lang="ja-JP" altLang="en-US">
-                <a:solidFill>
-                  <a:srgbClr val="626669"/>
-                </a:solidFill>
-                <a:latin typeface="Noto Sans"/>
-                <a:ea typeface="Noto Sans CJK JP"/>
-                <a:cs typeface="Noto Sans"/>
-              </a:rPr>
-              <a:t>  </a:t>
+              <a:t>[1] Shen et al. Multi-LexSum (2022).  </a:t>
             </a:r>
             <a:r>
               <a:rPr sz="810" b="0" lang="ja-JP" altLang="en-US">
@@ -24347,18 +23781,7 @@
                 <a:ea typeface="Noto Sans CJK JP"/>
                 <a:cs typeface="Noto Sans"/>
               </a:rPr>
-              <a:t>[1] Shen et al. Multi-LexSum v20220616, 公開testレコード。 CJ-OK-0006 / test / Short→Tiny</a:t>
-            </a:r>
-            <a:r>
-              <a:rPr sz="810" b="0" lang="ja-JP" altLang="en-US">
-                <a:solidFill>
-                  <a:srgbClr val="626669"/>
-                </a:solidFill>
-                <a:latin typeface="Noto Sans"/>
-                <a:ea typeface="Noto Sans CJK JP"/>
-                <a:cs typeface="Noto Sans"/>
-              </a:rPr>
-              <a:t>  </a:t>
+              <a:t>[1] Shen et al. Multi-LexSum (2022).  </a:t>
             </a:r>
             <a:r>
               <a:rPr sz="810" b="0" lang="ja-JP" altLang="en-US">
@@ -24612,7 +24035,7 @@
                 <a:ea typeface="Noto Sans CJK JP"/>
                 <a:cs typeface="Noto Sans"/>
               </a:rPr>
-              <a:t>Civil Rights Corpsは、保釈金を支払えるか確認せずに被逮捕者を拘束する、資力に基づく勾留制度があるとして、タルサ郡と複数の司法関係者を訴えた。仮差止めの申立ては却下されたが、集団認証の申立ては係属中。</a:t>
+              <a:t>Civil Rights Corpsは、保釈金を支払えるか確認せずに被逮捕者を拘束する、資力に基づく勾留制度があるとして、タルサ郡と複数の司法関係者を訴えた。仮差止めの申立ては却下されたが、集団訴訟としての認定の申立ては係属中。</a:t>
             </a:r>
           </a:p>
         </p:txBody>
@@ -24774,18 +24197,7 @@
                 <a:ea typeface="Noto Sans CJK JP"/>
                 <a:cs typeface="Noto Sans"/>
               </a:rPr>
-              <a:t>[1] Shen et al. Multi-LexSum v20220616, 公開testレコード。 CJ-OK-0006 / test / Short→Tiny</a:t>
-            </a:r>
-            <a:r>
-              <a:rPr sz="810" b="0" lang="ja-JP" altLang="en-US">
-                <a:solidFill>
-                  <a:srgbClr val="626669"/>
-                </a:solidFill>
-                <a:latin typeface="Noto Sans"/>
-                <a:ea typeface="Noto Sans CJK JP"/>
-                <a:cs typeface="Noto Sans"/>
-              </a:rPr>
-              <a:t>  </a:t>
+              <a:t>[1] Shen et al. Multi-LexSum (2022).  </a:t>
             </a:r>
             <a:r>
               <a:rPr sz="810" b="0" lang="ja-JP" altLang="en-US">
@@ -25511,18 +24923,7 @@
                 <a:ea typeface="Noto Sans CJK JP"/>
                 <a:cs typeface="Noto Sans"/>
               </a:rPr>
-              <a:t>[1] Shen et al. Multi-LexSum v20220616, 公開testレコード。 ED-DC-0007 / test / Short→Tiny</a:t>
-            </a:r>
-            <a:r>
-              <a:rPr sz="810" b="0" lang="ja-JP" altLang="en-US">
-                <a:solidFill>
-                  <a:srgbClr val="626669"/>
-                </a:solidFill>
-                <a:latin typeface="Noto Sans"/>
-                <a:ea typeface="Noto Sans CJK JP"/>
-                <a:cs typeface="Noto Sans"/>
-              </a:rPr>
-              <a:t>  </a:t>
+              <a:t>[1] Shen et al. Multi-LexSum (2022).  </a:t>
             </a:r>
             <a:r>
               <a:rPr sz="810" b="0" lang="ja-JP" altLang="en-US">
@@ -25938,18 +25339,7 @@
                 <a:ea typeface="Noto Sans CJK JP"/>
                 <a:cs typeface="Noto Sans"/>
               </a:rPr>
-              <a:t>[1] Shen et al. Multi-LexSum v20220616, 公開testレコード。 ED-DC-0007 / test / Short→Tiny</a:t>
-            </a:r>
-            <a:r>
-              <a:rPr sz="810" b="0" lang="ja-JP" altLang="en-US">
-                <a:solidFill>
-                  <a:srgbClr val="626669"/>
-                </a:solidFill>
-                <a:latin typeface="Noto Sans"/>
-                <a:ea typeface="Noto Sans CJK JP"/>
-                <a:cs typeface="Noto Sans"/>
-              </a:rPr>
-              <a:t>  </a:t>
+              <a:t>[1] Shen et al. Multi-LexSum (2022).  </a:t>
             </a:r>
             <a:r>
               <a:rPr sz="810" b="0" lang="ja-JP" altLang="en-US">
@@ -26365,18 +25755,7 @@
                 <a:ea typeface="Noto Sans CJK JP"/>
                 <a:cs typeface="Noto Sans"/>
               </a:rPr>
-              <a:t>[1] Shen et al. Multi-LexSum v20220616, 公開testレコード。 IM-MD-0016 / test / Short→Tiny</a:t>
-            </a:r>
-            <a:r>
-              <a:rPr sz="810" b="0" lang="ja-JP" altLang="en-US">
-                <a:solidFill>
-                  <a:srgbClr val="626669"/>
-                </a:solidFill>
-                <a:latin typeface="Noto Sans"/>
-                <a:ea typeface="Noto Sans CJK JP"/>
-                <a:cs typeface="Noto Sans"/>
-              </a:rPr>
-              <a:t>  </a:t>
+              <a:t>[1] Shen et al. Multi-LexSum (2022).  </a:t>
             </a:r>
             <a:r>
               <a:rPr sz="810" b="0" lang="ja-JP" altLang="en-US">
@@ -26630,7 +26009,7 @@
                 <a:ea typeface="Noto Sans CJK JP"/>
                 <a:cs typeface="Noto Sans"/>
               </a:rPr>
-              <a:t>メリーランド州の移民・税関捜査局施設の被収容者が、釈放を求めた人身保護手続である。裁判所は当初、一時的差止命令の申立てを却下したが、後に2件の仮差止命令で複数人の釈放を命じた。集団認証の申立ても認めた。</a:t>
+              <a:t>メリーランド州の移民・税関捜査局施設の被収容者が、釈放を求めた人身保護手続である。裁判所は当初、一時的差止命令の申立てを却下したが、後に2件の仮差止命令で複数人の釈放を命じた。集団訴訟としての認定の申立ても認めた。</a:t>
             </a:r>
           </a:p>
         </p:txBody>
@@ -26792,18 +26171,7 @@
                 <a:ea typeface="Noto Sans CJK JP"/>
                 <a:cs typeface="Noto Sans"/>
               </a:rPr>
-              <a:t>[1] Shen et al. Multi-LexSum v20220616, 公開testレコード。 IM-MD-0016 / test / Short→Tiny</a:t>
-            </a:r>
-            <a:r>
-              <a:rPr sz="810" b="0" lang="ja-JP" altLang="en-US">
-                <a:solidFill>
-                  <a:srgbClr val="626669"/>
-                </a:solidFill>
-                <a:latin typeface="Noto Sans"/>
-                <a:ea typeface="Noto Sans CJK JP"/>
-                <a:cs typeface="Noto Sans"/>
-              </a:rPr>
-              <a:t>  </a:t>
+              <a:t>[1] Shen et al. Multi-LexSum (2022).  </a:t>
             </a:r>
             <a:r>
               <a:rPr sz="810" b="0" lang="ja-JP" altLang="en-US">
@@ -27219,18 +26587,7 @@
                 <a:ea typeface="Noto Sans CJK JP"/>
                 <a:cs typeface="Noto Sans"/>
               </a:rPr>
-              <a:t>[1] Shen et al. Multi-LexSum v20220616, 公開testレコード。 PN-CA-0053 / test / Short→Tiny</a:t>
-            </a:r>
-            <a:r>
-              <a:rPr sz="810" b="0" lang="ja-JP" altLang="en-US">
-                <a:solidFill>
-                  <a:srgbClr val="626669"/>
-                </a:solidFill>
-                <a:latin typeface="Noto Sans"/>
-                <a:ea typeface="Noto Sans CJK JP"/>
-                <a:cs typeface="Noto Sans"/>
-              </a:rPr>
-              <a:t>  </a:t>
+              <a:t>[1] Shen et al. Multi-LexSum (2022).  </a:t>
             </a:r>
             <a:r>
               <a:rPr sz="810" b="0" lang="ja-JP" altLang="en-US">
@@ -27646,18 +27003,7 @@
                 <a:ea typeface="Noto Sans CJK JP"/>
                 <a:cs typeface="Noto Sans"/>
               </a:rPr>
-              <a:t>[1] Shen et al. Multi-LexSum v20220616, 公開testレコード。 PN-CA-0053 / test / Short→Tiny</a:t>
-            </a:r>
-            <a:r>
-              <a:rPr sz="810" b="0" lang="ja-JP" altLang="en-US">
-                <a:solidFill>
-                  <a:srgbClr val="626669"/>
-                </a:solidFill>
-                <a:latin typeface="Noto Sans"/>
-                <a:ea typeface="Noto Sans CJK JP"/>
-                <a:cs typeface="Noto Sans"/>
-              </a:rPr>
-              <a:t>  </a:t>
+              <a:t>[1] Shen et al. Multi-LexSum (2022).  </a:t>
             </a:r>
             <a:r>
               <a:rPr sz="810" b="0" lang="ja-JP" altLang="en-US">
@@ -28887,18 +28233,7 @@
                 <a:ea typeface="Noto Sans CJK JP"/>
                 <a:cs typeface="Noto Sans"/>
               </a:rPr>
-              <a:t>[1] Shen et al. Multi-LexSum v20220616, 公開testレコード。</a:t>
-            </a:r>
-            <a:r>
-              <a:rPr sz="810" b="0" lang="ja-JP" altLang="en-US">
-                <a:solidFill>
-                  <a:srgbClr val="626669"/>
-                </a:solidFill>
-                <a:latin typeface="Noto Sans"/>
-                <a:ea typeface="Noto Sans CJK JP"/>
-                <a:cs typeface="Noto Sans"/>
-              </a:rPr>
-              <a:t>  </a:t>
+              <a:t>[1] Shen et al. Multi-LexSum (2022).  </a:t>
             </a:r>
             <a:r>
               <a:rPr sz="810" b="0" lang="ja-JP" altLang="en-US">
@@ -28976,7 +28311,7 @@
                 <a:ea typeface="Noto Sans CJK JP"/>
                 <a:cs typeface="Noto Sans"/>
               </a:rPr>
-              <a:t>分割はファイルで決まり、古い欄とは一致しない</a:t>
+              <a:t>分割は、公式ローダーが読むファイルに従う</a:t>
             </a:r>
           </a:p>
         </p:txBody>
@@ -29029,7 +28364,7 @@
                 <a:ea typeface="Noto Sans CJK JP"/>
                 <a:cs typeface="Noto Sans"/>
               </a:rPr>
-              <a:t>公式ローダーはtrain.json、dev.json、test.jsonを、それぞれtrain、validation、testとして読み込む。本資料もこの対応で実例を選定した。</a:t>
+              <a:t>公式ローダーはtrain.json、dev.json、test.jsonを、それぞれ学習用・検証用・テスト用として読む。</a:t>
             </a:r>
           </a:p>
           <a:p>
@@ -29059,37 +28394,7 @@
                 <a:ea typeface="Noto Sans CJK JP"/>
                 <a:cs typeface="Noto Sans"/>
               </a:rPr>
-              <a:t>v20220616のレコード内にはsubset欄も残るが、配布ファイルと一致しない。たとえばtest.jsonの908事件には、subsetがtrainの643件、devの153件、testの112件が含まれる。</a:t>
-            </a:r>
-          </a:p>
-          <a:p>
-            <a:pPr marL="457200" indent="-355600">
-              <a:lnSpc>
-                <a:spcPts val="2379"/>
-              </a:lnSpc>
-              <a:spcAft>
-                <a:spcPts val="0"/>
-              </a:spcAft>
-              <a:buSzPct val="66500"/>
-              <a:buFont typeface="Noto Sans CJK JP"/>
-              <a:buChar char="●"/>
-              <a:defRPr sz="2000" b="0">
-                <a:solidFill>
-                  <a:srgbClr val="303437"/>
-                </a:solidFill>
-                <a:latin typeface="Noto Sans"/>
-              </a:defRPr>
-            </a:pPr>
-            <a:r>
-              <a:rPr sz="2000" b="0" lang="ja-JP" altLang="en-US">
-                <a:solidFill>
-                  <a:srgbClr val="303437"/>
-                </a:solidFill>
-                <a:latin typeface="Noto Sans"/>
-                <a:ea typeface="Noto Sans CJK JP"/>
-                <a:cs typeface="Noto Sans"/>
-              </a:rPr>
-              <a:t>subset欄から再分割せず、実際に使った版・配布ファイル・事件IDを記録する。</a:t>
+              <a:t>2022年版のレコードには古いsubset欄も残り、この三つのファイルとは一致しない。モデルの学習や評価では、配布ファイルによる分割を使う。</a:t>
             </a:r>
           </a:p>
         </p:txBody>
@@ -29191,18 +28496,7 @@
                 <a:ea typeface="Noto Sans CJK JP"/>
                 <a:cs typeface="Noto Sans"/>
               </a:rPr>
-              <a:t>[1] Shen et al. Multi-LexSum v20220616, 公開testレコード。</a:t>
-            </a:r>
-            <a:r>
-              <a:rPr sz="810" b="0" lang="ja-JP" altLang="en-US">
-                <a:solidFill>
-                  <a:srgbClr val="626669"/>
-                </a:solidFill>
-                <a:latin typeface="Noto Sans"/>
-                <a:ea typeface="Noto Sans CJK JP"/>
-                <a:cs typeface="Noto Sans"/>
-              </a:rPr>
-              <a:t>  </a:t>
+              <a:t>[1] Shen et al. Multi-LexSum (2022).  </a:t>
             </a:r>
             <a:r>
               <a:rPr sz="810" b="0" lang="ja-JP" altLang="en-US">
@@ -29280,14 +28574,127 @@
                 <a:ea typeface="Noto Sans CJK JP"/>
                 <a:cs typeface="Noto Sans"/>
               </a:rPr>
-              <a:t>語数は、数え方と対象を添えて読む</a:t>
-            </a:r>
-          </a:p>
-        </p:txBody>
-      </p:sp>
-      <p:sp>
-        <p:nvSpPr>
-          <p:cNvPr id="3" name="Title 2"/>
+              <a:t>Tinyには、短い入力にない情報も含まれる</a:t>
+            </a:r>
+          </a:p>
+        </p:txBody>
+      </p:sp>
+      <p:sp>
+        <p:nvSpPr>
+          <p:cNvPr id="3" name="Text Placeholder 2"/>
+          <p:cNvSpPr>
+            <a:spLocks noGrp="1"/>
+          </p:cNvSpPr>
+          <p:nvPr>
+            <p:ph type="body" idx="1"/>
+          </p:nvPr>
+        </p:nvSpPr>
+        <p:spPr>
+          <a:xfrm>
+            <a:off x="594360" y="1463040"/>
+            <a:ext cx="7955279" cy="3044952"/>
+          </a:xfrm>
+        </p:spPr>
+        <p:txBody>
+          <a:bodyPr wrap="square" tIns="91440" bIns="91440">
+            <a:noAutofit/>
+          </a:bodyPr>
+          <a:lstStyle/>
+          <a:p>
+            <a:pPr marL="457200" indent="-355600">
+              <a:lnSpc>
+                <a:spcPts val="2379"/>
+              </a:lnSpc>
+              <a:spcAft>
+                <a:spcPts val="700"/>
+              </a:spcAft>
+              <a:buSzPct val="66500"/>
+              <a:buFont typeface="Noto Sans CJK JP"/>
+              <a:buChar char="●"/>
+              <a:defRPr sz="2000" b="0">
+                <a:solidFill>
+                  <a:srgbClr val="303437"/>
+                </a:solidFill>
+                <a:latin typeface="Noto Sans"/>
+              </a:defRPr>
+            </a:pPr>
+            <a:r>
+              <a:rPr sz="2000" b="0" lang="ja-JP" altLang="en-US">
+                <a:solidFill>
+                  <a:srgbClr val="303437"/>
+                </a:solidFill>
+                <a:latin typeface="Noto Sans"/>
+                <a:ea typeface="Noto Sans CJK JP"/>
+                <a:cs typeface="Noto Sans"/>
+              </a:rPr>
+              <a:t>Tinyには「Clearinghouseに追加」「資料を掲載」など、事件をSNSで紹介する表現がある。</a:t>
+            </a:r>
+          </a:p>
+          <a:p>
+            <a:pPr marL="457200" indent="-355600">
+              <a:lnSpc>
+                <a:spcPts val="2379"/>
+              </a:lnSpc>
+              <a:spcAft>
+                <a:spcPts val="700"/>
+              </a:spcAft>
+              <a:buSzPct val="66500"/>
+              <a:buFont typeface="Noto Sans CJK JP"/>
+              <a:buChar char="●"/>
+              <a:defRPr sz="2000" b="0">
+                <a:solidFill>
+                  <a:srgbClr val="303437"/>
+                </a:solidFill>
+                <a:latin typeface="Noto Sans"/>
+              </a:defRPr>
+            </a:pPr>
+            <a:r>
+              <a:rPr sz="2000" b="0" lang="ja-JP" altLang="en-US">
+                <a:solidFill>
+                  <a:srgbClr val="303437"/>
+                </a:solidFill>
+                <a:latin typeface="Noto Sans"/>
+                <a:ea typeface="Noto Sans CJK JP"/>
+                <a:cs typeface="Noto Sans"/>
+              </a:rPr>
+              <a:t>実例6のTinyは仮差止めの成立や判事の発言まで含むが、Shortにはない。Tinyの作成には、Short以外の事件情報も使われる。</a:t>
+            </a:r>
+          </a:p>
+          <a:p>
+            <a:pPr marL="457200" indent="-355600">
+              <a:lnSpc>
+                <a:spcPts val="2379"/>
+              </a:lnSpc>
+              <a:spcAft>
+                <a:spcPts val="0"/>
+              </a:spcAft>
+              <a:buSzPct val="66500"/>
+              <a:buFont typeface="Noto Sans CJK JP"/>
+              <a:buChar char="●"/>
+              <a:defRPr sz="2000" b="0">
+                <a:solidFill>
+                  <a:srgbClr val="303437"/>
+                </a:solidFill>
+                <a:latin typeface="Noto Sans"/>
+              </a:defRPr>
+            </a:pPr>
+            <a:r>
+              <a:rPr sz="2000" b="0" lang="ja-JP" altLang="en-US">
+                <a:solidFill>
+                  <a:srgbClr val="303437"/>
+                </a:solidFill>
+                <a:latin typeface="Noto Sans"/>
+                <a:ea typeface="Noto Sans CJK JP"/>
+                <a:cs typeface="Noto Sans"/>
+              </a:rPr>
+              <a:t>参照文の情報が短い入力の外にあることも、Short→Tinyを評価するときの制約になる。</a:t>
+            </a:r>
+          </a:p>
+        </p:txBody>
+      </p:sp>
+      <p:sp>
+        <p:nvSpPr>
+          <p:cNvPr id="4" name="Title 3"/>
           <p:cNvSpPr>
             <a:spLocks noGrp="1"/>
           </p:cNvSpPr>
@@ -29333,685 +28740,16 @@
           </a:p>
         </p:txBody>
       </p:sp>
-      <p:graphicFrame>
-        <p:nvGraphicFramePr>
-          <p:cNvPr id="4" name="Table 3"/>
-          <p:cNvGraphicFramePr>
-            <a:graphicFrameLocks noGrp="1"/>
-          </p:cNvGraphicFramePr>
-          <p:nvPr/>
-        </p:nvGraphicFramePr>
-        <p:xfrm>
-          <a:off x="548640" y="1508760"/>
-          <a:ext cx="8046720" cy="1828800"/>
-        </p:xfrm>
-        <a:graphic>
-          <a:graphicData uri="http://schemas.openxmlformats.org/drawingml/2006/table">
-            <a:tbl>
-              <a:tblPr firstRow="0" bandRow="0"/>
-              <a:tblGrid>
-                <a:gridCol w="2011680"/>
-                <a:gridCol w="3017520"/>
-                <a:gridCol w="3017520"/>
-              </a:tblGrid>
-              <a:tr h="457200">
-                <a:tc>
-                  <a:txBody>
-                    <a:bodyPr wrap="square">
-                      <a:noAutofit/>
-                    </a:bodyPr>
-                    <a:lstStyle/>
-                    <a:p>
-                      <a:pPr algn="l">
-                        <a:lnSpc>
-                          <a:spcPts val="2300"/>
-                        </a:lnSpc>
-                        <a:buNone/>
-                        <a:defRPr sz="2000" b="0">
-                          <a:solidFill>
-                            <a:srgbClr val="303437"/>
-                          </a:solidFill>
-                          <a:latin typeface="Noto Sans"/>
-                        </a:defRPr>
-                      </a:pPr>
-                      <a:r>
-                        <a:rPr sz="2000" b="0" lang="ja-JP" altLang="en-US">
-                          <a:solidFill>
-                            <a:srgbClr val="303437"/>
-                          </a:solidFill>
-                          <a:latin typeface="Noto Sans"/>
-                          <a:ea typeface="Noto Sans CJK JP"/>
-                          <a:cs typeface="Noto Sans"/>
-                        </a:rPr>
-                        <a:t>要約</a:t>
-                      </a:r>
-                    </a:p>
-                  </a:txBody>
-                  <a:tcPr marL="63500" marR="63500" marT="38100" marB="38100" anchor="ctr">
-                    <a:lnL w="7620">
-                      <a:noFill/>
-                    </a:lnL>
-                    <a:lnR w="7620">
-                      <a:noFill/>
-                    </a:lnR>
-                    <a:lnT w="15240">
-                      <a:solidFill>
-                        <a:srgbClr val="626669"/>
-                      </a:solidFill>
-                      <a:prstDash val="solid"/>
-                    </a:lnT>
-                    <a:lnB w="7620">
-                      <a:solidFill>
-                        <a:srgbClr val="626669"/>
-                      </a:solidFill>
-                      <a:prstDash val="solid"/>
-                    </a:lnB>
-                    <a:solidFill>
-                      <a:srgbClr val="FFFEF8"/>
-                    </a:solidFill>
-                  </a:tcPr>
-                </a:tc>
-                <a:tc>
-                  <a:txBody>
-                    <a:bodyPr wrap="square">
-                      <a:noAutofit/>
-                    </a:bodyPr>
-                    <a:lstStyle/>
-                    <a:p>
-                      <a:pPr algn="r">
-                        <a:lnSpc>
-                          <a:spcPts val="2300"/>
-                        </a:lnSpc>
-                        <a:buNone/>
-                        <a:defRPr sz="2000" b="0">
-                          <a:solidFill>
-                            <a:srgbClr val="303437"/>
-                          </a:solidFill>
-                          <a:latin typeface="Noto Sans"/>
-                        </a:defRPr>
-                      </a:pPr>
-                      <a:r>
-                        <a:rPr sz="2000" b="0" lang="ja-JP" altLang="en-US">
-                          <a:solidFill>
-                            <a:srgbClr val="303437"/>
-                          </a:solidFill>
-                          <a:latin typeface="Noto Sans"/>
-                          <a:ea typeface="Noto Sans CJK JP"/>
-                          <a:cs typeface="Noto Sans"/>
-                        </a:rPr>
-                        <a:t>公表spaCy語数</a:t>
-                      </a:r>
-                    </a:p>
-                  </a:txBody>
-                  <a:tcPr marL="63500" marR="63500" marT="38100" marB="38100" anchor="ctr">
-                    <a:lnL w="7620">
-                      <a:noFill/>
-                    </a:lnL>
-                    <a:lnR w="7620">
-                      <a:noFill/>
-                    </a:lnR>
-                    <a:lnT w="15240">
-                      <a:solidFill>
-                        <a:srgbClr val="626669"/>
-                      </a:solidFill>
-                      <a:prstDash val="solid"/>
-                    </a:lnT>
-                    <a:lnB w="7620">
-                      <a:solidFill>
-                        <a:srgbClr val="626669"/>
-                      </a:solidFill>
-                      <a:prstDash val="solid"/>
-                    </a:lnB>
-                    <a:solidFill>
-                      <a:srgbClr val="FFFEF8"/>
-                    </a:solidFill>
-                  </a:tcPr>
-                </a:tc>
-                <a:tc>
-                  <a:txBody>
-                    <a:bodyPr wrap="square">
-                      <a:noAutofit/>
-                    </a:bodyPr>
-                    <a:lstStyle/>
-                    <a:p>
-                      <a:pPr algn="r">
-                        <a:lnSpc>
-                          <a:spcPts val="2300"/>
-                        </a:lnSpc>
-                        <a:buNone/>
-                        <a:defRPr sz="2000" b="0">
-                          <a:solidFill>
-                            <a:srgbClr val="303437"/>
-                          </a:solidFill>
-                          <a:latin typeface="Noto Sans"/>
-                        </a:defRPr>
-                      </a:pPr>
-                      <a:r>
-                        <a:rPr sz="2000" b="0" lang="ja-JP" altLang="en-US">
-                          <a:solidFill>
-                            <a:srgbClr val="303437"/>
-                          </a:solidFill>
-                          <a:latin typeface="Noto Sans"/>
-                          <a:ea typeface="Noto Sans CJK JP"/>
-                          <a:cs typeface="Noto Sans"/>
-                        </a:rPr>
-                        <a:t>配布の空白区切り</a:t>
-                      </a:r>
-                    </a:p>
-                  </a:txBody>
-                  <a:tcPr marL="63500" marR="63500" marT="38100" marB="38100" anchor="ctr">
-                    <a:lnL w="7620">
-                      <a:noFill/>
-                    </a:lnL>
-                    <a:lnR w="7620">
-                      <a:noFill/>
-                    </a:lnR>
-                    <a:lnT w="15240">
-                      <a:solidFill>
-                        <a:srgbClr val="626669"/>
-                      </a:solidFill>
-                      <a:prstDash val="solid"/>
-                    </a:lnT>
-                    <a:lnB w="7620">
-                      <a:solidFill>
-                        <a:srgbClr val="626669"/>
-                      </a:solidFill>
-                      <a:prstDash val="solid"/>
-                    </a:lnB>
-                    <a:solidFill>
-                      <a:srgbClr val="FFFEF8"/>
-                    </a:solidFill>
-                  </a:tcPr>
-                </a:tc>
-              </a:tr>
-              <a:tr h="457200">
-                <a:tc>
-                  <a:txBody>
-                    <a:bodyPr wrap="square">
-                      <a:noAutofit/>
-                    </a:bodyPr>
-                    <a:lstStyle/>
-                    <a:p>
-                      <a:pPr algn="l">
-                        <a:lnSpc>
-                          <a:spcPts val="2300"/>
-                        </a:lnSpc>
-                        <a:buNone/>
-                        <a:defRPr sz="2000" b="0">
-                          <a:solidFill>
-                            <a:srgbClr val="303437"/>
-                          </a:solidFill>
-                          <a:latin typeface="Noto Sans"/>
-                        </a:defRPr>
-                      </a:pPr>
-                      <a:r>
-                        <a:rPr sz="2000" b="0" lang="ja-JP" altLang="en-US">
-                          <a:solidFill>
-                            <a:srgbClr val="303437"/>
-                          </a:solidFill>
-                          <a:latin typeface="Noto Sans"/>
-                          <a:ea typeface="Noto Sans CJK JP"/>
-                          <a:cs typeface="Noto Sans"/>
-                        </a:rPr>
-                        <a:t>Long</a:t>
-                      </a:r>
-                    </a:p>
-                  </a:txBody>
-                  <a:tcPr marL="63500" marR="63500" marT="38100" marB="38100" anchor="ctr">
-                    <a:lnL w="7620">
-                      <a:noFill/>
-                    </a:lnL>
-                    <a:lnR w="7620">
-                      <a:noFill/>
-                    </a:lnR>
-                    <a:lnT w="7620">
-                      <a:solidFill>
-                        <a:srgbClr val="626669"/>
-                      </a:solidFill>
-                      <a:prstDash val="solid"/>
-                    </a:lnT>
-                    <a:lnB w="7620">
-                      <a:noFill/>
-                    </a:lnB>
-                    <a:solidFill>
-                      <a:srgbClr val="FFFEF8"/>
-                    </a:solidFill>
-                  </a:tcPr>
-                </a:tc>
-                <a:tc>
-                  <a:txBody>
-                    <a:bodyPr wrap="square">
-                      <a:noAutofit/>
-                    </a:bodyPr>
-                    <a:lstStyle/>
-                    <a:p>
-                      <a:pPr algn="r">
-                        <a:lnSpc>
-                          <a:spcPts val="2300"/>
-                        </a:lnSpc>
-                        <a:buNone/>
-                        <a:defRPr sz="2000" b="0">
-                          <a:solidFill>
-                            <a:srgbClr val="303437"/>
-                          </a:solidFill>
-                          <a:latin typeface="Noto Sans"/>
-                        </a:defRPr>
-                      </a:pPr>
-                      <a:r>
-                        <a:rPr sz="2000" b="0" lang="ja-JP" altLang="en-US">
-                          <a:solidFill>
-                            <a:srgbClr val="303437"/>
-                          </a:solidFill>
-                          <a:latin typeface="Noto Sans"/>
-                          <a:ea typeface="Noto Sans CJK JP"/>
-                          <a:cs typeface="Noto Sans"/>
-                        </a:rPr>
-                        <a:t>646.5</a:t>
-                      </a:r>
-                    </a:p>
-                  </a:txBody>
-                  <a:tcPr marL="63500" marR="63500" marT="38100" marB="38100" anchor="ctr">
-                    <a:lnL w="7620">
-                      <a:noFill/>
-                    </a:lnL>
-                    <a:lnR w="7620">
-                      <a:noFill/>
-                    </a:lnR>
-                    <a:lnT w="7620">
-                      <a:solidFill>
-                        <a:srgbClr val="626669"/>
-                      </a:solidFill>
-                      <a:prstDash val="solid"/>
-                    </a:lnT>
-                    <a:lnB w="7620">
-                      <a:noFill/>
-                    </a:lnB>
-                    <a:solidFill>
-                      <a:srgbClr val="FFFEF8"/>
-                    </a:solidFill>
-                  </a:tcPr>
-                </a:tc>
-                <a:tc>
-                  <a:txBody>
-                    <a:bodyPr wrap="square">
-                      <a:noAutofit/>
-                    </a:bodyPr>
-                    <a:lstStyle/>
-                    <a:p>
-                      <a:pPr algn="r">
-                        <a:lnSpc>
-                          <a:spcPts val="2300"/>
-                        </a:lnSpc>
-                        <a:buNone/>
-                        <a:defRPr sz="2000" b="0">
-                          <a:solidFill>
-                            <a:srgbClr val="303437"/>
-                          </a:solidFill>
-                          <a:latin typeface="Noto Sans"/>
-                        </a:defRPr>
-                      </a:pPr>
-                      <a:r>
-                        <a:rPr sz="2000" b="0" lang="ja-JP" altLang="en-US">
-                          <a:solidFill>
-                            <a:srgbClr val="303437"/>
-                          </a:solidFill>
-                          <a:latin typeface="Noto Sans"/>
-                          <a:ea typeface="Noto Sans CJK JP"/>
-                          <a:cs typeface="Noto Sans"/>
-                        </a:rPr>
-                        <a:t>545.72</a:t>
-                      </a:r>
-                    </a:p>
-                  </a:txBody>
-                  <a:tcPr marL="63500" marR="63500" marT="38100" marB="38100" anchor="ctr">
-                    <a:lnL w="7620">
-                      <a:noFill/>
-                    </a:lnL>
-                    <a:lnR w="7620">
-                      <a:noFill/>
-                    </a:lnR>
-                    <a:lnT w="7620">
-                      <a:solidFill>
-                        <a:srgbClr val="626669"/>
-                      </a:solidFill>
-                      <a:prstDash val="solid"/>
-                    </a:lnT>
-                    <a:lnB w="7620">
-                      <a:noFill/>
-                    </a:lnB>
-                    <a:solidFill>
-                      <a:srgbClr val="FFFEF8"/>
-                    </a:solidFill>
-                  </a:tcPr>
-                </a:tc>
-              </a:tr>
-              <a:tr h="457200">
-                <a:tc>
-                  <a:txBody>
-                    <a:bodyPr wrap="square">
-                      <a:noAutofit/>
-                    </a:bodyPr>
-                    <a:lstStyle/>
-                    <a:p>
-                      <a:pPr algn="l">
-                        <a:lnSpc>
-                          <a:spcPts val="2300"/>
-                        </a:lnSpc>
-                        <a:buNone/>
-                        <a:defRPr sz="2000" b="0">
-                          <a:solidFill>
-                            <a:srgbClr val="303437"/>
-                          </a:solidFill>
-                          <a:latin typeface="Noto Sans"/>
-                        </a:defRPr>
-                      </a:pPr>
-                      <a:r>
-                        <a:rPr sz="2000" b="0" lang="ja-JP" altLang="en-US">
-                          <a:solidFill>
-                            <a:srgbClr val="303437"/>
-                          </a:solidFill>
-                          <a:latin typeface="Noto Sans"/>
-                          <a:ea typeface="Noto Sans CJK JP"/>
-                          <a:cs typeface="Noto Sans"/>
-                        </a:rPr>
-                        <a:t>Short</a:t>
-                      </a:r>
-                    </a:p>
-                  </a:txBody>
-                  <a:tcPr marL="63500" marR="63500" marT="38100" marB="38100" anchor="ctr">
-                    <a:lnL w="7620">
-                      <a:noFill/>
-                    </a:lnL>
-                    <a:lnR w="7620">
-                      <a:noFill/>
-                    </a:lnR>
-                    <a:lnT w="7620">
-                      <a:noFill/>
-                    </a:lnT>
-                    <a:lnB w="7620">
-                      <a:noFill/>
-                    </a:lnB>
-                    <a:solidFill>
-                      <a:srgbClr val="FFFEF8"/>
-                    </a:solidFill>
-                  </a:tcPr>
-                </a:tc>
-                <a:tc>
-                  <a:txBody>
-                    <a:bodyPr wrap="square">
-                      <a:noAutofit/>
-                    </a:bodyPr>
-                    <a:lstStyle/>
-                    <a:p>
-                      <a:pPr algn="r">
-                        <a:lnSpc>
-                          <a:spcPts val="2300"/>
-                        </a:lnSpc>
-                        <a:buNone/>
-                        <a:defRPr sz="2000" b="0">
-                          <a:solidFill>
-                            <a:srgbClr val="303437"/>
-                          </a:solidFill>
-                          <a:latin typeface="Noto Sans"/>
-                        </a:defRPr>
-                      </a:pPr>
-                      <a:r>
-                        <a:rPr sz="2000" b="0" lang="ja-JP" altLang="en-US">
-                          <a:solidFill>
-                            <a:srgbClr val="303437"/>
-                          </a:solidFill>
-                          <a:latin typeface="Noto Sans"/>
-                          <a:ea typeface="Noto Sans CJK JP"/>
-                          <a:cs typeface="Noto Sans"/>
-                        </a:rPr>
-                        <a:t>130.2</a:t>
-                      </a:r>
-                    </a:p>
-                  </a:txBody>
-                  <a:tcPr marL="63500" marR="63500" marT="38100" marB="38100" anchor="ctr">
-                    <a:lnL w="7620">
-                      <a:noFill/>
-                    </a:lnL>
-                    <a:lnR w="7620">
-                      <a:noFill/>
-                    </a:lnR>
-                    <a:lnT w="7620">
-                      <a:noFill/>
-                    </a:lnT>
-                    <a:lnB w="7620">
-                      <a:noFill/>
-                    </a:lnB>
-                    <a:solidFill>
-                      <a:srgbClr val="FFFEF8"/>
-                    </a:solidFill>
-                  </a:tcPr>
-                </a:tc>
-                <a:tc>
-                  <a:txBody>
-                    <a:bodyPr wrap="square">
-                      <a:noAutofit/>
-                    </a:bodyPr>
-                    <a:lstStyle/>
-                    <a:p>
-                      <a:pPr algn="r">
-                        <a:lnSpc>
-                          <a:spcPts val="2300"/>
-                        </a:lnSpc>
-                        <a:buNone/>
-                        <a:defRPr sz="2000" b="0">
-                          <a:solidFill>
-                            <a:srgbClr val="303437"/>
-                          </a:solidFill>
-                          <a:latin typeface="Noto Sans"/>
-                        </a:defRPr>
-                      </a:pPr>
-                      <a:r>
-                        <a:rPr sz="2000" b="0" lang="ja-JP" altLang="en-US">
-                          <a:solidFill>
-                            <a:srgbClr val="303437"/>
-                          </a:solidFill>
-                          <a:latin typeface="Noto Sans"/>
-                          <a:ea typeface="Noto Sans CJK JP"/>
-                          <a:cs typeface="Noto Sans"/>
-                        </a:rPr>
-                        <a:t>112.97</a:t>
-                      </a:r>
-                    </a:p>
-                  </a:txBody>
-                  <a:tcPr marL="63500" marR="63500" marT="38100" marB="38100" anchor="ctr">
-                    <a:lnL w="7620">
-                      <a:noFill/>
-                    </a:lnL>
-                    <a:lnR w="7620">
-                      <a:noFill/>
-                    </a:lnR>
-                    <a:lnT w="7620">
-                      <a:noFill/>
-                    </a:lnT>
-                    <a:lnB w="7620">
-                      <a:noFill/>
-                    </a:lnB>
-                    <a:solidFill>
-                      <a:srgbClr val="FFFEF8"/>
-                    </a:solidFill>
-                  </a:tcPr>
-                </a:tc>
-              </a:tr>
-              <a:tr h="457200">
-                <a:tc>
-                  <a:txBody>
-                    <a:bodyPr wrap="square">
-                      <a:noAutofit/>
-                    </a:bodyPr>
-                    <a:lstStyle/>
-                    <a:p>
-                      <a:pPr algn="l">
-                        <a:lnSpc>
-                          <a:spcPts val="2300"/>
-                        </a:lnSpc>
-                        <a:buNone/>
-                        <a:defRPr sz="2000" b="0">
-                          <a:solidFill>
-                            <a:srgbClr val="303437"/>
-                          </a:solidFill>
-                          <a:latin typeface="Noto Sans"/>
-                        </a:defRPr>
-                      </a:pPr>
-                      <a:r>
-                        <a:rPr sz="2000" b="0" lang="ja-JP" altLang="en-US">
-                          <a:solidFill>
-                            <a:srgbClr val="303437"/>
-                          </a:solidFill>
-                          <a:latin typeface="Noto Sans"/>
-                          <a:ea typeface="Noto Sans CJK JP"/>
-                          <a:cs typeface="Noto Sans"/>
-                        </a:rPr>
-                        <a:t>Tiny</a:t>
-                      </a:r>
-                    </a:p>
-                  </a:txBody>
-                  <a:tcPr marL="63500" marR="63500" marT="38100" marB="38100" anchor="ctr">
-                    <a:lnL w="7620">
-                      <a:noFill/>
-                    </a:lnL>
-                    <a:lnR w="7620">
-                      <a:noFill/>
-                    </a:lnR>
-                    <a:lnT w="7620">
-                      <a:noFill/>
-                    </a:lnT>
-                    <a:lnB w="15240">
-                      <a:solidFill>
-                        <a:srgbClr val="626669"/>
-                      </a:solidFill>
-                      <a:prstDash val="solid"/>
-                    </a:lnB>
-                    <a:solidFill>
-                      <a:srgbClr val="FFFEF8"/>
-                    </a:solidFill>
-                  </a:tcPr>
-                </a:tc>
-                <a:tc>
-                  <a:txBody>
-                    <a:bodyPr wrap="square">
-                      <a:noAutofit/>
-                    </a:bodyPr>
-                    <a:lstStyle/>
-                    <a:p>
-                      <a:pPr algn="r">
-                        <a:lnSpc>
-                          <a:spcPts val="2300"/>
-                        </a:lnSpc>
-                        <a:buNone/>
-                        <a:defRPr sz="2000" b="0">
-                          <a:solidFill>
-                            <a:srgbClr val="303437"/>
-                          </a:solidFill>
-                          <a:latin typeface="Noto Sans"/>
-                        </a:defRPr>
-                      </a:pPr>
-                      <a:r>
-                        <a:rPr sz="2000" b="0" lang="ja-JP" altLang="en-US">
-                          <a:solidFill>
-                            <a:srgbClr val="303437"/>
-                          </a:solidFill>
-                          <a:latin typeface="Noto Sans"/>
-                          <a:ea typeface="Noto Sans CJK JP"/>
-                          <a:cs typeface="Noto Sans"/>
-                        </a:rPr>
-                        <a:t>24.7</a:t>
-                      </a:r>
-                    </a:p>
-                  </a:txBody>
-                  <a:tcPr marL="63500" marR="63500" marT="38100" marB="38100" anchor="ctr">
-                    <a:lnL w="7620">
-                      <a:noFill/>
-                    </a:lnL>
-                    <a:lnR w="7620">
-                      <a:noFill/>
-                    </a:lnR>
-                    <a:lnT w="7620">
-                      <a:noFill/>
-                    </a:lnT>
-                    <a:lnB w="15240">
-                      <a:solidFill>
-                        <a:srgbClr val="626669"/>
-                      </a:solidFill>
-                      <a:prstDash val="solid"/>
-                    </a:lnB>
-                    <a:solidFill>
-                      <a:srgbClr val="FFFEF8"/>
-                    </a:solidFill>
-                  </a:tcPr>
-                </a:tc>
-                <a:tc>
-                  <a:txBody>
-                    <a:bodyPr wrap="square">
-                      <a:noAutofit/>
-                    </a:bodyPr>
-                    <a:lstStyle/>
-                    <a:p>
-                      <a:pPr algn="r">
-                        <a:lnSpc>
-                          <a:spcPts val="2300"/>
-                        </a:lnSpc>
-                        <a:buNone/>
-                        <a:defRPr sz="2000" b="0">
-                          <a:solidFill>
-                            <a:srgbClr val="303437"/>
-                          </a:solidFill>
-                          <a:latin typeface="Noto Sans"/>
-                        </a:defRPr>
-                      </a:pPr>
-                      <a:r>
-                        <a:rPr sz="2000" b="0" lang="ja-JP" altLang="en-US">
-                          <a:solidFill>
-                            <a:srgbClr val="303437"/>
-                          </a:solidFill>
-                          <a:latin typeface="Noto Sans"/>
-                          <a:ea typeface="Noto Sans CJK JP"/>
-                          <a:cs typeface="Noto Sans"/>
-                        </a:rPr>
-                        <a:t>21.18</a:t>
-                      </a:r>
-                    </a:p>
-                  </a:txBody>
-                  <a:tcPr marL="63500" marR="63500" marT="38100" marB="38100" anchor="ctr">
-                    <a:lnL w="7620">
-                      <a:noFill/>
-                    </a:lnL>
-                    <a:lnR w="7620">
-                      <a:noFill/>
-                    </a:lnR>
-                    <a:lnT w="7620">
-                      <a:noFill/>
-                    </a:lnT>
-                    <a:lnB w="15240">
-                      <a:solidFill>
-                        <a:srgbClr val="626669"/>
-                      </a:solidFill>
-                      <a:prstDash val="solid"/>
-                    </a:lnB>
-                    <a:solidFill>
-                      <a:srgbClr val="FFFEF8"/>
-                    </a:solidFill>
-                  </a:tcPr>
-                </a:tc>
-              </a:tr>
-            </a:tbl>
-          </a:graphicData>
-        </a:graphic>
-      </p:graphicFrame>
-      <p:sp>
-        <p:nvSpPr>
-          <p:cNvPr id="5" name="TextBox 4"/>
+      <p:sp>
+        <p:nvSpPr>
+          <p:cNvPr id="5" name="sources"/>
           <p:cNvSpPr txBox="1"/>
           <p:nvPr/>
         </p:nvSpPr>
         <p:spPr>
           <a:xfrm>
-            <a:off x="594360" y="3538728"/>
-            <a:ext cx="7955279" cy="658368"/>
+            <a:off x="502920" y="4700016"/>
+            <a:ext cx="8183879" cy="530352"/>
           </a:xfrm>
           <a:prstGeom prst="rect">
             <a:avLst/>
@@ -30026,60 +28764,6 @@
           <a:p>
             <a:pPr algn="l">
               <a:lnSpc>
-                <a:spcPts val="2047"/>
-              </a:lnSpc>
-              <a:spcBef>
-                <a:spcPts val="0"/>
-              </a:spcBef>
-              <a:spcAft>
-                <a:spcPts val="0"/>
-              </a:spcAft>
-              <a:buNone/>
-              <a:defRPr sz="1750" b="0">
-                <a:solidFill>
-                  <a:srgbClr val="303437"/>
-                </a:solidFill>
-                <a:latin typeface="Noto Sans"/>
-              </a:defRPr>
-            </a:pPr>
-            <a:r>
-              <a:rPr sz="1750" b="0" lang="ja-JP" altLang="en-US">
-                <a:solidFill>
-                  <a:srgbClr val="303437"/>
-                </a:solidFill>
-                <a:latin typeface="Noto Sans"/>
-                <a:ea typeface="Noto Sans CJK JP"/>
-                <a:cs typeface="Noto Sans"/>
-              </a:rPr>
-              <a:t>いずれも該当要約を持つ事件の平均。右列はv20220616全分割の実集計で、モデルのトークン数ではない。</a:t>
-            </a:r>
-          </a:p>
-        </p:txBody>
-      </p:sp>
-      <p:sp>
-        <p:nvSpPr>
-          <p:cNvPr id="6" name="sources"/>
-          <p:cNvSpPr txBox="1"/>
-          <p:nvPr/>
-        </p:nvSpPr>
-        <p:spPr>
-          <a:xfrm>
-            <a:off x="502920" y="4517136"/>
-            <a:ext cx="8183879" cy="530352"/>
-          </a:xfrm>
-          <a:prstGeom prst="rect">
-            <a:avLst/>
-          </a:prstGeom>
-          <a:noFill/>
-        </p:spPr>
-        <p:txBody>
-          <a:bodyPr wrap="square" lIns="0" rIns="0" tIns="0" bIns="0">
-            <a:noAutofit/>
-          </a:bodyPr>
-          <a:lstStyle/>
-          <a:p>
-            <a:pPr algn="l">
-              <a:lnSpc>
                 <a:spcPts val="940"/>
               </a:lnSpc>
               <a:spcBef>
@@ -30105,25 +28789,8 @@
                 <a:ea typeface="Noto Sans CJK JP"/>
                 <a:cs typeface="Noto Sans"/>
               </a:rPr>
-              <a:t>[1] Shen et al. (2022). Multi-LexSum: Real-world Summaries of Civil Rights Lawsuits at Multiple Granularities. NeurIPS.</a:t>
-            </a:r>
-          </a:p>
-          <a:p>
-            <a:pPr>
-              <a:lnSpc>
-                <a:spcPts val="940"/>
-              </a:lnSpc>
-              <a:spcAft>
-                <a:spcPts val="350"/>
-              </a:spcAft>
-              <a:buNone/>
-              <a:defRPr sz="810" b="0">
-                <a:solidFill>
-                  <a:srgbClr val="303437"/>
-                </a:solidFill>
-                <a:latin typeface="Noto Sans"/>
-              </a:defRPr>
-            </a:pPr>
+              <a:t>[1] Shen et al. Multi-LexSum (2022).  </a:t>
+            </a:r>
             <a:r>
               <a:rPr sz="810" b="0" lang="ja-JP" altLang="en-US">
                 <a:solidFill>
@@ -30133,57 +28800,6 @@
                 <a:ea typeface="Noto Sans CJK JP"/>
                 <a:cs typeface="Noto Sans"/>
                 <a:hlinkClick r:id="rId2"/>
-              </a:rPr>
-              <a:t>https://doi.org/10.52202/068431-0956</a:t>
-            </a:r>
-          </a:p>
-          <a:p>
-            <a:pPr>
-              <a:lnSpc>
-                <a:spcPts val="940"/>
-              </a:lnSpc>
-              <a:spcAft>
-                <a:spcPts val="350"/>
-              </a:spcAft>
-              <a:buNone/>
-              <a:defRPr sz="810" b="0">
-                <a:solidFill>
-                  <a:srgbClr val="303437"/>
-                </a:solidFill>
-                <a:latin typeface="Noto Sans"/>
-              </a:defRPr>
-            </a:pPr>
-            <a:r>
-              <a:rPr sz="810" b="0" lang="ja-JP" altLang="en-US">
-                <a:solidFill>
-                  <a:srgbClr val="626669"/>
-                </a:solidFill>
-                <a:latin typeface="Noto Sans"/>
-                <a:ea typeface="Noto Sans CJK JP"/>
-                <a:cs typeface="Noto Sans"/>
-              </a:rPr>
-              <a:t>[2] Shen et al. Multi-LexSum v20220616, 公開testレコード。</a:t>
-            </a:r>
-            <a:r>
-              <a:rPr sz="810" b="0" lang="ja-JP" altLang="en-US">
-                <a:solidFill>
-                  <a:srgbClr val="626669"/>
-                </a:solidFill>
-                <a:latin typeface="Noto Sans"/>
-                <a:ea typeface="Noto Sans CJK JP"/>
-                <a:cs typeface="Noto Sans"/>
-              </a:rPr>
-              <a:t>  </a:t>
-            </a:r>
-            <a:r>
-              <a:rPr sz="810" b="0" lang="ja-JP" altLang="en-US">
-                <a:solidFill>
-                  <a:srgbClr val="626669"/>
-                </a:solidFill>
-                <a:latin typeface="Noto Sans"/>
-                <a:ea typeface="Noto Sans CJK JP"/>
-                <a:cs typeface="Noto Sans"/>
-                <a:hlinkClick r:id="rId3"/>
               </a:rPr>
               <a:t>https://huggingface.co/datasets/allenai/multi_lexsum</a:t>
             </a:r>
@@ -30251,7 +28867,7 @@
                 <a:ea typeface="Noto Sans CJK JP"/>
                 <a:cs typeface="Noto Sans"/>
               </a:rPr>
-              <a:t>原文書からの要約と、要約の圧縮を分ける</a:t>
+              <a:t>文書群の要約と、要約文の圧縮を扱う</a:t>
             </a:r>
           </a:p>
         </p:txBody>
@@ -31171,127 +29787,14 @@
                 <a:ea typeface="Noto Sans CJK JP"/>
                 <a:cs typeface="Noto Sans"/>
               </a:rPr>
-              <a:t>全体件数は、固定配布と表の単位を照合する</a:t>
-            </a:r>
-          </a:p>
-        </p:txBody>
-      </p:sp>
-      <p:sp>
-        <p:nvSpPr>
-          <p:cNvPr id="3" name="Text Placeholder 2"/>
-          <p:cNvSpPr>
-            <a:spLocks noGrp="1"/>
-          </p:cNvSpPr>
-          <p:nvPr>
-            <p:ph type="body" idx="1"/>
-          </p:nvPr>
-        </p:nvSpPr>
-        <p:spPr>
-          <a:xfrm>
-            <a:off x="594360" y="1463040"/>
-            <a:ext cx="7955279" cy="3044952"/>
-          </a:xfrm>
-        </p:spPr>
-        <p:txBody>
-          <a:bodyPr wrap="square" tIns="91440" bIns="91440">
-            <a:noAutofit/>
-          </a:bodyPr>
-          <a:lstStyle/>
-          <a:p>
-            <a:pPr marL="457200" indent="-355600">
-              <a:lnSpc>
-                <a:spcPts val="2379"/>
-              </a:lnSpc>
-              <a:spcAft>
-                <a:spcPts val="700"/>
-              </a:spcAft>
-              <a:buSzPct val="66500"/>
-              <a:buFont typeface="Noto Sans CJK JP"/>
-              <a:buChar char="●"/>
-              <a:defRPr sz="2000" b="0">
-                <a:solidFill>
-                  <a:srgbClr val="303437"/>
-                </a:solidFill>
-                <a:latin typeface="Noto Sans"/>
-              </a:defRPr>
-            </a:pPr>
-            <a:r>
-              <a:rPr sz="2000" b="0" lang="ja-JP" altLang="en-US">
-                <a:solidFill>
-                  <a:srgbClr val="303437"/>
-                </a:solidFill>
-                <a:latin typeface="Noto Sans"/>
-                <a:ea typeface="Noto Sans CJK JP"/>
-                <a:cs typeface="Noto Sans"/>
-              </a:rPr>
-              <a:t>固定した配布ファイルの事件数は3,177＋454＋908＝4,539で、公開論文の分割表とも一致する。要約は4,539＋3,138＋1,603＝9,280。</a:t>
-            </a:r>
-          </a:p>
-          <a:p>
-            <a:pPr marL="457200" indent="-355600">
-              <a:lnSpc>
-                <a:spcPts val="2379"/>
-              </a:lnSpc>
-              <a:spcAft>
-                <a:spcPts val="700"/>
-              </a:spcAft>
-              <a:buSzPct val="66500"/>
-              <a:buFont typeface="Noto Sans CJK JP"/>
-              <a:buChar char="●"/>
-              <a:defRPr sz="2000" b="0">
-                <a:solidFill>
-                  <a:srgbClr val="303437"/>
-                </a:solidFill>
-                <a:latin typeface="Noto Sans"/>
-              </a:defRPr>
-            </a:pPr>
-            <a:r>
-              <a:rPr sz="2000" b="0" lang="ja-JP" altLang="en-US">
-                <a:solidFill>
-                  <a:srgbClr val="303437"/>
-                </a:solidFill>
-                <a:latin typeface="Noto Sans"/>
-                <a:ea typeface="Noto Sans CJK JP"/>
-                <a:cs typeface="Noto Sans"/>
-              </a:rPr>
-              <a:t>比較統計の表にはD→LongのSamplesが4,534と記載される箇所がある。本資料の構成・分割表は、実際に取得した4,539レコードの集計を使う。</a:t>
-            </a:r>
-          </a:p>
-          <a:p>
-            <a:pPr marL="457200" indent="-355600">
-              <a:lnSpc>
-                <a:spcPts val="2379"/>
-              </a:lnSpc>
-              <a:spcAft>
-                <a:spcPts val="0"/>
-              </a:spcAft>
-              <a:buSzPct val="66500"/>
-              <a:buFont typeface="Noto Sans CJK JP"/>
-              <a:buChar char="●"/>
-              <a:defRPr sz="2000" b="0">
-                <a:solidFill>
-                  <a:srgbClr val="303437"/>
-                </a:solidFill>
-                <a:latin typeface="Noto Sans"/>
-              </a:defRPr>
-            </a:pPr>
-            <a:r>
-              <a:rPr sz="2000" b="0" lang="ja-JP" altLang="en-US">
-                <a:solidFill>
-                  <a:srgbClr val="303437"/>
-                </a:solidFill>
-                <a:latin typeface="Noto Sans"/>
-                <a:ea typeface="Noto Sans CJK JP"/>
-                <a:cs typeface="Noto Sans"/>
-              </a:rPr>
-              <a:t>40,119文書は配布概要にある原文書IDを数えた値。原文書の全文を今回すべて取得して数え直した値ではない。</a:t>
-            </a:r>
-          </a:p>
-        </p:txBody>
-      </p:sp>
-      <p:sp>
-        <p:nvSpPr>
-          <p:cNvPr id="4" name="Title 3"/>
+              <a:t>要約の組をJSONLから読み出す</a:t>
+            </a:r>
+          </a:p>
+        </p:txBody>
+      </p:sp>
+      <p:sp>
+        <p:nvSpPr>
+          <p:cNvPr id="3" name="Title 2"/>
           <p:cNvSpPr>
             <a:spLocks noGrp="1"/>
           </p:cNvSpPr>
@@ -31339,14 +29842,305 @@
       </p:sp>
       <p:sp>
         <p:nvSpPr>
-          <p:cNvPr id="5" name="sources"/>
+          <p:cNvPr id="4" name="code-frame"/>
+          <p:cNvSpPr/>
+          <p:nvPr/>
+        </p:nvSpPr>
+        <p:spPr>
+          <a:xfrm>
+            <a:off x="548640" y="1618488"/>
+            <a:ext cx="8046720" cy="2067559"/>
+          </a:xfrm>
+          <a:prstGeom prst="rect">
+            <a:avLst/>
+          </a:prstGeom>
+          <a:solidFill>
+            <a:srgbClr val="EBEDEB"/>
+          </a:solidFill>
+          <a:ln>
+            <a:noFill/>
+          </a:ln>
+          <a:effectLst/>
+        </p:spPr>
+        <p:style>
+          <a:lnRef idx="1">
+            <a:schemeClr val="accent1"/>
+          </a:lnRef>
+          <a:fillRef idx="3">
+            <a:schemeClr val="accent1"/>
+          </a:fillRef>
+          <a:effectRef idx="0">
+            <a:schemeClr val="accent1"/>
+          </a:effectRef>
+          <a:fontRef idx="minor">
+            <a:schemeClr val="lt1"/>
+          </a:fontRef>
+        </p:style>
+        <p:txBody>
+          <a:bodyPr rtlCol="0" anchor="t" wrap="none" lIns="152400" rIns="152400" tIns="101600" bIns="127000">
+            <a:noAutofit/>
+          </a:bodyPr>
+          <a:lstStyle/>
+          <a:p>
+            <a:pPr algn="l">
+              <a:lnSpc>
+                <a:spcPts val="1784"/>
+              </a:lnSpc>
+              <a:spcBef>
+                <a:spcPts val="0"/>
+              </a:spcBef>
+              <a:spcAft>
+                <a:spcPts val="0"/>
+              </a:spcAft>
+              <a:buNone/>
+              <a:defRPr sz="1500" b="0">
+                <a:solidFill>
+                  <a:srgbClr val="303437"/>
+                </a:solidFill>
+                <a:latin typeface="Noto Sans"/>
+              </a:defRPr>
+            </a:pPr>
+            <a:r>
+              <a:rPr sz="1500" b="0" lang="ja-JP" altLang="en-US">
+                <a:solidFill>
+                  <a:srgbClr val="303437"/>
+                </a:solidFill>
+                <a:latin typeface="Liberation Mono"/>
+                <a:ea typeface="Noto Sans CJK JP"/>
+                <a:cs typeface="Liberation Mono"/>
+              </a:rPr>
+              <a:t>import json</a:t>
+            </a:r>
+          </a:p>
+          <a:p>
+            <a:pPr>
+              <a:lnSpc>
+                <a:spcPts val="1784"/>
+              </a:lnSpc>
+              <a:spcBef>
+                <a:spcPts val="0"/>
+              </a:spcBef>
+              <a:spcAft>
+                <a:spcPts val="0"/>
+              </a:spcAft>
+              <a:buNone/>
+              <a:defRPr sz="1500" b="0">
+                <a:solidFill>
+                  <a:srgbClr val="303437"/>
+                </a:solidFill>
+                <a:latin typeface="Noto Sans"/>
+              </a:defRPr>
+            </a:pPr>
+            <a:r>
+              <a:rPr sz="1500" b="0" lang="ja-JP" altLang="en-US">
+                <a:solidFill>
+                  <a:srgbClr val="303437"/>
+                </a:solidFill>
+                <a:latin typeface="Liberation Mono"/>
+                <a:ea typeface="Noto Sans CJK JP"/>
+                <a:cs typeface="Liberation Mono"/>
+              </a:rPr>
+              <a:t>with open("test.jsonl", encoding="utf-8") as f:</a:t>
+            </a:r>
+          </a:p>
+          <a:p>
+            <a:pPr>
+              <a:lnSpc>
+                <a:spcPts val="1784"/>
+              </a:lnSpc>
+              <a:spcBef>
+                <a:spcPts val="0"/>
+              </a:spcBef>
+              <a:spcAft>
+                <a:spcPts val="0"/>
+              </a:spcAft>
+              <a:buNone/>
+              <a:defRPr sz="1500" b="0">
+                <a:solidFill>
+                  <a:srgbClr val="303437"/>
+                </a:solidFill>
+                <a:latin typeface="Noto Sans"/>
+              </a:defRPr>
+            </a:pPr>
+            <a:r>
+              <a:rPr sz="1500" b="0" lang="ja-JP" altLang="en-US">
+                <a:solidFill>
+                  <a:srgbClr val="303437"/>
+                </a:solidFill>
+                <a:latin typeface="Liberation Mono"/>
+                <a:ea typeface="Noto Sans CJK JP"/>
+                <a:cs typeface="Liberation Mono"/>
+              </a:rPr>
+              <a:t>    cases = (json.loads(line) for line in f)</a:t>
+            </a:r>
+          </a:p>
+          <a:p>
+            <a:pPr>
+              <a:lnSpc>
+                <a:spcPts val="1784"/>
+              </a:lnSpc>
+              <a:spcBef>
+                <a:spcPts val="0"/>
+              </a:spcBef>
+              <a:spcAft>
+                <a:spcPts val="0"/>
+              </a:spcAft>
+              <a:buNone/>
+              <a:defRPr sz="1500" b="0">
+                <a:solidFill>
+                  <a:srgbClr val="303437"/>
+                </a:solidFill>
+                <a:latin typeface="Noto Sans"/>
+              </a:defRPr>
+            </a:pPr>
+            <a:r>
+              <a:rPr sz="1500" b="0" lang="ja-JP" altLang="en-US">
+                <a:solidFill>
+                  <a:srgbClr val="303437"/>
+                </a:solidFill>
+                <a:latin typeface="Liberation Mono"/>
+                <a:ea typeface="Noto Sans CJK JP"/>
+                <a:cs typeface="Liberation Mono"/>
+              </a:rPr>
+              <a:t>    case = next(c for c in cases</a:t>
+            </a:r>
+          </a:p>
+          <a:p>
+            <a:pPr>
+              <a:lnSpc>
+                <a:spcPts val="1784"/>
+              </a:lnSpc>
+              <a:spcBef>
+                <a:spcPts val="0"/>
+              </a:spcBef>
+              <a:spcAft>
+                <a:spcPts val="0"/>
+              </a:spcAft>
+              <a:buNone/>
+              <a:defRPr sz="1500" b="0">
+                <a:solidFill>
+                  <a:srgbClr val="303437"/>
+                </a:solidFill>
+                <a:latin typeface="Noto Sans"/>
+              </a:defRPr>
+            </a:pPr>
+            <a:r>
+              <a:rPr sz="1500" b="0" lang="ja-JP" altLang="en-US">
+                <a:solidFill>
+                  <a:srgbClr val="303437"/>
+                </a:solidFill>
+                <a:latin typeface="Liberation Mono"/>
+                <a:ea typeface="Noto Sans CJK JP"/>
+                <a:cs typeface="Liberation Mono"/>
+              </a:rPr>
+              <a:t>                if c.get("summary/short")</a:t>
+            </a:r>
+          </a:p>
+          <a:p>
+            <a:pPr>
+              <a:lnSpc>
+                <a:spcPts val="1784"/>
+              </a:lnSpc>
+              <a:spcBef>
+                <a:spcPts val="0"/>
+              </a:spcBef>
+              <a:spcAft>
+                <a:spcPts val="0"/>
+              </a:spcAft>
+              <a:buNone/>
+              <a:defRPr sz="1500" b="0">
+                <a:solidFill>
+                  <a:srgbClr val="303437"/>
+                </a:solidFill>
+                <a:latin typeface="Noto Sans"/>
+              </a:defRPr>
+            </a:pPr>
+            <a:r>
+              <a:rPr sz="1500" b="0" lang="ja-JP" altLang="en-US">
+                <a:solidFill>
+                  <a:srgbClr val="303437"/>
+                </a:solidFill>
+                <a:latin typeface="Liberation Mono"/>
+                <a:ea typeface="Noto Sans CJK JP"/>
+                <a:cs typeface="Liberation Mono"/>
+              </a:rPr>
+              <a:t>                and c.get("summary/tiny"))</a:t>
+            </a:r>
+          </a:p>
+          <a:p>
+            <a:pPr>
+              <a:lnSpc>
+                <a:spcPts val="1784"/>
+              </a:lnSpc>
+              <a:spcBef>
+                <a:spcPts val="0"/>
+              </a:spcBef>
+              <a:spcAft>
+                <a:spcPts val="0"/>
+              </a:spcAft>
+              <a:buNone/>
+              <a:defRPr sz="1500" b="0">
+                <a:solidFill>
+                  <a:srgbClr val="303437"/>
+                </a:solidFill>
+                <a:latin typeface="Noto Sans"/>
+              </a:defRPr>
+            </a:pPr>
+            <a:r>
+              <a:rPr sz="1500" b="0" lang="ja-JP" altLang="en-US">
+                <a:solidFill>
+                  <a:srgbClr val="303437"/>
+                </a:solidFill>
+                <a:latin typeface="Liberation Mono"/>
+                <a:ea typeface="Noto Sans CJK JP"/>
+                <a:cs typeface="Liberation Mono"/>
+              </a:rPr>
+              <a:t>print(case["summary/short"])</a:t>
+            </a:r>
+          </a:p>
+          <a:p>
+            <a:pPr>
+              <a:lnSpc>
+                <a:spcPts val="1784"/>
+              </a:lnSpc>
+              <a:spcBef>
+                <a:spcPts val="0"/>
+              </a:spcBef>
+              <a:spcAft>
+                <a:spcPts val="0"/>
+              </a:spcAft>
+              <a:buNone/>
+              <a:defRPr sz="1500" b="0">
+                <a:solidFill>
+                  <a:srgbClr val="303437"/>
+                </a:solidFill>
+                <a:latin typeface="Noto Sans"/>
+              </a:defRPr>
+            </a:pPr>
+            <a:r>
+              <a:rPr sz="1500" b="0" lang="ja-JP" altLang="en-US">
+                <a:solidFill>
+                  <a:srgbClr val="303437"/>
+                </a:solidFill>
+                <a:latin typeface="Liberation Mono"/>
+                <a:ea typeface="Noto Sans CJK JP"/>
+                <a:cs typeface="Liberation Mono"/>
+              </a:rPr>
+              <a:t>print(case["summary/tiny"])</a:t>
+            </a:r>
+          </a:p>
+        </p:txBody>
+      </p:sp>
+      <p:sp>
+        <p:nvSpPr>
+          <p:cNvPr id="5" name="TextBox 4"/>
           <p:cNvSpPr txBox="1"/>
           <p:nvPr/>
         </p:nvSpPr>
         <p:spPr>
           <a:xfrm>
-            <a:off x="502920" y="4517136"/>
-            <a:ext cx="8183879" cy="530352"/>
+            <a:off x="594360" y="3850639"/>
+            <a:ext cx="7955279" cy="457200"/>
           </a:xfrm>
           <a:prstGeom prst="rect">
             <a:avLst/>
@@ -31361,6 +30155,60 @@
           <a:p>
             <a:pPr algn="l">
               <a:lnSpc>
+                <a:spcPts val="2047"/>
+              </a:lnSpc>
+              <a:spcBef>
+                <a:spcPts val="0"/>
+              </a:spcBef>
+              <a:spcAft>
+                <a:spcPts val="0"/>
+              </a:spcAft>
+              <a:buNone/>
+              <a:defRPr sz="1750" b="0">
+                <a:solidFill>
+                  <a:srgbClr val="303437"/>
+                </a:solidFill>
+                <a:latin typeface="Noto Sans"/>
+              </a:defRPr>
+            </a:pPr>
+            <a:r>
+              <a:rPr sz="1750" b="0" lang="ja-JP" altLang="en-US">
+                <a:solidFill>
+                  <a:srgbClr val="303437"/>
+                </a:solidFill>
+                <a:latin typeface="Noto Sans"/>
+                <a:ea typeface="Noto Sans CJK JP"/>
+                <a:cs typeface="Noto Sans"/>
+              </a:rPr>
+              <a:t>2022年版のtest.jsonをtest.jsonlとして保存し、ShortとTinyの両方がある事件の要約全文を表示する。</a:t>
+            </a:r>
+          </a:p>
+        </p:txBody>
+      </p:sp>
+      <p:sp>
+        <p:nvSpPr>
+          <p:cNvPr id="6" name="sources"/>
+          <p:cNvSpPr txBox="1"/>
+          <p:nvPr/>
+        </p:nvSpPr>
+        <p:spPr>
+          <a:xfrm>
+            <a:off x="502920" y="4700016"/>
+            <a:ext cx="8183879" cy="530352"/>
+          </a:xfrm>
+          <a:prstGeom prst="rect">
+            <a:avLst/>
+          </a:prstGeom>
+          <a:noFill/>
+        </p:spPr>
+        <p:txBody>
+          <a:bodyPr wrap="square" lIns="0" rIns="0" tIns="0" bIns="0">
+            <a:noAutofit/>
+          </a:bodyPr>
+          <a:lstStyle/>
+          <a:p>
+            <a:pPr algn="l">
+              <a:lnSpc>
                 <a:spcPts val="940"/>
               </a:lnSpc>
               <a:spcBef>
@@ -31386,25 +30234,8 @@
                 <a:ea typeface="Noto Sans CJK JP"/>
                 <a:cs typeface="Noto Sans"/>
               </a:rPr>
-              <a:t>[1] Shen et al. (2022). Multi-LexSum: Real-world Summaries of Civil Rights Lawsuits at Multiple Granularities. NeurIPS.</a:t>
-            </a:r>
-          </a:p>
-          <a:p>
-            <a:pPr>
-              <a:lnSpc>
-                <a:spcPts val="940"/>
-              </a:lnSpc>
-              <a:spcAft>
-                <a:spcPts val="350"/>
-              </a:spcAft>
-              <a:buNone/>
-              <a:defRPr sz="810" b="0">
-                <a:solidFill>
-                  <a:srgbClr val="303437"/>
-                </a:solidFill>
-                <a:latin typeface="Noto Sans"/>
-              </a:defRPr>
-            </a:pPr>
+              <a:t>[1] Multi-LexSum. 公式データカード・v1.1配布。</a:t>
+            </a:r>
             <a:r>
               <a:rPr sz="810" b="0" lang="ja-JP" altLang="en-US">
                 <a:solidFill>
@@ -31413,58 +30244,18 @@
                 <a:latin typeface="Noto Sans"/>
                 <a:ea typeface="Noto Sans CJK JP"/>
                 <a:cs typeface="Noto Sans"/>
+              </a:rPr>
+              <a:t>  </a:t>
+            </a:r>
+            <a:r>
+              <a:rPr sz="810" b="0" lang="ja-JP" altLang="en-US">
+                <a:solidFill>
+                  <a:srgbClr val="626669"/>
+                </a:solidFill>
+                <a:latin typeface="Noto Sans"/>
+                <a:ea typeface="Noto Sans CJK JP"/>
+                <a:cs typeface="Noto Sans"/>
                 <a:hlinkClick r:id="rId2"/>
-              </a:rPr>
-              <a:t>https://doi.org/10.52202/068431-0956</a:t>
-            </a:r>
-          </a:p>
-          <a:p>
-            <a:pPr>
-              <a:lnSpc>
-                <a:spcPts val="940"/>
-              </a:lnSpc>
-              <a:spcAft>
-                <a:spcPts val="350"/>
-              </a:spcAft>
-              <a:buNone/>
-              <a:defRPr sz="810" b="0">
-                <a:solidFill>
-                  <a:srgbClr val="303437"/>
-                </a:solidFill>
-                <a:latin typeface="Noto Sans"/>
-              </a:defRPr>
-            </a:pPr>
-            <a:r>
-              <a:rPr sz="810" b="0" lang="ja-JP" altLang="en-US">
-                <a:solidFill>
-                  <a:srgbClr val="626669"/>
-                </a:solidFill>
-                <a:latin typeface="Noto Sans"/>
-                <a:ea typeface="Noto Sans CJK JP"/>
-                <a:cs typeface="Noto Sans"/>
-              </a:rPr>
-              <a:t>[2] Shen et al. Multi-LexSum v20220616, 公開testレコード。</a:t>
-            </a:r>
-            <a:r>
-              <a:rPr sz="810" b="0" lang="ja-JP" altLang="en-US">
-                <a:solidFill>
-                  <a:srgbClr val="626669"/>
-                </a:solidFill>
-                <a:latin typeface="Noto Sans"/>
-                <a:ea typeface="Noto Sans CJK JP"/>
-                <a:cs typeface="Noto Sans"/>
-              </a:rPr>
-              <a:t>  </a:t>
-            </a:r>
-            <a:r>
-              <a:rPr sz="810" b="0" lang="ja-JP" altLang="en-US">
-                <a:solidFill>
-                  <a:srgbClr val="626669"/>
-                </a:solidFill>
-                <a:latin typeface="Noto Sans"/>
-                <a:ea typeface="Noto Sans CJK JP"/>
-                <a:cs typeface="Noto Sans"/>
-                <a:hlinkClick r:id="rId3"/>
               </a:rPr>
               <a:t>https://huggingface.co/datasets/allenai/multi_lexsum</a:t>
             </a:r>
@@ -31501,158 +30292,45 @@
         </p:nvSpPr>
         <p:spPr>
           <a:xfrm>
-            <a:off x="468172" y="650138"/>
-            <a:ext cx="8206740" cy="616305"/>
-          </a:xfrm>
-        </p:spPr>
-        <p:txBody>
-          <a:bodyPr wrap="square" lIns="0" rIns="0" tIns="0" bIns="0">
+            <a:off x="548640" y="2506875"/>
+            <a:ext cx="8046720" cy="585216"/>
+          </a:xfrm>
+        </p:spPr>
+        <p:txBody>
+          <a:bodyPr wrap="square" lIns="0" rIns="0" tIns="0" bIns="0" anchor="ctr">
             <a:noAutofit/>
           </a:bodyPr>
           <a:lstStyle/>
           <a:p>
-            <a:pPr algn="l">
+            <a:pPr algn="ctr">
               <a:lnSpc>
                 <a:spcPct val="110000"/>
               </a:lnSpc>
               <a:buNone/>
-              <a:defRPr sz="2800" b="0">
-                <a:solidFill>
-                  <a:srgbClr val="303437"/>
-                </a:solidFill>
-                <a:latin typeface="Noto Sans"/>
-              </a:defRPr>
-            </a:pPr>
-            <a:r>
-              <a:rPr sz="2800" b="1" lang="ja-JP" altLang="en-US">
-                <a:solidFill>
-                  <a:srgbClr val="303437"/>
-                </a:solidFill>
-                <a:latin typeface="Noto Sans"/>
-                <a:ea typeface="Noto Sans CJK JP"/>
-                <a:cs typeface="Noto Sans"/>
-              </a:rPr>
-              <a:t>参照要約の時点と、入力にない情報を見分ける</a:t>
-            </a:r>
-          </a:p>
-        </p:txBody>
-      </p:sp>
-      <p:sp>
-        <p:nvSpPr>
-          <p:cNvPr id="3" name="Text Placeholder 2"/>
-          <p:cNvSpPr>
-            <a:spLocks noGrp="1"/>
-          </p:cNvSpPr>
-          <p:nvPr>
-            <p:ph type="body" idx="1"/>
-          </p:nvPr>
-        </p:nvSpPr>
-        <p:spPr>
-          <a:xfrm>
-            <a:off x="594360" y="1463040"/>
-            <a:ext cx="7955279" cy="3044952"/>
-          </a:xfrm>
-        </p:spPr>
-        <p:txBody>
-          <a:bodyPr wrap="square" tIns="91440" bIns="91440">
-            <a:noAutofit/>
-          </a:bodyPr>
-          <a:lstStyle/>
-          <a:p>
-            <a:pPr marL="457200" indent="-355600">
-              <a:lnSpc>
-                <a:spcPts val="2379"/>
-              </a:lnSpc>
-              <a:spcAft>
-                <a:spcPts val="700"/>
-              </a:spcAft>
-              <a:buSzPct val="66500"/>
-              <a:buFont typeface="Noto Sans CJK JP"/>
-              <a:buChar char="●"/>
-              <a:defRPr sz="2000" b="0">
-                <a:solidFill>
-                  <a:srgbClr val="303437"/>
-                </a:solidFill>
-                <a:latin typeface="Noto Sans"/>
-              </a:defRPr>
-            </a:pPr>
-            <a:r>
-              <a:rPr sz="2000" b="0" lang="ja-JP" altLang="en-US">
-                <a:solidFill>
-                  <a:srgbClr val="303437"/>
-                </a:solidFill>
-                <a:latin typeface="Noto Sans"/>
-                <a:ea typeface="Noto Sans CJK JP"/>
-                <a:cs typeface="Noto Sans"/>
-              </a:rPr>
-              <a:t>追加例には「Clearinghouseに追加」「資料を掲載」など投稿の文脈を持つTinyがある。自然な事件要約への言い換えを、日本語訳に黙って混ぜない。</a:t>
-            </a:r>
-          </a:p>
-          <a:p>
-            <a:pPr marL="457200" indent="-355600">
-              <a:lnSpc>
-                <a:spcPts val="2379"/>
-              </a:lnSpc>
-              <a:spcAft>
-                <a:spcPts val="700"/>
-              </a:spcAft>
-              <a:buSzPct val="66500"/>
-              <a:buFont typeface="Noto Sans CJK JP"/>
-              <a:buChar char="●"/>
-              <a:defRPr sz="2000" b="0">
-                <a:solidFill>
-                  <a:srgbClr val="303437"/>
-                </a:solidFill>
-                <a:latin typeface="Noto Sans"/>
-              </a:defRPr>
-            </a:pPr>
-            <a:r>
-              <a:rPr sz="2000" b="0" lang="ja-JP" altLang="en-US">
-                <a:solidFill>
-                  <a:srgbClr val="303437"/>
-                </a:solidFill>
-                <a:latin typeface="Noto Sans"/>
-                <a:ea typeface="Noto Sans CJK JP"/>
-                <a:cs typeface="Noto Sans"/>
-              </a:rPr>
-              <a:t>実例6のTinyは仮差止めの成立や判事の発言まで含むが、Shortにはない。短い入力だけから、その情報を復元できるとは限らない。</a:t>
-            </a:r>
-          </a:p>
-          <a:p>
-            <a:pPr marL="457200" indent="-355600">
-              <a:lnSpc>
-                <a:spcPts val="2379"/>
-              </a:lnSpc>
-              <a:spcAft>
-                <a:spcPts val="0"/>
-              </a:spcAft>
-              <a:buSzPct val="66500"/>
-              <a:buFont typeface="Noto Sans CJK JP"/>
-              <a:buChar char="●"/>
-              <a:defRPr sz="2000" b="0">
-                <a:solidFill>
-                  <a:srgbClr val="303437"/>
-                </a:solidFill>
-                <a:latin typeface="Noto Sans"/>
-              </a:defRPr>
-            </a:pPr>
-            <a:r>
-              <a:rPr sz="2000" b="0" lang="ja-JP" altLang="en-US">
-                <a:solidFill>
-                  <a:srgbClr val="303437"/>
-                </a:solidFill>
-                <a:latin typeface="Noto Sans"/>
-                <a:ea typeface="Noto Sans CJK JP"/>
-                <a:cs typeface="Noto Sans"/>
-              </a:rPr>
-              <a:t>事件の更新時点、入力に含まれる事実、参照文に含まれる事実を確認する。参照の不足や追加情報を、モデルの単純な誤りと取り違えない。</a:t>
-            </a:r>
-          </a:p>
-        </p:txBody>
-      </p:sp>
-      <p:sp>
-        <p:nvSpPr>
-          <p:cNvPr id="4" name="Title 3"/>
+              <a:defRPr sz="3600" b="0">
+                <a:solidFill>
+                  <a:srgbClr val="303437"/>
+                </a:solidFill>
+                <a:latin typeface="Noto Sans"/>
+              </a:defRPr>
+            </a:pPr>
+            <a:r>
+              <a:rPr sz="3600" b="1" lang="ja-JP" altLang="en-US">
+                <a:solidFill>
+                  <a:srgbClr val="303437"/>
+                </a:solidFill>
+                <a:latin typeface="Noto Sans"/>
+                <a:ea typeface="Noto Sans CJK JP"/>
+                <a:cs typeface="Noto Sans"/>
+              </a:rPr>
+              <a:t>研究と参考文献</a:t>
+            </a:r>
+          </a:p>
+        </p:txBody>
+      </p:sp>
+      <p:sp>
+        <p:nvSpPr>
+          <p:cNvPr id="3" name="Title 2"/>
           <p:cNvSpPr>
             <a:spLocks noGrp="1"/>
           </p:cNvSpPr>
@@ -31693,84 +30371,7 @@
                 <a:ea typeface="Noto Sans CJK JP"/>
                 <a:cs typeface="Noto Sans"/>
               </a:rPr>
-              <a:t>Appendix: 2. 評価・分割・配布の詳細</a:t>
-            </a:r>
-          </a:p>
-        </p:txBody>
-      </p:sp>
-      <p:sp>
-        <p:nvSpPr>
-          <p:cNvPr id="5" name="sources"/>
-          <p:cNvSpPr txBox="1"/>
-          <p:nvPr/>
-        </p:nvSpPr>
-        <p:spPr>
-          <a:xfrm>
-            <a:off x="502920" y="4700016"/>
-            <a:ext cx="8183879" cy="530352"/>
-          </a:xfrm>
-          <a:prstGeom prst="rect">
-            <a:avLst/>
-          </a:prstGeom>
-          <a:noFill/>
-        </p:spPr>
-        <p:txBody>
-          <a:bodyPr wrap="square" lIns="0" rIns="0" tIns="0" bIns="0">
-            <a:noAutofit/>
-          </a:bodyPr>
-          <a:lstStyle/>
-          <a:p>
-            <a:pPr algn="l">
-              <a:lnSpc>
-                <a:spcPts val="940"/>
-              </a:lnSpc>
-              <a:spcBef>
-                <a:spcPts val="0"/>
-              </a:spcBef>
-              <a:spcAft>
-                <a:spcPts val="350"/>
-              </a:spcAft>
-              <a:buNone/>
-              <a:defRPr sz="810" b="0">
-                <a:solidFill>
-                  <a:srgbClr val="303437"/>
-                </a:solidFill>
-                <a:latin typeface="Noto Sans"/>
-              </a:defRPr>
-            </a:pPr>
-            <a:r>
-              <a:rPr sz="810" b="0" lang="ja-JP" altLang="en-US">
-                <a:solidFill>
-                  <a:srgbClr val="626669"/>
-                </a:solidFill>
-                <a:latin typeface="Noto Sans"/>
-                <a:ea typeface="Noto Sans CJK JP"/>
-                <a:cs typeface="Noto Sans"/>
-              </a:rPr>
-              <a:t>[1] Shen et al. Multi-LexSum v20220616, 公開testレコード。</a:t>
-            </a:r>
-            <a:r>
-              <a:rPr sz="810" b="0" lang="ja-JP" altLang="en-US">
-                <a:solidFill>
-                  <a:srgbClr val="626669"/>
-                </a:solidFill>
-                <a:latin typeface="Noto Sans"/>
-                <a:ea typeface="Noto Sans CJK JP"/>
-                <a:cs typeface="Noto Sans"/>
-              </a:rPr>
-              <a:t>  </a:t>
-            </a:r>
-            <a:r>
-              <a:rPr sz="810" b="0" lang="ja-JP" altLang="en-US">
-                <a:solidFill>
-                  <a:srgbClr val="626669"/>
-                </a:solidFill>
-                <a:latin typeface="Noto Sans"/>
-                <a:ea typeface="Noto Sans CJK JP"/>
-                <a:cs typeface="Noto Sans"/>
-                <a:hlinkClick r:id="rId2"/>
-              </a:rPr>
-              <a:t>https://huggingface.co/datasets/allenai/multi_lexsum</a:t>
+              <a:t>Appendix: 3. 研究と参考文献</a:t>
             </a:r>
           </a:p>
         </p:txBody>
@@ -31836,7 +30437,7 @@
                 <a:ea typeface="Noto Sans CJK JP"/>
                 <a:cs typeface="Noto Sans"/>
               </a:rPr>
-              <a:t>HELMの説明用例と、実際のキー指定を分ける</a:t>
+              <a:t>法律実務の執筆と、要約モデルの研究を結ぶ</a:t>
             </a:r>
           </a:p>
         </p:txBody>
@@ -31889,7 +30490,7 @@
                 <a:ea typeface="Noto Sans CJK JP"/>
                 <a:cs typeface="Noto Sans"/>
               </a:rPr>
-              <a:t>v0.4.0のクラス説明にはShort→Tinyの例があるが、_load_datasetの実装はLong→Shortを指定する。Tinyを使う可能性はコメントにあるだけである。</a:t>
+              <a:t>Zejiang Shen、Kyle LoらがAllen Institute for AIと、ミシガン大学のCivil Rights Litigation Clearinghouseなどの協力で構築した。法学者Margo SchlangerとDoug Downeyも参加した。</a:t>
             </a:r>
           </a:p>
           <a:p>
@@ -31898,7 +30499,7 @@
                 <a:spcPts val="2379"/>
               </a:lnSpc>
               <a:spcAft>
-                <a:spcPts val="700"/>
+                <a:spcPts val="0"/>
               </a:spcAft>
               <a:buSzPct val="66500"/>
               <a:buFont typeface="Noto Sans CJK JP"/>
@@ -31919,37 +30520,7 @@
                 <a:ea typeface="Noto Sans CJK JP"/>
                 <a:cs typeface="Noto Sans"/>
               </a:rPr>
-              <a:t>実際の入力整形は空白区切り。doc_max_lengthの単位は文字数でもモデルのトークン数でもなく、空白で区切った語数である。</a:t>
-            </a:r>
-          </a:p>
-          <a:p>
-            <a:pPr marL="457200" indent="-355600">
-              <a:lnSpc>
-                <a:spcPts val="2379"/>
-              </a:lnSpc>
-              <a:spcAft>
-                <a:spcPts val="0"/>
-              </a:spcAft>
-              <a:buSzPct val="66500"/>
-              <a:buFont typeface="Noto Sans CJK JP"/>
-              <a:buChar char="●"/>
-              <a:defRPr sz="2000" b="0">
-                <a:solidFill>
-                  <a:srgbClr val="303437"/>
-                </a:solidFill>
-                <a:latin typeface="Noto Sans"/>
-              </a:defRPr>
-            </a:pPr>
-            <a:r>
-              <a:rPr sz="2000" b="0" lang="ja-JP" altLang="en-US">
-                <a:solidFill>
-                  <a:srgbClr val="303437"/>
-                </a:solidFill>
-                <a:latin typeface="Noto Sans"/>
-                <a:ea typeface="Noto Sans CJK JP"/>
-                <a:cs typeface="Noto Sans"/>
-              </a:rPr>
-              <a:t>公開runが0件なので、提示数や試行平均のモデル得点は設定したことにしていない。2022年の追加学習実験とも区別する。</a:t>
+              <a:t>数百人の法学生らが事件要約の執筆に関わる。論文はNeurIPS 2022のDatasets and Benchmarks Trackに採択された。</a:t>
             </a:r>
           </a:p>
         </p:txBody>
@@ -31997,7 +30568,7 @@
                 <a:ea typeface="Noto Sans CJK JP"/>
                 <a:cs typeface="Noto Sans"/>
               </a:rPr>
-              <a:t>Appendix: 2. 評価・分割・配布の詳細</a:t>
+              <a:t>Appendix: 3. 研究と参考文献</a:t>
             </a:r>
           </a:p>
         </p:txBody>
@@ -32010,7 +30581,7 @@
         </p:nvSpPr>
         <p:spPr>
           <a:xfrm>
-            <a:off x="502920" y="4700016"/>
+            <a:off x="502920" y="4517136"/>
             <a:ext cx="8183879" cy="530352"/>
           </a:xfrm>
           <a:prstGeom prst="rect">
@@ -32051,7 +30622,7 @@
                 <a:ea typeface="Noto Sans CJK JP"/>
                 <a:cs typeface="Noto Sans"/>
               </a:rPr>
-              <a:t>[1] Stanford CRFM. LegalSummarizationScenario, HELM v0.4.0.</a:t>
+              <a:t>[1] Shen et al. (2022). Multi-LexSum: Real-world Summaries of Civil Rights Lawsuits at Multiple Granularities. NeurIPS.</a:t>
             </a:r>
           </a:p>
           <a:p>
@@ -32078,9 +30649,60 @@
                 <a:latin typeface="Noto Sans"/>
                 <a:ea typeface="Noto Sans CJK JP"/>
                 <a:cs typeface="Noto Sans"/>
+              </a:rPr>
+              <a:t/>
+            </a:r>
+            <a:r>
+              <a:rPr sz="810" b="0" lang="ja-JP" altLang="en-US">
+                <a:solidFill>
+                  <a:srgbClr val="626669"/>
+                </a:solidFill>
+                <a:latin typeface="Noto Sans"/>
+                <a:ea typeface="Noto Sans CJK JP"/>
+                <a:cs typeface="Noto Sans"/>
                 <a:hlinkClick r:id="rId2"/>
               </a:rPr>
-              <a:t>https://github.com/stanford-crfm/helm/blob/v0.4.0/src/helm/benchmark/scenarios/legal_summarization_scenario.py</a:t>
+              <a:t>https://doi.org/10.52202/068431-0956</a:t>
+            </a:r>
+          </a:p>
+          <a:p>
+            <a:pPr>
+              <a:lnSpc>
+                <a:spcPts val="940"/>
+              </a:lnSpc>
+              <a:spcAft>
+                <a:spcPts val="350"/>
+              </a:spcAft>
+              <a:buNone/>
+              <a:defRPr sz="810" b="0">
+                <a:solidFill>
+                  <a:srgbClr val="303437"/>
+                </a:solidFill>
+                <a:latin typeface="Noto Sans"/>
+              </a:defRPr>
+            </a:pPr>
+            <a:r>
+              <a:rPr sz="810" b="0" lang="ja-JP" altLang="en-US">
+                <a:solidFill>
+                  <a:srgbClr val="626669"/>
+                </a:solidFill>
+                <a:latin typeface="Noto Sans"/>
+                <a:ea typeface="Noto Sans CJK JP"/>
+                <a:cs typeface="Noto Sans"/>
+              </a:rPr>
+              <a:t>[2] Multi-LexSum. 公式サイト。  </a:t>
+            </a:r>
+            <a:r>
+              <a:rPr sz="810" b="0" lang="ja-JP" altLang="en-US">
+                <a:solidFill>
+                  <a:srgbClr val="626669"/>
+                </a:solidFill>
+                <a:latin typeface="Noto Sans"/>
+                <a:ea typeface="Noto Sans CJK JP"/>
+                <a:cs typeface="Noto Sans"/>
+                <a:hlinkClick r:id="rId3"/>
+              </a:rPr>
+              <a:t>https://multilexsum.github.io/</a:t>
             </a:r>
           </a:p>
         </p:txBody>
@@ -32146,127 +30768,14 @@
                 <a:ea typeface="Noto Sans CJK JP"/>
                 <a:cs typeface="Noto Sans"/>
               </a:rPr>
-              <a:t>取得容量は、概要ファイルと原文書を分ける</a:t>
-            </a:r>
-          </a:p>
-        </p:txBody>
-      </p:sp>
-      <p:sp>
-        <p:nvSpPr>
-          <p:cNvPr id="3" name="Text Placeholder 2"/>
-          <p:cNvSpPr>
-            <a:spLocks noGrp="1"/>
-          </p:cNvSpPr>
-          <p:nvPr>
-            <p:ph type="body" idx="1"/>
-          </p:nvPr>
-        </p:nvSpPr>
-        <p:spPr>
-          <a:xfrm>
-            <a:off x="594360" y="1463040"/>
-            <a:ext cx="7955279" cy="3044952"/>
-          </a:xfrm>
-        </p:spPr>
-        <p:txBody>
-          <a:bodyPr wrap="square" tIns="91440" bIns="91440">
-            <a:noAutofit/>
-          </a:bodyPr>
-          <a:lstStyle/>
-          <a:p>
-            <a:pPr marL="457200" indent="-355600">
-              <a:lnSpc>
-                <a:spcPts val="2379"/>
-              </a:lnSpc>
-              <a:spcAft>
-                <a:spcPts val="700"/>
-              </a:spcAft>
-              <a:buSzPct val="66500"/>
-              <a:buFont typeface="Noto Sans CJK JP"/>
-              <a:buChar char="●"/>
-              <a:defRPr sz="2000" b="0">
-                <a:solidFill>
-                  <a:srgbClr val="303437"/>
-                </a:solidFill>
-                <a:latin typeface="Noto Sans"/>
-              </a:defRPr>
-            </a:pPr>
-            <a:r>
-              <a:rPr sz="2000" b="0" lang="ja-JP" altLang="en-US">
-                <a:solidFill>
-                  <a:srgbClr val="303437"/>
-                </a:solidFill>
-                <a:latin typeface="Noto Sans"/>
-                <a:ea typeface="Noto Sans CJK JP"/>
-                <a:cs typeface="Noto Sans"/>
-              </a:rPr>
-              <a:t>v20220616のtrain・dev・test概要ファイルは合計22,265,708 bytes（約22.3 MB）。要約全文、事件ID、関連文書IDなどを含む。</a:t>
-            </a:r>
-          </a:p>
-          <a:p>
-            <a:pPr marL="457200" indent="-355600">
-              <a:lnSpc>
-                <a:spcPts val="2379"/>
-              </a:lnSpc>
-              <a:spcAft>
-                <a:spcPts val="700"/>
-              </a:spcAft>
-              <a:buSzPct val="66500"/>
-              <a:buFont typeface="Noto Sans CJK JP"/>
-              <a:buChar char="●"/>
-              <a:defRPr sz="2000" b="0">
-                <a:solidFill>
-                  <a:srgbClr val="303437"/>
-                </a:solidFill>
-                <a:latin typeface="Noto Sans"/>
-              </a:defRPr>
-            </a:pPr>
-            <a:r>
-              <a:rPr sz="2000" b="0" lang="ja-JP" altLang="en-US">
-                <a:solidFill>
-                  <a:srgbClr val="303437"/>
-                </a:solidFill>
-                <a:latin typeface="Noto Sans"/>
-                <a:ea typeface="Noto Sans CJK JP"/>
-                <a:cs typeface="Noto Sans"/>
-              </a:rPr>
-              <a:t>原文書のsources.jsonは配布メタデータ上で2,219,115,572 bytes（約2.22 GB）。今回はこの本体を取得せず、13実例の入力であるShortと参照Tinyを概要ファイルから得た。</a:t>
-            </a:r>
-          </a:p>
-          <a:p>
-            <a:pPr marL="457200" indent="-355600">
-              <a:lnSpc>
-                <a:spcPts val="2379"/>
-              </a:lnSpc>
-              <a:spcAft>
-                <a:spcPts val="0"/>
-              </a:spcAft>
-              <a:buSzPct val="66500"/>
-              <a:buFont typeface="Noto Sans CJK JP"/>
-              <a:buChar char="●"/>
-              <a:defRPr sz="2000" b="0">
-                <a:solidFill>
-                  <a:srgbClr val="303437"/>
-                </a:solidFill>
-                <a:latin typeface="Noto Sans"/>
-              </a:defRPr>
-            </a:pPr>
-            <a:r>
-              <a:rPr sz="2000" b="0" lang="ja-JP" altLang="en-US">
-                <a:solidFill>
-                  <a:srgbClr val="303437"/>
-                </a:solidFill>
-                <a:latin typeface="Noto Sans"/>
-                <a:ea typeface="Noto Sans CJK JP"/>
-                <a:cs typeface="Noto Sans"/>
-              </a:rPr>
-              <a:t>固定Hugging Face改訂、各ファイルの取得URL・bytes・SHA-256と、選んだ元レコードを保存した。</a:t>
-            </a:r>
-          </a:p>
-        </p:txBody>
-      </p:sp>
-      <p:sp>
-        <p:nvSpPr>
-          <p:cNvPr id="4" name="Title 3"/>
+              <a:t>参考文献</a:t>
+            </a:r>
+          </a:p>
+        </p:txBody>
+      </p:sp>
+      <p:sp>
+        <p:nvSpPr>
+          <p:cNvPr id="3" name="Title 2"/>
           <p:cNvSpPr>
             <a:spLocks noGrp="1"/>
           </p:cNvSpPr>
@@ -32307,21 +30816,21 @@
                 <a:ea typeface="Noto Sans CJK JP"/>
                 <a:cs typeface="Noto Sans"/>
               </a:rPr>
-              <a:t>Appendix: 2. 評価・分割・配布の詳細</a:t>
-            </a:r>
-          </a:p>
-        </p:txBody>
-      </p:sp>
-      <p:sp>
-        <p:nvSpPr>
-          <p:cNvPr id="5" name="sources"/>
+              <a:t>Appendix: 3. 研究と参考文献</a:t>
+            </a:r>
+          </a:p>
+        </p:txBody>
+      </p:sp>
+      <p:sp>
+        <p:nvSpPr>
+          <p:cNvPr id="4" name="TextBox 3"/>
           <p:cNvSpPr txBox="1"/>
           <p:nvPr/>
         </p:nvSpPr>
         <p:spPr>
           <a:xfrm>
-            <a:off x="502920" y="4700016"/>
-            <a:ext cx="8183879" cy="530352"/>
+            <a:off x="548640" y="1444752"/>
+            <a:ext cx="8046720" cy="640080"/>
           </a:xfrm>
           <a:prstGeom prst="rect">
             <a:avLst/>
@@ -32336,24 +30845,78 @@
           <a:p>
             <a:pPr algn="l">
               <a:lnSpc>
-                <a:spcPts val="940"/>
-              </a:lnSpc>
-              <a:spcBef>
-                <a:spcPts val="0"/>
-              </a:spcBef>
-              <a:spcAft>
-                <a:spcPts val="350"/>
-              </a:spcAft>
-              <a:buNone/>
-              <a:defRPr sz="810" b="0">
-                <a:solidFill>
-                  <a:srgbClr val="303437"/>
-                </a:solidFill>
-                <a:latin typeface="Noto Sans"/>
-              </a:defRPr>
-            </a:pPr>
-            <a:r>
-              <a:rPr sz="810" b="0" lang="ja-JP" altLang="en-US">
+                <a:spcPts val="2072"/>
+              </a:lnSpc>
+              <a:spcBef>
+                <a:spcPts val="0"/>
+              </a:spcBef>
+              <a:spcAft>
+                <a:spcPts val="0"/>
+              </a:spcAft>
+              <a:buNone/>
+              <a:defRPr sz="1850" b="0">
+                <a:solidFill>
+                  <a:srgbClr val="303437"/>
+                </a:solidFill>
+                <a:latin typeface="Noto Sans"/>
+              </a:defRPr>
+            </a:pPr>
+            <a:r>
+              <a:rPr sz="1850" b="1" lang="ja-JP" altLang="en-US">
+                <a:solidFill>
+                  <a:srgbClr val="303437"/>
+                </a:solidFill>
+                <a:latin typeface="Noto Sans"/>
+                <a:ea typeface="Noto Sans CJK JP"/>
+                <a:cs typeface="Noto Sans"/>
+              </a:rPr>
+              <a:t>Multi-LexSum: Real-world Summaries of Civil Rights Lawsuits at Multiple Granularities</a:t>
+            </a:r>
+          </a:p>
+        </p:txBody>
+      </p:sp>
+      <p:sp>
+        <p:nvSpPr>
+          <p:cNvPr id="5" name="TextBox 4"/>
+          <p:cNvSpPr txBox="1"/>
+          <p:nvPr/>
+        </p:nvSpPr>
+        <p:spPr>
+          <a:xfrm>
+            <a:off x="548640" y="2112264"/>
+            <a:ext cx="8046720" cy="256032"/>
+          </a:xfrm>
+          <a:prstGeom prst="rect">
+            <a:avLst/>
+          </a:prstGeom>
+          <a:noFill/>
+        </p:spPr>
+        <p:txBody>
+          <a:bodyPr wrap="square" lIns="0" rIns="0" tIns="0" bIns="0">
+            <a:noAutofit/>
+          </a:bodyPr>
+          <a:lstStyle/>
+          <a:p>
+            <a:pPr algn="l">
+              <a:lnSpc>
+                <a:spcPts val="1462"/>
+              </a:lnSpc>
+              <a:spcBef>
+                <a:spcPts val="0"/>
+              </a:spcBef>
+              <a:spcAft>
+                <a:spcPts val="0"/>
+              </a:spcAft>
+              <a:buNone/>
+              <a:defRPr sz="1250" b="0">
+                <a:solidFill>
+                  <a:srgbClr val="303437"/>
+                </a:solidFill>
+                <a:latin typeface="Noto Sans"/>
+              </a:defRPr>
+            </a:pPr>
+            <a:r>
+              <a:rPr sz="1250" b="0" lang="ja-JP" altLang="en-US">
                 <a:solidFill>
                   <a:srgbClr val="626669"/>
                 </a:solidFill>
@@ -32361,10 +30924,216 @@
                 <a:ea typeface="Noto Sans CJK JP"/>
                 <a:cs typeface="Noto Sans"/>
               </a:rPr>
-              <a:t>[1] Multi-LexSum. 公式データカード・v1.1配布。</a:t>
-            </a:r>
-            <a:r>
-              <a:rPr sz="810" b="0" lang="ja-JP" altLang="en-US">
+              <a:t>Shen et al.・2022・NeurIPS 35</a:t>
+            </a:r>
+          </a:p>
+        </p:txBody>
+      </p:sp>
+      <p:sp>
+        <p:nvSpPr>
+          <p:cNvPr id="6" name="TextBox 5"/>
+          <p:cNvSpPr txBox="1"/>
+          <p:nvPr/>
+        </p:nvSpPr>
+        <p:spPr>
+          <a:xfrm>
+            <a:off x="548640" y="2377440"/>
+            <a:ext cx="8046720" cy="438912"/>
+          </a:xfrm>
+          <a:prstGeom prst="rect">
+            <a:avLst/>
+          </a:prstGeom>
+          <a:noFill/>
+        </p:spPr>
+        <p:txBody>
+          <a:bodyPr wrap="square" lIns="0" rIns="0" tIns="0" bIns="0">
+            <a:noAutofit/>
+          </a:bodyPr>
+          <a:lstStyle/>
+          <a:p>
+            <a:pPr algn="l">
+              <a:lnSpc>
+                <a:spcPts val="1913"/>
+              </a:lnSpc>
+              <a:spcBef>
+                <a:spcPts val="0"/>
+              </a:spcBef>
+              <a:spcAft>
+                <a:spcPts val="0"/>
+              </a:spcAft>
+              <a:buNone/>
+              <a:defRPr sz="1650" b="0">
+                <a:solidFill>
+                  <a:srgbClr val="303437"/>
+                </a:solidFill>
+                <a:latin typeface="Noto Sans"/>
+              </a:defRPr>
+            </a:pPr>
+            <a:r>
+              <a:rPr sz="1650" b="0" lang="ja-JP" altLang="en-US">
+                <a:solidFill>
+                  <a:srgbClr val="303437"/>
+                </a:solidFill>
+                <a:latin typeface="Noto Sans"/>
+                <a:ea typeface="Noto Sans CJK JP"/>
+                <a:cs typeface="Noto Sans"/>
+              </a:rPr>
+              <a:t>三粒度の専門家要約を構築し、複数文書・要約圧縮の実験と人手評価を報告する。</a:t>
+            </a:r>
+          </a:p>
+        </p:txBody>
+      </p:sp>
+      <p:sp>
+        <p:nvSpPr>
+          <p:cNvPr id="7" name="TextBox 6"/>
+          <p:cNvSpPr txBox="1"/>
+          <p:nvPr/>
+        </p:nvSpPr>
+        <p:spPr>
+          <a:xfrm>
+            <a:off x="548640" y="2834640"/>
+            <a:ext cx="8046720" cy="347472"/>
+          </a:xfrm>
+          <a:prstGeom prst="rect">
+            <a:avLst/>
+          </a:prstGeom>
+          <a:noFill/>
+        </p:spPr>
+        <p:txBody>
+          <a:bodyPr wrap="square" lIns="0" rIns="0" tIns="0" bIns="0">
+            <a:noAutofit/>
+          </a:bodyPr>
+          <a:lstStyle/>
+          <a:p>
+            <a:pPr algn="l">
+              <a:lnSpc>
+                <a:spcPts val="1088"/>
+              </a:lnSpc>
+              <a:spcBef>
+                <a:spcPts val="0"/>
+              </a:spcBef>
+              <a:spcAft>
+                <a:spcPts val="0"/>
+              </a:spcAft>
+              <a:buNone/>
+              <a:defRPr sz="930" b="0">
+                <a:solidFill>
+                  <a:srgbClr val="303437"/>
+                </a:solidFill>
+                <a:latin typeface="Noto Sans"/>
+              </a:defRPr>
+            </a:pPr>
+            <a:r>
+              <a:rPr sz="930" b="0" lang="ja-JP" altLang="en-US">
+                <a:solidFill>
+                  <a:srgbClr val="2166AC"/>
+                </a:solidFill>
+                <a:latin typeface="Noto Sans"/>
+                <a:ea typeface="Noto Sans CJK JP"/>
+                <a:cs typeface="Noto Sans"/>
+                <a:hlinkClick r:id="rId2"/>
+              </a:rPr>
+              <a:t>https://doi.org/10.52202/068431-0956</a:t>
+            </a:r>
+          </a:p>
+        </p:txBody>
+      </p:sp>
+      <p:sp>
+        <p:nvSpPr>
+          <p:cNvPr id="8" name="TextBox 7"/>
+          <p:cNvSpPr txBox="1"/>
+          <p:nvPr/>
+        </p:nvSpPr>
+        <p:spPr>
+          <a:xfrm>
+            <a:off x="548640" y="3017520"/>
+            <a:ext cx="8046720" cy="640080"/>
+          </a:xfrm>
+          <a:prstGeom prst="rect">
+            <a:avLst/>
+          </a:prstGeom>
+          <a:noFill/>
+        </p:spPr>
+        <p:txBody>
+          <a:bodyPr wrap="square" lIns="0" rIns="0" tIns="0" bIns="0">
+            <a:noAutofit/>
+          </a:bodyPr>
+          <a:lstStyle/>
+          <a:p>
+            <a:pPr algn="l">
+              <a:lnSpc>
+                <a:spcPts val="2072"/>
+              </a:lnSpc>
+              <a:spcBef>
+                <a:spcPts val="0"/>
+              </a:spcBef>
+              <a:spcAft>
+                <a:spcPts val="0"/>
+              </a:spcAft>
+              <a:buNone/>
+              <a:defRPr sz="1850" b="0">
+                <a:solidFill>
+                  <a:srgbClr val="303437"/>
+                </a:solidFill>
+                <a:latin typeface="Noto Sans"/>
+              </a:defRPr>
+            </a:pPr>
+            <a:r>
+              <a:rPr sz="1850" b="1" lang="ja-JP" altLang="en-US">
+                <a:solidFill>
+                  <a:srgbClr val="303437"/>
+                </a:solidFill>
+                <a:latin typeface="Noto Sans"/>
+                <a:ea typeface="Noto Sans CJK JP"/>
+                <a:cs typeface="Noto Sans"/>
+              </a:rPr>
+              <a:t>Multi-LexSum Dataset Sheet</a:t>
+            </a:r>
+          </a:p>
+        </p:txBody>
+      </p:sp>
+      <p:sp>
+        <p:nvSpPr>
+          <p:cNvPr id="9" name="TextBox 8"/>
+          <p:cNvSpPr txBox="1"/>
+          <p:nvPr/>
+        </p:nvSpPr>
+        <p:spPr>
+          <a:xfrm>
+            <a:off x="548640" y="3685031"/>
+            <a:ext cx="8046720" cy="256032"/>
+          </a:xfrm>
+          <a:prstGeom prst="rect">
+            <a:avLst/>
+          </a:prstGeom>
+          <a:noFill/>
+        </p:spPr>
+        <p:txBody>
+          <a:bodyPr wrap="square" lIns="0" rIns="0" tIns="0" bIns="0">
+            <a:noAutofit/>
+          </a:bodyPr>
+          <a:lstStyle/>
+          <a:p>
+            <a:pPr algn="l">
+              <a:lnSpc>
+                <a:spcPts val="1462"/>
+              </a:lnSpc>
+              <a:spcBef>
+                <a:spcPts val="0"/>
+              </a:spcBef>
+              <a:spcAft>
+                <a:spcPts val="0"/>
+              </a:spcAft>
+              <a:buNone/>
+              <a:defRPr sz="1250" b="0">
+                <a:solidFill>
+                  <a:srgbClr val="303437"/>
+                </a:solidFill>
+                <a:latin typeface="Noto Sans"/>
+              </a:defRPr>
+            </a:pPr>
+            <a:r>
+              <a:rPr sz="1250" b="0" lang="ja-JP" altLang="en-US">
                 <a:solidFill>
                   <a:srgbClr val="626669"/>
                 </a:solidFill>
@@ -32372,19 +31141,116 @@
                 <a:ea typeface="Noto Sans CJK JP"/>
                 <a:cs typeface="Noto Sans"/>
               </a:rPr>
-              <a:t>  </a:t>
-            </a:r>
-            <a:r>
-              <a:rPr sz="810" b="0" lang="ja-JP" altLang="en-US">
-                <a:solidFill>
-                  <a:srgbClr val="626669"/>
-                </a:solidFill>
-                <a:latin typeface="Noto Sans"/>
-                <a:ea typeface="Noto Sans CJK JP"/>
-                <a:cs typeface="Noto Sans"/>
-                <a:hlinkClick r:id="rId2"/>
-              </a:rPr>
-              <a:t>https://huggingface.co/datasets/allenai/multi_lexsum</a:t>
+              <a:t>Multi-LexSum team・2022・公式データシート</a:t>
+            </a:r>
+          </a:p>
+        </p:txBody>
+      </p:sp>
+      <p:sp>
+        <p:nvSpPr>
+          <p:cNvPr id="10" name="TextBox 9"/>
+          <p:cNvSpPr txBox="1"/>
+          <p:nvPr/>
+        </p:nvSpPr>
+        <p:spPr>
+          <a:xfrm>
+            <a:off x="548640" y="3950208"/>
+            <a:ext cx="8046720" cy="438912"/>
+          </a:xfrm>
+          <a:prstGeom prst="rect">
+            <a:avLst/>
+          </a:prstGeom>
+          <a:noFill/>
+        </p:spPr>
+        <p:txBody>
+          <a:bodyPr wrap="square" lIns="0" rIns="0" tIns="0" bIns="0">
+            <a:noAutofit/>
+          </a:bodyPr>
+          <a:lstStyle/>
+          <a:p>
+            <a:pPr algn="l">
+              <a:lnSpc>
+                <a:spcPts val="1913"/>
+              </a:lnSpc>
+              <a:spcBef>
+                <a:spcPts val="0"/>
+              </a:spcBef>
+              <a:spcAft>
+                <a:spcPts val="0"/>
+              </a:spcAft>
+              <a:buNone/>
+              <a:defRPr sz="1650" b="0">
+                <a:solidFill>
+                  <a:srgbClr val="303437"/>
+                </a:solidFill>
+                <a:latin typeface="Noto Sans"/>
+              </a:defRPr>
+            </a:pPr>
+            <a:r>
+              <a:rPr sz="1650" b="0" lang="ja-JP" altLang="en-US">
+                <a:solidFill>
+                  <a:srgbClr val="303437"/>
+                </a:solidFill>
+                <a:latin typeface="Noto Sans"/>
+                <a:ea typeface="Noto Sans CJK JP"/>
+                <a:cs typeface="Noto Sans"/>
+              </a:rPr>
+              <a:t>構成、収集過程、利用目的、偏りと配布条件を記述する。</a:t>
+            </a:r>
+          </a:p>
+        </p:txBody>
+      </p:sp>
+      <p:sp>
+        <p:nvSpPr>
+          <p:cNvPr id="11" name="TextBox 10"/>
+          <p:cNvSpPr txBox="1"/>
+          <p:nvPr/>
+        </p:nvSpPr>
+        <p:spPr>
+          <a:xfrm>
+            <a:off x="548640" y="4407408"/>
+            <a:ext cx="8046720" cy="347472"/>
+          </a:xfrm>
+          <a:prstGeom prst="rect">
+            <a:avLst/>
+          </a:prstGeom>
+          <a:noFill/>
+        </p:spPr>
+        <p:txBody>
+          <a:bodyPr wrap="square" lIns="0" rIns="0" tIns="0" bIns="0">
+            <a:noAutofit/>
+          </a:bodyPr>
+          <a:lstStyle/>
+          <a:p>
+            <a:pPr algn="l">
+              <a:lnSpc>
+                <a:spcPts val="1088"/>
+              </a:lnSpc>
+              <a:spcBef>
+                <a:spcPts val="0"/>
+              </a:spcBef>
+              <a:spcAft>
+                <a:spcPts val="0"/>
+              </a:spcAft>
+              <a:buNone/>
+              <a:defRPr sz="930" b="0">
+                <a:solidFill>
+                  <a:srgbClr val="303437"/>
+                </a:solidFill>
+                <a:latin typeface="Noto Sans"/>
+              </a:defRPr>
+            </a:pPr>
+            <a:r>
+              <a:rPr sz="930" b="0" lang="ja-JP" altLang="en-US">
+                <a:solidFill>
+                  <a:srgbClr val="2166AC"/>
+                </a:solidFill>
+                <a:latin typeface="Noto Sans"/>
+                <a:ea typeface="Noto Sans CJK JP"/>
+                <a:cs typeface="Noto Sans"/>
+                <a:hlinkClick r:id="rId3"/>
+              </a:rPr>
+              <a:t>https://multilexsum.github.io/datasheet</a:t>
             </a:r>
           </a:p>
         </p:txBody>
@@ -32450,7 +31316,7 @@
                 <a:ea typeface="Noto Sans CJK JP"/>
                 <a:cs typeface="Noto Sans"/>
               </a:rPr>
-              <a:t>版を指定して、要約の組を取り出す</a:t>
+              <a:t>参考文献</a:t>
             </a:r>
           </a:p>
         </p:txBody>
@@ -32498,312 +31364,21 @@
                 <a:ea typeface="Noto Sans CJK JP"/>
                 <a:cs typeface="Noto Sans"/>
               </a:rPr>
-              <a:t>Appendix: 2. 評価・分割・配布の詳細</a:t>
-            </a:r>
-          </a:p>
-        </p:txBody>
-      </p:sp>
-      <p:sp>
-        <p:nvSpPr>
-          <p:cNvPr id="4" name="code-frame"/>
-          <p:cNvSpPr/>
-          <p:nvPr/>
-        </p:nvSpPr>
-        <p:spPr>
-          <a:xfrm>
-            <a:off x="548640" y="1618488"/>
-            <a:ext cx="8046720" cy="2067559"/>
-          </a:xfrm>
-          <a:prstGeom prst="rect">
-            <a:avLst/>
-          </a:prstGeom>
-          <a:solidFill>
-            <a:srgbClr val="EBEDEB"/>
-          </a:solidFill>
-          <a:ln>
-            <a:noFill/>
-          </a:ln>
-          <a:effectLst/>
-        </p:spPr>
-        <p:style>
-          <a:lnRef idx="1">
-            <a:schemeClr val="accent1"/>
-          </a:lnRef>
-          <a:fillRef idx="3">
-            <a:schemeClr val="accent1"/>
-          </a:fillRef>
-          <a:effectRef idx="0">
-            <a:schemeClr val="accent1"/>
-          </a:effectRef>
-          <a:fontRef idx="minor">
-            <a:schemeClr val="lt1"/>
-          </a:fontRef>
-        </p:style>
-        <p:txBody>
-          <a:bodyPr rtlCol="0" anchor="t" wrap="none" lIns="152400" rIns="152400" tIns="101600" bIns="127000">
-            <a:noAutofit/>
-          </a:bodyPr>
-          <a:lstStyle/>
-          <a:p>
-            <a:pPr algn="l">
-              <a:lnSpc>
-                <a:spcPts val="1784"/>
-              </a:lnSpc>
-              <a:spcBef>
-                <a:spcPts val="0"/>
-              </a:spcBef>
-              <a:spcAft>
-                <a:spcPts val="0"/>
-              </a:spcAft>
-              <a:buNone/>
-              <a:defRPr sz="1500" b="0">
-                <a:solidFill>
-                  <a:srgbClr val="303437"/>
-                </a:solidFill>
-                <a:latin typeface="Noto Sans"/>
-              </a:defRPr>
-            </a:pPr>
-            <a:r>
-              <a:rPr sz="1500" b="0" lang="ja-JP" altLang="en-US">
-                <a:solidFill>
-                  <a:srgbClr val="303437"/>
-                </a:solidFill>
-                <a:latin typeface="Liberation Mono"/>
-                <a:ea typeface="Noto Sans CJK JP"/>
-                <a:cs typeface="Liberation Mono"/>
-              </a:rPr>
-              <a:t>import json, urllib.request</a:t>
-            </a:r>
-          </a:p>
-          <a:p>
-            <a:pPr>
-              <a:lnSpc>
-                <a:spcPts val="1784"/>
-              </a:lnSpc>
-              <a:spcBef>
-                <a:spcPts val="0"/>
-              </a:spcBef>
-              <a:spcAft>
-                <a:spcPts val="0"/>
-              </a:spcAft>
-              <a:buNone/>
-              <a:defRPr sz="1500" b="0">
-                <a:solidFill>
-                  <a:srgbClr val="303437"/>
-                </a:solidFill>
-                <a:latin typeface="Noto Sans"/>
-              </a:defRPr>
-            </a:pPr>
-            <a:r>
-              <a:rPr sz="1500" b="0" lang="ja-JP" altLang="en-US">
-                <a:solidFill>
-                  <a:srgbClr val="303437"/>
-                </a:solidFill>
-                <a:latin typeface="Liberation Mono"/>
-                <a:ea typeface="Noto Sans CJK JP"/>
-                <a:cs typeface="Liberation Mono"/>
-              </a:rPr>
-              <a:t>base = "https://huggingface.co/datasets/allenai/multi_lexsum"</a:t>
-            </a:r>
-          </a:p>
-          <a:p>
-            <a:pPr>
-              <a:lnSpc>
-                <a:spcPts val="1784"/>
-              </a:lnSpc>
-              <a:spcBef>
-                <a:spcPts val="0"/>
-              </a:spcBef>
-              <a:spcAft>
-                <a:spcPts val="0"/>
-              </a:spcAft>
-              <a:buNone/>
-              <a:defRPr sz="1500" b="0">
-                <a:solidFill>
-                  <a:srgbClr val="303437"/>
-                </a:solidFill>
-                <a:latin typeface="Noto Sans"/>
-              </a:defRPr>
-            </a:pPr>
-            <a:r>
-              <a:rPr sz="1500" b="0" lang="ja-JP" altLang="en-US">
-                <a:solidFill>
-                  <a:srgbClr val="303437"/>
-                </a:solidFill>
-                <a:latin typeface="Liberation Mono"/>
-                <a:ea typeface="Noto Sans CJK JP"/>
-                <a:cs typeface="Liberation Mono"/>
-              </a:rPr>
-              <a:t>rev = "055f5fa5300a5fdefb5b691c4d6c1e58f485b379"</a:t>
-            </a:r>
-          </a:p>
-          <a:p>
-            <a:pPr>
-              <a:lnSpc>
-                <a:spcPts val="1784"/>
-              </a:lnSpc>
-              <a:spcBef>
-                <a:spcPts val="0"/>
-              </a:spcBef>
-              <a:spcAft>
-                <a:spcPts val="0"/>
-              </a:spcAft>
-              <a:buNone/>
-              <a:defRPr sz="1500" b="0">
-                <a:solidFill>
-                  <a:srgbClr val="303437"/>
-                </a:solidFill>
-                <a:latin typeface="Noto Sans"/>
-              </a:defRPr>
-            </a:pPr>
-            <a:r>
-              <a:rPr sz="1500" b="0" lang="ja-JP" altLang="en-US">
-                <a:solidFill>
-                  <a:srgbClr val="303437"/>
-                </a:solidFill>
-                <a:latin typeface="Liberation Mono"/>
-                <a:ea typeface="Noto Sans CJK JP"/>
-                <a:cs typeface="Liberation Mono"/>
-              </a:rPr>
-              <a:t>path = f"/resolve/{rev}/releases/v20220616/test.json"</a:t>
-            </a:r>
-          </a:p>
-          <a:p>
-            <a:pPr>
-              <a:lnSpc>
-                <a:spcPts val="1784"/>
-              </a:lnSpc>
-              <a:spcBef>
-                <a:spcPts val="0"/>
-              </a:spcBef>
-              <a:spcAft>
-                <a:spcPts val="0"/>
-              </a:spcAft>
-              <a:buNone/>
-              <a:defRPr sz="1500" b="0">
-                <a:solidFill>
-                  <a:srgbClr val="303437"/>
-                </a:solidFill>
-                <a:latin typeface="Noto Sans"/>
-              </a:defRPr>
-            </a:pPr>
-            <a:r>
-              <a:rPr sz="1500" b="0" lang="ja-JP" altLang="en-US">
-                <a:solidFill>
-                  <a:srgbClr val="303437"/>
-                </a:solidFill>
-                <a:latin typeface="Liberation Mono"/>
-                <a:ea typeface="Noto Sans CJK JP"/>
-                <a:cs typeface="Liberation Mono"/>
-              </a:rPr>
-              <a:t>with urllib.request.urlopen(base + path) as response:</a:t>
-            </a:r>
-          </a:p>
-          <a:p>
-            <a:pPr>
-              <a:lnSpc>
-                <a:spcPts val="1784"/>
-              </a:lnSpc>
-              <a:spcBef>
-                <a:spcPts val="0"/>
-              </a:spcBef>
-              <a:spcAft>
-                <a:spcPts val="0"/>
-              </a:spcAft>
-              <a:buNone/>
-              <a:defRPr sz="1500" b="0">
-                <a:solidFill>
-                  <a:srgbClr val="303437"/>
-                </a:solidFill>
-                <a:latin typeface="Noto Sans"/>
-              </a:defRPr>
-            </a:pPr>
-            <a:r>
-              <a:rPr sz="1500" b="0" lang="ja-JP" altLang="en-US">
-                <a:solidFill>
-                  <a:srgbClr val="303437"/>
-                </a:solidFill>
-                <a:latin typeface="Liberation Mono"/>
-                <a:ea typeface="Noto Sans CJK JP"/>
-                <a:cs typeface="Liberation Mono"/>
-              </a:rPr>
-              <a:t>    case = json.loads(response.readline())</a:t>
-            </a:r>
-          </a:p>
-          <a:p>
-            <a:pPr>
-              <a:lnSpc>
-                <a:spcPts val="1784"/>
-              </a:lnSpc>
-              <a:spcBef>
-                <a:spcPts val="0"/>
-              </a:spcBef>
-              <a:spcAft>
-                <a:spcPts val="0"/>
-              </a:spcAft>
-              <a:buNone/>
-              <a:defRPr sz="1500" b="0">
-                <a:solidFill>
-                  <a:srgbClr val="303437"/>
-                </a:solidFill>
-                <a:latin typeface="Noto Sans"/>
-              </a:defRPr>
-            </a:pPr>
-            <a:r>
-              <a:rPr sz="1500" b="0" lang="ja-JP" altLang="en-US">
-                <a:solidFill>
-                  <a:srgbClr val="303437"/>
-                </a:solidFill>
-                <a:latin typeface="Liberation Mono"/>
-                <a:ea typeface="Noto Sans CJK JP"/>
-                <a:cs typeface="Liberation Mono"/>
-              </a:rPr>
-              <a:t>source = case["summary/short"]</a:t>
-            </a:r>
-          </a:p>
-          <a:p>
-            <a:pPr>
-              <a:lnSpc>
-                <a:spcPts val="1784"/>
-              </a:lnSpc>
-              <a:spcBef>
-                <a:spcPts val="0"/>
-              </a:spcBef>
-              <a:spcAft>
-                <a:spcPts val="0"/>
-              </a:spcAft>
-              <a:buNone/>
-              <a:defRPr sz="1500" b="0">
-                <a:solidFill>
-                  <a:srgbClr val="303437"/>
-                </a:solidFill>
-                <a:latin typeface="Noto Sans"/>
-              </a:defRPr>
-            </a:pPr>
-            <a:r>
-              <a:rPr sz="1500" b="0" lang="ja-JP" altLang="en-US">
-                <a:solidFill>
-                  <a:srgbClr val="303437"/>
-                </a:solidFill>
-                <a:latin typeface="Liberation Mono"/>
-                <a:ea typeface="Noto Sans CJK JP"/>
-                <a:cs typeface="Liberation Mono"/>
-              </a:rPr>
-              <a:t>target = case["summary/tiny"]</a:t>
-            </a:r>
-          </a:p>
-        </p:txBody>
-      </p:sp>
-      <p:sp>
-        <p:nvSpPr>
-          <p:cNvPr id="5" name="TextBox 4"/>
+              <a:t>Appendix: 3. 研究と参考文献</a:t>
+            </a:r>
+          </a:p>
+        </p:txBody>
+      </p:sp>
+      <p:sp>
+        <p:nvSpPr>
+          <p:cNvPr id="4" name="TextBox 3"/>
           <p:cNvSpPr txBox="1"/>
           <p:nvPr/>
         </p:nvSpPr>
         <p:spPr>
           <a:xfrm>
-            <a:off x="594360" y="3850639"/>
-            <a:ext cx="7955279" cy="457200"/>
+            <a:off x="548640" y="1444752"/>
+            <a:ext cx="8046720" cy="640080"/>
           </a:xfrm>
           <a:prstGeom prst="rect">
             <a:avLst/>
@@ -32818,46 +31393,46 @@
           <a:p>
             <a:pPr algn="l">
               <a:lnSpc>
-                <a:spcPts val="2047"/>
-              </a:lnSpc>
-              <a:spcBef>
-                <a:spcPts val="0"/>
-              </a:spcBef>
-              <a:spcAft>
-                <a:spcPts val="0"/>
-              </a:spcAft>
-              <a:buNone/>
-              <a:defRPr sz="1750" b="0">
-                <a:solidFill>
-                  <a:srgbClr val="303437"/>
-                </a:solidFill>
-                <a:latin typeface="Noto Sans"/>
-              </a:defRPr>
-            </a:pPr>
-            <a:r>
-              <a:rPr sz="1750" b="0" lang="ja-JP" altLang="en-US">
-                <a:solidFill>
-                  <a:srgbClr val="303437"/>
-                </a:solidFill>
-                <a:latin typeface="Noto Sans"/>
-                <a:ea typeface="Noto Sans CJK JP"/>
-                <a:cs typeface="Noto Sans"/>
-              </a:rPr>
-              <a:t>Tinyが空の事件もある。利用前に参照欄の有無を確認する。</a:t>
-            </a:r>
-          </a:p>
-        </p:txBody>
-      </p:sp>
-      <p:sp>
-        <p:nvSpPr>
-          <p:cNvPr id="6" name="sources"/>
+                <a:spcPts val="2072"/>
+              </a:lnSpc>
+              <a:spcBef>
+                <a:spcPts val="0"/>
+              </a:spcBef>
+              <a:spcAft>
+                <a:spcPts val="0"/>
+              </a:spcAft>
+              <a:buNone/>
+              <a:defRPr sz="1850" b="0">
+                <a:solidFill>
+                  <a:srgbClr val="303437"/>
+                </a:solidFill>
+                <a:latin typeface="Noto Sans"/>
+              </a:defRPr>
+            </a:pPr>
+            <a:r>
+              <a:rPr sz="1850" b="1" lang="ja-JP" altLang="en-US">
+                <a:solidFill>
+                  <a:srgbClr val="303437"/>
+                </a:solidFill>
+                <a:latin typeface="Noto Sans"/>
+                <a:ea typeface="Noto Sans CJK JP"/>
+                <a:cs typeface="Noto Sans"/>
+              </a:rPr>
+              <a:t>Multi-LexSum dataset and loader</a:t>
+            </a:r>
+          </a:p>
+        </p:txBody>
+      </p:sp>
+      <p:sp>
+        <p:nvSpPr>
+          <p:cNvPr id="5" name="TextBox 4"/>
           <p:cNvSpPr txBox="1"/>
           <p:nvPr/>
         </p:nvSpPr>
         <p:spPr>
           <a:xfrm>
-            <a:off x="502920" y="4700016"/>
-            <a:ext cx="8183879" cy="530352"/>
+            <a:off x="548640" y="2112264"/>
+            <a:ext cx="8046720" cy="256032"/>
           </a:xfrm>
           <a:prstGeom prst="rect">
             <a:avLst/>
@@ -32872,24 +31447,24 @@
           <a:p>
             <a:pPr algn="l">
               <a:lnSpc>
-                <a:spcPts val="940"/>
-              </a:lnSpc>
-              <a:spcBef>
-                <a:spcPts val="0"/>
-              </a:spcBef>
-              <a:spcAft>
-                <a:spcPts val="350"/>
-              </a:spcAft>
-              <a:buNone/>
-              <a:defRPr sz="810" b="0">
-                <a:solidFill>
-                  <a:srgbClr val="303437"/>
-                </a:solidFill>
-                <a:latin typeface="Noto Sans"/>
-              </a:defRPr>
-            </a:pPr>
-            <a:r>
-              <a:rPr sz="810" b="0" lang="ja-JP" altLang="en-US">
+                <a:spcPts val="1462"/>
+              </a:lnSpc>
+              <a:spcBef>
+                <a:spcPts val="0"/>
+              </a:spcBef>
+              <a:spcAft>
+                <a:spcPts val="0"/>
+              </a:spcAft>
+              <a:buNone/>
+              <a:defRPr sz="1250" b="0">
+                <a:solidFill>
+                  <a:srgbClr val="303437"/>
+                </a:solidFill>
+                <a:latin typeface="Noto Sans"/>
+              </a:defRPr>
+            </a:pPr>
+            <a:r>
+              <a:rPr sz="1250" b="0" lang="ja-JP" altLang="en-US">
                 <a:solidFill>
                   <a:srgbClr val="626669"/>
                 </a:solidFill>
@@ -32897,355 +31472,21 @@
                 <a:ea typeface="Noto Sans CJK JP"/>
                 <a:cs typeface="Noto Sans"/>
               </a:rPr>
-              <a:t>[1] Multi-LexSum. 公式データカード・v1.1配布。</a:t>
-            </a:r>
-            <a:r>
-              <a:rPr sz="810" b="0" lang="ja-JP" altLang="en-US">
-                <a:solidFill>
-                  <a:srgbClr val="626669"/>
-                </a:solidFill>
-                <a:latin typeface="Noto Sans"/>
-                <a:ea typeface="Noto Sans CJK JP"/>
-                <a:cs typeface="Noto Sans"/>
-              </a:rPr>
-              <a:t>  </a:t>
-            </a:r>
-            <a:r>
-              <a:rPr sz="810" b="0" lang="ja-JP" altLang="en-US">
-                <a:solidFill>
-                  <a:srgbClr val="626669"/>
-                </a:solidFill>
-                <a:latin typeface="Noto Sans"/>
-                <a:ea typeface="Noto Sans CJK JP"/>
-                <a:cs typeface="Noto Sans"/>
-                <a:hlinkClick r:id="rId2"/>
-              </a:rPr>
-              <a:t>https://huggingface.co/datasets/allenai/multi_lexsum</a:t>
-            </a:r>
-          </a:p>
-        </p:txBody>
-      </p:sp>
-    </p:spTree>
-  </p:cSld>
-  <p:clrMapOvr>
-    <a:masterClrMapping/>
-  </p:clrMapOvr>
-</p:sld>
-</file>
-
-<file path=ppt/slides/slide65.xml><?xml version="1.0" encoding="utf-8"?>
-<p:sld xmlns:a="http://schemas.openxmlformats.org/drawingml/2006/main" xmlns:p="http://schemas.openxmlformats.org/presentationml/2006/main" xmlns:r="http://schemas.openxmlformats.org/officeDocument/2006/relationships">
-  <p:cSld>
-    <p:spTree>
-      <p:nvGrpSpPr>
-        <p:cNvPr id="1" name=""/>
-        <p:cNvGrpSpPr/>
-        <p:nvPr/>
-      </p:nvGrpSpPr>
-      <p:grpSpPr/>
-      <p:sp>
-        <p:nvSpPr>
-          <p:cNvPr id="2" name="Title 1"/>
-          <p:cNvSpPr>
-            <a:spLocks noGrp="1"/>
-          </p:cNvSpPr>
-          <p:nvPr>
-            <p:ph type="title"/>
-          </p:nvPr>
-        </p:nvSpPr>
-        <p:spPr>
-          <a:xfrm>
-            <a:off x="548640" y="2506875"/>
-            <a:ext cx="8046720" cy="585216"/>
-          </a:xfrm>
-        </p:spPr>
-        <p:txBody>
-          <a:bodyPr wrap="square" lIns="0" rIns="0" tIns="0" bIns="0" anchor="ctr">
-            <a:noAutofit/>
-          </a:bodyPr>
-          <a:lstStyle/>
-          <a:p>
-            <a:pPr algn="ctr">
-              <a:lnSpc>
-                <a:spcPct val="110000"/>
-              </a:lnSpc>
-              <a:buNone/>
-              <a:defRPr sz="3600" b="0">
-                <a:solidFill>
-                  <a:srgbClr val="303437"/>
-                </a:solidFill>
-                <a:latin typeface="Noto Sans"/>
-              </a:defRPr>
-            </a:pPr>
-            <a:r>
-              <a:rPr sz="3600" b="1" lang="ja-JP" altLang="en-US">
-                <a:solidFill>
-                  <a:srgbClr val="303437"/>
-                </a:solidFill>
-                <a:latin typeface="Noto Sans"/>
-                <a:ea typeface="Noto Sans CJK JP"/>
-                <a:cs typeface="Noto Sans"/>
-              </a:rPr>
-              <a:t>研究と参考文献</a:t>
-            </a:r>
-          </a:p>
-        </p:txBody>
-      </p:sp>
-      <p:sp>
-        <p:nvSpPr>
-          <p:cNvPr id="3" name="Title 2"/>
-          <p:cNvSpPr>
-            <a:spLocks noGrp="1"/>
-          </p:cNvSpPr>
-          <p:nvPr>
-            <p:ph type="title" idx="2"/>
-          </p:nvPr>
-        </p:nvSpPr>
-        <p:spPr>
-          <a:xfrm>
-            <a:off x="75895" y="0"/>
-            <a:ext cx="8115300" cy="480060"/>
-          </a:xfrm>
-        </p:spPr>
-        <p:txBody>
-          <a:bodyPr wrap="square" lIns="0" rIns="0" tIns="0" bIns="0" anchor="ctr">
-            <a:noAutofit/>
-          </a:bodyPr>
-          <a:lstStyle/>
-          <a:p>
-            <a:pPr algn="l">
-              <a:lnSpc>
-                <a:spcPct val="110000"/>
-              </a:lnSpc>
-              <a:buNone/>
-              <a:defRPr sz="1400" b="0">
-                <a:solidFill>
-                  <a:srgbClr val="303437"/>
-                </a:solidFill>
-                <a:latin typeface="Noto Sans"/>
-              </a:defRPr>
-            </a:pPr>
-            <a:r>
-              <a:rPr sz="1400" b="1" lang="ja-JP" altLang="en-US">
-                <a:solidFill>
-                  <a:srgbClr val="FFFEF8"/>
-                </a:solidFill>
-                <a:latin typeface="Noto Sans"/>
-                <a:ea typeface="Noto Sans CJK JP"/>
-                <a:cs typeface="Noto Sans"/>
-              </a:rPr>
-              <a:t>Appendix: 3. 研究と参考文献</a:t>
-            </a:r>
-          </a:p>
-        </p:txBody>
-      </p:sp>
-    </p:spTree>
-  </p:cSld>
-  <p:clrMapOvr>
-    <a:masterClrMapping/>
-  </p:clrMapOvr>
-</p:sld>
-</file>
-
-<file path=ppt/slides/slide66.xml><?xml version="1.0" encoding="utf-8"?>
-<p:sld xmlns:a="http://schemas.openxmlformats.org/drawingml/2006/main" xmlns:p="http://schemas.openxmlformats.org/presentationml/2006/main" xmlns:r="http://schemas.openxmlformats.org/officeDocument/2006/relationships">
-  <p:cSld>
-    <p:spTree>
-      <p:nvGrpSpPr>
-        <p:cNvPr id="1" name=""/>
-        <p:cNvGrpSpPr/>
-        <p:nvPr/>
-      </p:nvGrpSpPr>
-      <p:grpSpPr/>
-      <p:sp>
-        <p:nvSpPr>
-          <p:cNvPr id="2" name="Title 1"/>
-          <p:cNvSpPr>
-            <a:spLocks noGrp="1"/>
-          </p:cNvSpPr>
-          <p:nvPr>
-            <p:ph type="title"/>
-          </p:nvPr>
-        </p:nvSpPr>
-        <p:spPr>
-          <a:xfrm>
-            <a:off x="468172" y="650138"/>
-            <a:ext cx="8206740" cy="616305"/>
-          </a:xfrm>
-        </p:spPr>
-        <p:txBody>
-          <a:bodyPr wrap="square" lIns="0" rIns="0" tIns="0" bIns="0">
-            <a:noAutofit/>
-          </a:bodyPr>
-          <a:lstStyle/>
-          <a:p>
-            <a:pPr algn="l">
-              <a:lnSpc>
-                <a:spcPct val="110000"/>
-              </a:lnSpc>
-              <a:buNone/>
-              <a:defRPr sz="2800" b="0">
-                <a:solidFill>
-                  <a:srgbClr val="303437"/>
-                </a:solidFill>
-                <a:latin typeface="Noto Sans"/>
-              </a:defRPr>
-            </a:pPr>
-            <a:r>
-              <a:rPr sz="2800" b="1" lang="ja-JP" altLang="en-US">
-                <a:solidFill>
-                  <a:srgbClr val="303437"/>
-                </a:solidFill>
-                <a:latin typeface="Noto Sans"/>
-                <a:ea typeface="Noto Sans CJK JP"/>
-                <a:cs typeface="Noto Sans"/>
-              </a:rPr>
-              <a:t>法律実務の執筆と、要約モデルの研究を結ぶ</a:t>
-            </a:r>
-          </a:p>
-        </p:txBody>
-      </p:sp>
-      <p:sp>
-        <p:nvSpPr>
-          <p:cNvPr id="3" name="Text Placeholder 2"/>
-          <p:cNvSpPr>
-            <a:spLocks noGrp="1"/>
-          </p:cNvSpPr>
-          <p:nvPr>
-            <p:ph type="body" idx="1"/>
-          </p:nvPr>
-        </p:nvSpPr>
-        <p:spPr>
-          <a:xfrm>
-            <a:off x="594360" y="1463040"/>
-            <a:ext cx="7955279" cy="3044952"/>
-          </a:xfrm>
-        </p:spPr>
-        <p:txBody>
-          <a:bodyPr wrap="square" tIns="91440" bIns="91440">
-            <a:noAutofit/>
-          </a:bodyPr>
-          <a:lstStyle/>
-          <a:p>
-            <a:pPr marL="457200" indent="-355600">
-              <a:lnSpc>
-                <a:spcPts val="2379"/>
-              </a:lnSpc>
-              <a:spcAft>
-                <a:spcPts val="700"/>
-              </a:spcAft>
-              <a:buSzPct val="66500"/>
-              <a:buFont typeface="Noto Sans CJK JP"/>
-              <a:buChar char="●"/>
-              <a:defRPr sz="2000" b="0">
-                <a:solidFill>
-                  <a:srgbClr val="303437"/>
-                </a:solidFill>
-                <a:latin typeface="Noto Sans"/>
-              </a:defRPr>
-            </a:pPr>
-            <a:r>
-              <a:rPr sz="2000" b="0" lang="ja-JP" altLang="en-US">
-                <a:solidFill>
-                  <a:srgbClr val="303437"/>
-                </a:solidFill>
-                <a:latin typeface="Noto Sans"/>
-                <a:ea typeface="Noto Sans CJK JP"/>
-                <a:cs typeface="Noto Sans"/>
-              </a:rPr>
-              <a:t>Zejiang Shen、Kyle LoらがAllen Institute for AIと、ミシガン大学のCivil Rights Litigation Clearinghouseなどの協力で構築した。法学者Margo Schlangerと、最終著者Doug Downeyも参加した。</a:t>
-            </a:r>
-          </a:p>
-          <a:p>
-            <a:pPr marL="457200" indent="-355600">
-              <a:lnSpc>
-                <a:spcPts val="2379"/>
-              </a:lnSpc>
-              <a:spcAft>
-                <a:spcPts val="0"/>
-              </a:spcAft>
-              <a:buSzPct val="66500"/>
-              <a:buFont typeface="Noto Sans CJK JP"/>
-              <a:buChar char="●"/>
-              <a:defRPr sz="2000" b="0">
-                <a:solidFill>
-                  <a:srgbClr val="303437"/>
-                </a:solidFill>
-                <a:latin typeface="Noto Sans"/>
-              </a:defRPr>
-            </a:pPr>
-            <a:r>
-              <a:rPr sz="2000" b="0" lang="ja-JP" altLang="en-US">
-                <a:solidFill>
-                  <a:srgbClr val="303437"/>
-                </a:solidFill>
-                <a:latin typeface="Noto Sans"/>
-                <a:ea typeface="Noto Sans CJK JP"/>
-                <a:cs typeface="Noto Sans"/>
-              </a:rPr>
-              <a:t>数百人の法学生らが事件要約の執筆に関わる。論文はNeurIPS 2022のDatasets and Benchmarks Trackに採択された。</a:t>
-            </a:r>
-          </a:p>
-        </p:txBody>
-      </p:sp>
-      <p:sp>
-        <p:nvSpPr>
-          <p:cNvPr id="4" name="Title 3"/>
-          <p:cNvSpPr>
-            <a:spLocks noGrp="1"/>
-          </p:cNvSpPr>
-          <p:nvPr>
-            <p:ph type="title" idx="2"/>
-          </p:nvPr>
-        </p:nvSpPr>
-        <p:spPr>
-          <a:xfrm>
-            <a:off x="75895" y="0"/>
-            <a:ext cx="8115300" cy="480060"/>
-          </a:xfrm>
-        </p:spPr>
-        <p:txBody>
-          <a:bodyPr wrap="square" lIns="0" rIns="0" tIns="0" bIns="0" anchor="ctr">
-            <a:noAutofit/>
-          </a:bodyPr>
-          <a:lstStyle/>
-          <a:p>
-            <a:pPr algn="l">
-              <a:lnSpc>
-                <a:spcPct val="110000"/>
-              </a:lnSpc>
-              <a:buNone/>
-              <a:defRPr sz="1400" b="0">
-                <a:solidFill>
-                  <a:srgbClr val="303437"/>
-                </a:solidFill>
-                <a:latin typeface="Noto Sans"/>
-              </a:defRPr>
-            </a:pPr>
-            <a:r>
-              <a:rPr sz="1400" b="1" lang="ja-JP" altLang="en-US">
-                <a:solidFill>
-                  <a:srgbClr val="FFFEF8"/>
-                </a:solidFill>
-                <a:latin typeface="Noto Sans"/>
-                <a:ea typeface="Noto Sans CJK JP"/>
-                <a:cs typeface="Noto Sans"/>
-              </a:rPr>
-              <a:t>Appendix: 3. 研究と参考文献</a:t>
-            </a:r>
-          </a:p>
-        </p:txBody>
-      </p:sp>
-      <p:sp>
-        <p:nvSpPr>
-          <p:cNvPr id="5" name="sources"/>
+              <a:t>Multi-LexSum team · n.d. · 公式GitHub（2026-10-18参照）</a:t>
+            </a:r>
+          </a:p>
+        </p:txBody>
+      </p:sp>
+      <p:sp>
+        <p:nvSpPr>
+          <p:cNvPr id="6" name="TextBox 5"/>
           <p:cNvSpPr txBox="1"/>
           <p:nvPr/>
         </p:nvSpPr>
         <p:spPr>
           <a:xfrm>
-            <a:off x="502920" y="4517136"/>
-            <a:ext cx="8183879" cy="530352"/>
+            <a:off x="548640" y="2377440"/>
+            <a:ext cx="8046720" cy="438912"/>
           </a:xfrm>
           <a:prstGeom prst="rect">
             <a:avLst/>
@@ -33260,240 +31501,46 @@
           <a:p>
             <a:pPr algn="l">
               <a:lnSpc>
-                <a:spcPts val="940"/>
-              </a:lnSpc>
-              <a:spcBef>
-                <a:spcPts val="0"/>
-              </a:spcBef>
-              <a:spcAft>
-                <a:spcPts val="350"/>
-              </a:spcAft>
-              <a:buNone/>
-              <a:defRPr sz="810" b="0">
-                <a:solidFill>
-                  <a:srgbClr val="303437"/>
-                </a:solidFill>
-                <a:latin typeface="Noto Sans"/>
-              </a:defRPr>
-            </a:pPr>
-            <a:r>
-              <a:rPr sz="810" b="0" lang="ja-JP" altLang="en-US">
-                <a:solidFill>
-                  <a:srgbClr val="626669"/>
-                </a:solidFill>
-                <a:latin typeface="Noto Sans"/>
-                <a:ea typeface="Noto Sans CJK JP"/>
-                <a:cs typeface="Noto Sans"/>
-              </a:rPr>
-              <a:t>[1] Shen et al. (2022). Multi-LexSum: Real-world Summaries of Civil Rights Lawsuits at Multiple Granularities. NeurIPS.</a:t>
-            </a:r>
-          </a:p>
-          <a:p>
-            <a:pPr>
-              <a:lnSpc>
-                <a:spcPts val="940"/>
-              </a:lnSpc>
-              <a:spcAft>
-                <a:spcPts val="350"/>
-              </a:spcAft>
-              <a:buNone/>
-              <a:defRPr sz="810" b="0">
-                <a:solidFill>
-                  <a:srgbClr val="303437"/>
-                </a:solidFill>
-                <a:latin typeface="Noto Sans"/>
-              </a:defRPr>
-            </a:pPr>
-            <a:r>
-              <a:rPr sz="810" b="0" lang="ja-JP" altLang="en-US">
-                <a:solidFill>
-                  <a:srgbClr val="626669"/>
-                </a:solidFill>
-                <a:latin typeface="Noto Sans"/>
-                <a:ea typeface="Noto Sans CJK JP"/>
-                <a:cs typeface="Noto Sans"/>
-                <a:hlinkClick r:id="rId2"/>
-              </a:rPr>
-              <a:t>https://doi.org/10.52202/068431-0956</a:t>
-            </a:r>
-          </a:p>
-          <a:p>
-            <a:pPr>
-              <a:lnSpc>
-                <a:spcPts val="940"/>
-              </a:lnSpc>
-              <a:spcAft>
-                <a:spcPts val="350"/>
-              </a:spcAft>
-              <a:buNone/>
-              <a:defRPr sz="810" b="0">
-                <a:solidFill>
-                  <a:srgbClr val="303437"/>
-                </a:solidFill>
-                <a:latin typeface="Noto Sans"/>
-              </a:defRPr>
-            </a:pPr>
-            <a:r>
-              <a:rPr sz="810" b="0" lang="ja-JP" altLang="en-US">
-                <a:solidFill>
-                  <a:srgbClr val="626669"/>
-                </a:solidFill>
-                <a:latin typeface="Noto Sans"/>
-                <a:ea typeface="Noto Sans CJK JP"/>
-                <a:cs typeface="Noto Sans"/>
-              </a:rPr>
-              <a:t>[2] Multi-LexSum. 公式サイト。2026-10-18確認。</a:t>
-            </a:r>
-            <a:r>
-              <a:rPr sz="810" b="0" lang="ja-JP" altLang="en-US">
-                <a:solidFill>
-                  <a:srgbClr val="626669"/>
-                </a:solidFill>
-                <a:latin typeface="Noto Sans"/>
-                <a:ea typeface="Noto Sans CJK JP"/>
-                <a:cs typeface="Noto Sans"/>
-              </a:rPr>
-              <a:t>  </a:t>
-            </a:r>
-            <a:r>
-              <a:rPr sz="810" b="0" lang="ja-JP" altLang="en-US">
-                <a:solidFill>
-                  <a:srgbClr val="626669"/>
-                </a:solidFill>
-                <a:latin typeface="Noto Sans"/>
-                <a:ea typeface="Noto Sans CJK JP"/>
-                <a:cs typeface="Noto Sans"/>
-                <a:hlinkClick r:id="rId3"/>
-              </a:rPr>
-              <a:t>https://multilexsum.github.io/</a:t>
-            </a:r>
-          </a:p>
-        </p:txBody>
-      </p:sp>
-    </p:spTree>
-  </p:cSld>
-  <p:clrMapOvr>
-    <a:masterClrMapping/>
-  </p:clrMapOvr>
-</p:sld>
-</file>
-
-<file path=ppt/slides/slide67.xml><?xml version="1.0" encoding="utf-8"?>
-<p:sld xmlns:a="http://schemas.openxmlformats.org/drawingml/2006/main" xmlns:p="http://schemas.openxmlformats.org/presentationml/2006/main" xmlns:r="http://schemas.openxmlformats.org/officeDocument/2006/relationships">
-  <p:cSld>
-    <p:spTree>
-      <p:nvGrpSpPr>
-        <p:cNvPr id="1" name=""/>
-        <p:cNvGrpSpPr/>
-        <p:nvPr/>
-      </p:nvGrpSpPr>
-      <p:grpSpPr/>
-      <p:sp>
-        <p:nvSpPr>
-          <p:cNvPr id="2" name="Title 1"/>
-          <p:cNvSpPr>
-            <a:spLocks noGrp="1"/>
-          </p:cNvSpPr>
-          <p:nvPr>
-            <p:ph type="title"/>
-          </p:nvPr>
-        </p:nvSpPr>
-        <p:spPr>
-          <a:xfrm>
-            <a:off x="468172" y="650138"/>
-            <a:ext cx="8206740" cy="616305"/>
-          </a:xfrm>
-        </p:spPr>
-        <p:txBody>
-          <a:bodyPr wrap="square" lIns="0" rIns="0" tIns="0" bIns="0">
-            <a:noAutofit/>
-          </a:bodyPr>
-          <a:lstStyle/>
-          <a:p>
-            <a:pPr algn="l">
-              <a:lnSpc>
-                <a:spcPct val="110000"/>
-              </a:lnSpc>
-              <a:buNone/>
-              <a:defRPr sz="2800" b="0">
-                <a:solidFill>
-                  <a:srgbClr val="303437"/>
-                </a:solidFill>
-                <a:latin typeface="Noto Sans"/>
-              </a:defRPr>
-            </a:pPr>
-            <a:r>
-              <a:rPr sz="2800" b="1" lang="ja-JP" altLang="en-US">
-                <a:solidFill>
-                  <a:srgbClr val="303437"/>
-                </a:solidFill>
-                <a:latin typeface="Noto Sans"/>
-                <a:ea typeface="Noto Sans CJK JP"/>
-                <a:cs typeface="Noto Sans"/>
-              </a:rPr>
-              <a:t>参考文献</a:t>
-            </a:r>
-          </a:p>
-        </p:txBody>
-      </p:sp>
-      <p:sp>
-        <p:nvSpPr>
-          <p:cNvPr id="3" name="Title 2"/>
-          <p:cNvSpPr>
-            <a:spLocks noGrp="1"/>
-          </p:cNvSpPr>
-          <p:nvPr>
-            <p:ph type="title" idx="2"/>
-          </p:nvPr>
-        </p:nvSpPr>
-        <p:spPr>
-          <a:xfrm>
-            <a:off x="75895" y="0"/>
-            <a:ext cx="8115300" cy="480060"/>
-          </a:xfrm>
-        </p:spPr>
-        <p:txBody>
-          <a:bodyPr wrap="square" lIns="0" rIns="0" tIns="0" bIns="0" anchor="ctr">
-            <a:noAutofit/>
-          </a:bodyPr>
-          <a:lstStyle/>
-          <a:p>
-            <a:pPr algn="l">
-              <a:lnSpc>
-                <a:spcPct val="110000"/>
-              </a:lnSpc>
-              <a:buNone/>
-              <a:defRPr sz="1400" b="0">
-                <a:solidFill>
-                  <a:srgbClr val="303437"/>
-                </a:solidFill>
-                <a:latin typeface="Noto Sans"/>
-              </a:defRPr>
-            </a:pPr>
-            <a:r>
-              <a:rPr sz="1400" b="1" lang="ja-JP" altLang="en-US">
-                <a:solidFill>
-                  <a:srgbClr val="FFFEF8"/>
-                </a:solidFill>
-                <a:latin typeface="Noto Sans"/>
-                <a:ea typeface="Noto Sans CJK JP"/>
-                <a:cs typeface="Noto Sans"/>
-              </a:rPr>
-              <a:t>Appendix: 3. 研究と参考文献</a:t>
-            </a:r>
-          </a:p>
-        </p:txBody>
-      </p:sp>
-      <p:sp>
-        <p:nvSpPr>
-          <p:cNvPr id="4" name="TextBox 3"/>
+                <a:spcPts val="1913"/>
+              </a:lnSpc>
+              <a:spcBef>
+                <a:spcPts val="0"/>
+              </a:spcBef>
+              <a:spcAft>
+                <a:spcPts val="0"/>
+              </a:spcAft>
+              <a:buNone/>
+              <a:defRPr sz="1650" b="0">
+                <a:solidFill>
+                  <a:srgbClr val="303437"/>
+                </a:solidFill>
+                <a:latin typeface="Noto Sans"/>
+              </a:defRPr>
+            </a:pPr>
+            <a:r>
+              <a:rPr sz="1650" b="0" lang="ja-JP" altLang="en-US">
+                <a:solidFill>
+                  <a:srgbClr val="303437"/>
+                </a:solidFill>
+                <a:latin typeface="Noto Sans"/>
+                <a:ea typeface="Noto Sans CJK JP"/>
+                <a:cs typeface="Noto Sans"/>
+              </a:rPr>
+              <a:t>配布の読み込み方法と、粒度別の追加学習済みモデルを案内する。</a:t>
+            </a:r>
+          </a:p>
+        </p:txBody>
+      </p:sp>
+      <p:sp>
+        <p:nvSpPr>
+          <p:cNvPr id="7" name="TextBox 6"/>
           <p:cNvSpPr txBox="1"/>
           <p:nvPr/>
         </p:nvSpPr>
         <p:spPr>
           <a:xfrm>
-            <a:off x="548640" y="1444752"/>
-            <a:ext cx="8046720" cy="640080"/>
+            <a:off x="548640" y="2834640"/>
+            <a:ext cx="8046720" cy="347472"/>
           </a:xfrm>
           <a:prstGeom prst="rect">
             <a:avLst/>
@@ -33508,46 +31555,47 @@
           <a:p>
             <a:pPr algn="l">
               <a:lnSpc>
-                <a:spcPts val="2072"/>
-              </a:lnSpc>
-              <a:spcBef>
-                <a:spcPts val="0"/>
-              </a:spcBef>
-              <a:spcAft>
-                <a:spcPts val="0"/>
-              </a:spcAft>
-              <a:buNone/>
-              <a:defRPr sz="1850" b="0">
-                <a:solidFill>
-                  <a:srgbClr val="303437"/>
-                </a:solidFill>
-                <a:latin typeface="Noto Sans"/>
-              </a:defRPr>
-            </a:pPr>
-            <a:r>
-              <a:rPr sz="1850" b="1" lang="ja-JP" altLang="en-US">
-                <a:solidFill>
-                  <a:srgbClr val="303437"/>
-                </a:solidFill>
-                <a:latin typeface="Noto Sans"/>
-                <a:ea typeface="Noto Sans CJK JP"/>
-                <a:cs typeface="Noto Sans"/>
-              </a:rPr>
-              <a:t>Multi-LexSum: Real-world Summaries of Civil Rights Lawsuits at Multiple Granularities</a:t>
-            </a:r>
-          </a:p>
-        </p:txBody>
-      </p:sp>
-      <p:sp>
-        <p:nvSpPr>
-          <p:cNvPr id="5" name="TextBox 4"/>
+                <a:spcPts val="1088"/>
+              </a:lnSpc>
+              <a:spcBef>
+                <a:spcPts val="0"/>
+              </a:spcBef>
+              <a:spcAft>
+                <a:spcPts val="0"/>
+              </a:spcAft>
+              <a:buNone/>
+              <a:defRPr sz="930" b="0">
+                <a:solidFill>
+                  <a:srgbClr val="303437"/>
+                </a:solidFill>
+                <a:latin typeface="Noto Sans"/>
+              </a:defRPr>
+            </a:pPr>
+            <a:r>
+              <a:rPr sz="930" b="0" lang="ja-JP" altLang="en-US">
+                <a:solidFill>
+                  <a:srgbClr val="2166AC"/>
+                </a:solidFill>
+                <a:latin typeface="Noto Sans"/>
+                <a:ea typeface="Noto Sans CJK JP"/>
+                <a:cs typeface="Noto Sans"/>
+                <a:hlinkClick r:id="rId2"/>
+              </a:rPr>
+              <a:t>https://github.com/multilexsum/dataset</a:t>
+            </a:r>
+          </a:p>
+        </p:txBody>
+      </p:sp>
+      <p:sp>
+        <p:nvSpPr>
+          <p:cNvPr id="8" name="TextBox 7"/>
           <p:cNvSpPr txBox="1"/>
           <p:nvPr/>
         </p:nvSpPr>
         <p:spPr>
           <a:xfrm>
-            <a:off x="548640" y="2112264"/>
-            <a:ext cx="8046720" cy="256032"/>
+            <a:off x="548640" y="3017520"/>
+            <a:ext cx="8046720" cy="640080"/>
           </a:xfrm>
           <a:prstGeom prst="rect">
             <a:avLst/>
@@ -33562,46 +31610,46 @@
           <a:p>
             <a:pPr algn="l">
               <a:lnSpc>
-                <a:spcPts val="1462"/>
-              </a:lnSpc>
-              <a:spcBef>
-                <a:spcPts val="0"/>
-              </a:spcBef>
-              <a:spcAft>
-                <a:spcPts val="0"/>
-              </a:spcAft>
-              <a:buNone/>
-              <a:defRPr sz="1250" b="0">
-                <a:solidFill>
-                  <a:srgbClr val="303437"/>
-                </a:solidFill>
-                <a:latin typeface="Noto Sans"/>
-              </a:defRPr>
-            </a:pPr>
-            <a:r>
-              <a:rPr sz="1250" b="0" lang="ja-JP" altLang="en-US">
-                <a:solidFill>
-                  <a:srgbClr val="626669"/>
-                </a:solidFill>
-                <a:latin typeface="Noto Sans"/>
-                <a:ea typeface="Noto Sans CJK JP"/>
-                <a:cs typeface="Noto Sans"/>
-              </a:rPr>
-              <a:t>Shen et al.・2022・NeurIPS 35</a:t>
-            </a:r>
-          </a:p>
-        </p:txBody>
-      </p:sp>
-      <p:sp>
-        <p:nvSpPr>
-          <p:cNvPr id="6" name="TextBox 5"/>
+                <a:spcPts val="2072"/>
+              </a:lnSpc>
+              <a:spcBef>
+                <a:spcPts val="0"/>
+              </a:spcBef>
+              <a:spcAft>
+                <a:spcPts val="0"/>
+              </a:spcAft>
+              <a:buNone/>
+              <a:defRPr sz="1850" b="0">
+                <a:solidFill>
+                  <a:srgbClr val="303437"/>
+                </a:solidFill>
+                <a:latin typeface="Noto Sans"/>
+              </a:defRPr>
+            </a:pPr>
+            <a:r>
+              <a:rPr sz="1850" b="1" lang="ja-JP" altLang="en-US">
+                <a:solidFill>
+                  <a:srgbClr val="303437"/>
+                </a:solidFill>
+                <a:latin typeface="Noto Sans"/>
+                <a:ea typeface="Noto Sans CJK JP"/>
+                <a:cs typeface="Noto Sans"/>
+              </a:rPr>
+              <a:t>allenai/multi_lexsum</a:t>
+            </a:r>
+          </a:p>
+        </p:txBody>
+      </p:sp>
+      <p:sp>
+        <p:nvSpPr>
+          <p:cNvPr id="9" name="TextBox 8"/>
           <p:cNvSpPr txBox="1"/>
           <p:nvPr/>
         </p:nvSpPr>
         <p:spPr>
           <a:xfrm>
-            <a:off x="548640" y="2377440"/>
-            <a:ext cx="8046720" cy="438912"/>
+            <a:off x="548640" y="3685031"/>
+            <a:ext cx="8046720" cy="256032"/>
           </a:xfrm>
           <a:prstGeom prst="rect">
             <a:avLst/>
@@ -33616,46 +31664,46 @@
           <a:p>
             <a:pPr algn="l">
               <a:lnSpc>
-                <a:spcPts val="1913"/>
-              </a:lnSpc>
-              <a:spcBef>
-                <a:spcPts val="0"/>
-              </a:spcBef>
-              <a:spcAft>
-                <a:spcPts val="0"/>
-              </a:spcAft>
-              <a:buNone/>
-              <a:defRPr sz="1650" b="0">
-                <a:solidFill>
-                  <a:srgbClr val="303437"/>
-                </a:solidFill>
-                <a:latin typeface="Noto Sans"/>
-              </a:defRPr>
-            </a:pPr>
-            <a:r>
-              <a:rPr sz="1650" b="0" lang="ja-JP" altLang="en-US">
-                <a:solidFill>
-                  <a:srgbClr val="303437"/>
-                </a:solidFill>
-                <a:latin typeface="Noto Sans"/>
-                <a:ea typeface="Noto Sans CJK JP"/>
-                <a:cs typeface="Noto Sans"/>
-              </a:rPr>
-              <a:t>三粒度の専門家要約を構築し、複数文書・要約圧縮の実験と人手評価を報告する。</a:t>
-            </a:r>
-          </a:p>
-        </p:txBody>
-      </p:sp>
-      <p:sp>
-        <p:nvSpPr>
-          <p:cNvPr id="7" name="TextBox 6"/>
+                <a:spcPts val="1462"/>
+              </a:lnSpc>
+              <a:spcBef>
+                <a:spcPts val="0"/>
+              </a:spcBef>
+              <a:spcAft>
+                <a:spcPts val="0"/>
+              </a:spcAft>
+              <a:buNone/>
+              <a:defRPr sz="1250" b="0">
+                <a:solidFill>
+                  <a:srgbClr val="303437"/>
+                </a:solidFill>
+                <a:latin typeface="Noto Sans"/>
+              </a:defRPr>
+            </a:pPr>
+            <a:r>
+              <a:rPr sz="1250" b="0" lang="ja-JP" altLang="en-US">
+                <a:solidFill>
+                  <a:srgbClr val="626669"/>
+                </a:solidFill>
+                <a:latin typeface="Noto Sans"/>
+                <a:ea typeface="Noto Sans CJK JP"/>
+                <a:cs typeface="Noto Sans"/>
+              </a:rPr>
+              <a:t>Multi-LexSum team · n.d. · v1.0 / v1.1・Hugging Face（2026-10-18参照）</a:t>
+            </a:r>
+          </a:p>
+        </p:txBody>
+      </p:sp>
+      <p:sp>
+        <p:nvSpPr>
+          <p:cNvPr id="10" name="TextBox 9"/>
           <p:cNvSpPr txBox="1"/>
           <p:nvPr/>
         </p:nvSpPr>
         <p:spPr>
           <a:xfrm>
-            <a:off x="548640" y="2834640"/>
-            <a:ext cx="8046720" cy="347472"/>
+            <a:off x="548640" y="3950208"/>
+            <a:ext cx="8046720" cy="438912"/>
           </a:xfrm>
           <a:prstGeom prst="rect">
             <a:avLst/>
@@ -33670,47 +31718,46 @@
           <a:p>
             <a:pPr algn="l">
               <a:lnSpc>
-                <a:spcPts val="1088"/>
-              </a:lnSpc>
-              <a:spcBef>
-                <a:spcPts val="0"/>
-              </a:spcBef>
-              <a:spcAft>
-                <a:spcPts val="0"/>
-              </a:spcAft>
-              <a:buNone/>
-              <a:defRPr sz="930" b="0">
-                <a:solidFill>
-                  <a:srgbClr val="303437"/>
-                </a:solidFill>
-                <a:latin typeface="Noto Sans"/>
-              </a:defRPr>
-            </a:pPr>
-            <a:r>
-              <a:rPr sz="930" b="0" lang="ja-JP" altLang="en-US">
-                <a:solidFill>
-                  <a:srgbClr val="2166AC"/>
-                </a:solidFill>
-                <a:latin typeface="Noto Sans"/>
-                <a:ea typeface="Noto Sans CJK JP"/>
-                <a:cs typeface="Noto Sans"/>
-                <a:hlinkClick r:id="rId2"/>
-              </a:rPr>
-              <a:t>https://doi.org/10.52202/068431-0956</a:t>
-            </a:r>
-          </a:p>
-        </p:txBody>
-      </p:sp>
-      <p:sp>
-        <p:nvSpPr>
-          <p:cNvPr id="8" name="TextBox 7"/>
+                <a:spcPts val="1913"/>
+              </a:lnSpc>
+              <a:spcBef>
+                <a:spcPts val="0"/>
+              </a:spcBef>
+              <a:spcAft>
+                <a:spcPts val="0"/>
+              </a:spcAft>
+              <a:buNone/>
+              <a:defRPr sz="1650" b="0">
+                <a:solidFill>
+                  <a:srgbClr val="303437"/>
+                </a:solidFill>
+                <a:latin typeface="Noto Sans"/>
+              </a:defRPr>
+            </a:pPr>
+            <a:r>
+              <a:rPr sz="1650" b="0" lang="ja-JP" altLang="en-US">
+                <a:solidFill>
+                  <a:srgbClr val="303437"/>
+                </a:solidFill>
+                <a:latin typeface="Noto Sans"/>
+                <a:ea typeface="Noto Sans CJK JP"/>
+                <a:cs typeface="Noto Sans"/>
+              </a:rPr>
+              <a:t>要約と文書を配布し、版ごとのメタデータと利用条件を示す。</a:t>
+            </a:r>
+          </a:p>
+        </p:txBody>
+      </p:sp>
+      <p:sp>
+        <p:nvSpPr>
+          <p:cNvPr id="11" name="TextBox 10"/>
           <p:cNvSpPr txBox="1"/>
           <p:nvPr/>
         </p:nvSpPr>
         <p:spPr>
           <a:xfrm>
-            <a:off x="548640" y="3017520"/>
-            <a:ext cx="8046720" cy="640080"/>
+            <a:off x="548640" y="4407408"/>
+            <a:ext cx="8046720" cy="347472"/>
           </a:xfrm>
           <a:prstGeom prst="rect">
             <a:avLst/>
@@ -33725,168 +31772,6 @@
           <a:p>
             <a:pPr algn="l">
               <a:lnSpc>
-                <a:spcPts val="2072"/>
-              </a:lnSpc>
-              <a:spcBef>
-                <a:spcPts val="0"/>
-              </a:spcBef>
-              <a:spcAft>
-                <a:spcPts val="0"/>
-              </a:spcAft>
-              <a:buNone/>
-              <a:defRPr sz="1850" b="0">
-                <a:solidFill>
-                  <a:srgbClr val="303437"/>
-                </a:solidFill>
-                <a:latin typeface="Noto Sans"/>
-              </a:defRPr>
-            </a:pPr>
-            <a:r>
-              <a:rPr sz="1850" b="1" lang="ja-JP" altLang="en-US">
-                <a:solidFill>
-                  <a:srgbClr val="303437"/>
-                </a:solidFill>
-                <a:latin typeface="Noto Sans"/>
-                <a:ea typeface="Noto Sans CJK JP"/>
-                <a:cs typeface="Noto Sans"/>
-              </a:rPr>
-              <a:t>Multi-LexSum Dataset Sheet</a:t>
-            </a:r>
-          </a:p>
-        </p:txBody>
-      </p:sp>
-      <p:sp>
-        <p:nvSpPr>
-          <p:cNvPr id="9" name="TextBox 8"/>
-          <p:cNvSpPr txBox="1"/>
-          <p:nvPr/>
-        </p:nvSpPr>
-        <p:spPr>
-          <a:xfrm>
-            <a:off x="548640" y="3685031"/>
-            <a:ext cx="8046720" cy="256032"/>
-          </a:xfrm>
-          <a:prstGeom prst="rect">
-            <a:avLst/>
-          </a:prstGeom>
-          <a:noFill/>
-        </p:spPr>
-        <p:txBody>
-          <a:bodyPr wrap="square" lIns="0" rIns="0" tIns="0" bIns="0">
-            <a:noAutofit/>
-          </a:bodyPr>
-          <a:lstStyle/>
-          <a:p>
-            <a:pPr algn="l">
-              <a:lnSpc>
-                <a:spcPts val="1462"/>
-              </a:lnSpc>
-              <a:spcBef>
-                <a:spcPts val="0"/>
-              </a:spcBef>
-              <a:spcAft>
-                <a:spcPts val="0"/>
-              </a:spcAft>
-              <a:buNone/>
-              <a:defRPr sz="1250" b="0">
-                <a:solidFill>
-                  <a:srgbClr val="303437"/>
-                </a:solidFill>
-                <a:latin typeface="Noto Sans"/>
-              </a:defRPr>
-            </a:pPr>
-            <a:r>
-              <a:rPr sz="1250" b="0" lang="ja-JP" altLang="en-US">
-                <a:solidFill>
-                  <a:srgbClr val="626669"/>
-                </a:solidFill>
-                <a:latin typeface="Noto Sans"/>
-                <a:ea typeface="Noto Sans CJK JP"/>
-                <a:cs typeface="Noto Sans"/>
-              </a:rPr>
-              <a:t>Multi-LexSum team・2022・公式データシート</a:t>
-            </a:r>
-          </a:p>
-        </p:txBody>
-      </p:sp>
-      <p:sp>
-        <p:nvSpPr>
-          <p:cNvPr id="10" name="TextBox 9"/>
-          <p:cNvSpPr txBox="1"/>
-          <p:nvPr/>
-        </p:nvSpPr>
-        <p:spPr>
-          <a:xfrm>
-            <a:off x="548640" y="3950208"/>
-            <a:ext cx="8046720" cy="438912"/>
-          </a:xfrm>
-          <a:prstGeom prst="rect">
-            <a:avLst/>
-          </a:prstGeom>
-          <a:noFill/>
-        </p:spPr>
-        <p:txBody>
-          <a:bodyPr wrap="square" lIns="0" rIns="0" tIns="0" bIns="0">
-            <a:noAutofit/>
-          </a:bodyPr>
-          <a:lstStyle/>
-          <a:p>
-            <a:pPr algn="l">
-              <a:lnSpc>
-                <a:spcPts val="1913"/>
-              </a:lnSpc>
-              <a:spcBef>
-                <a:spcPts val="0"/>
-              </a:spcBef>
-              <a:spcAft>
-                <a:spcPts val="0"/>
-              </a:spcAft>
-              <a:buNone/>
-              <a:defRPr sz="1650" b="0">
-                <a:solidFill>
-                  <a:srgbClr val="303437"/>
-                </a:solidFill>
-                <a:latin typeface="Noto Sans"/>
-              </a:defRPr>
-            </a:pPr>
-            <a:r>
-              <a:rPr sz="1650" b="0" lang="ja-JP" altLang="en-US">
-                <a:solidFill>
-                  <a:srgbClr val="303437"/>
-                </a:solidFill>
-                <a:latin typeface="Noto Sans"/>
-                <a:ea typeface="Noto Sans CJK JP"/>
-                <a:cs typeface="Noto Sans"/>
-              </a:rPr>
-              <a:t>構成、収集過程、利用目的、偏りと配布条件を記述する。</a:t>
-            </a:r>
-          </a:p>
-        </p:txBody>
-      </p:sp>
-      <p:sp>
-        <p:nvSpPr>
-          <p:cNvPr id="11" name="TextBox 10"/>
-          <p:cNvSpPr txBox="1"/>
-          <p:nvPr/>
-        </p:nvSpPr>
-        <p:spPr>
-          <a:xfrm>
-            <a:off x="548640" y="4407408"/>
-            <a:ext cx="8046720" cy="347472"/>
-          </a:xfrm>
-          <a:prstGeom prst="rect">
-            <a:avLst/>
-          </a:prstGeom>
-          <a:noFill/>
-        </p:spPr>
-        <p:txBody>
-          <a:bodyPr wrap="square" lIns="0" rIns="0" tIns="0" bIns="0">
-            <a:noAutofit/>
-          </a:bodyPr>
-          <a:lstStyle/>
-          <a:p>
-            <a:pPr algn="l">
-              <a:lnSpc>
                 <a:spcPts val="1088"/>
               </a:lnSpc>
               <a:spcBef>
@@ -33913,1103 +31798,7 @@
                 <a:cs typeface="Noto Sans"/>
                 <a:hlinkClick r:id="rId3"/>
               </a:rPr>
-              <a:t>https://multilexsum.github.io/datasheet</a:t>
-            </a:r>
-          </a:p>
-        </p:txBody>
-      </p:sp>
-    </p:spTree>
-  </p:cSld>
-  <p:clrMapOvr>
-    <a:masterClrMapping/>
-  </p:clrMapOvr>
-</p:sld>
-</file>
-
-<file path=ppt/slides/slide68.xml><?xml version="1.0" encoding="utf-8"?>
-<p:sld xmlns:a="http://schemas.openxmlformats.org/drawingml/2006/main" xmlns:p="http://schemas.openxmlformats.org/presentationml/2006/main" xmlns:r="http://schemas.openxmlformats.org/officeDocument/2006/relationships">
-  <p:cSld>
-    <p:spTree>
-      <p:nvGrpSpPr>
-        <p:cNvPr id="1" name=""/>
-        <p:cNvGrpSpPr/>
-        <p:nvPr/>
-      </p:nvGrpSpPr>
-      <p:grpSpPr/>
-      <p:sp>
-        <p:nvSpPr>
-          <p:cNvPr id="2" name="Title 1"/>
-          <p:cNvSpPr>
-            <a:spLocks noGrp="1"/>
-          </p:cNvSpPr>
-          <p:nvPr>
-            <p:ph type="title"/>
-          </p:nvPr>
-        </p:nvSpPr>
-        <p:spPr>
-          <a:xfrm>
-            <a:off x="468172" y="650138"/>
-            <a:ext cx="8206740" cy="616305"/>
-          </a:xfrm>
-        </p:spPr>
-        <p:txBody>
-          <a:bodyPr wrap="square" lIns="0" rIns="0" tIns="0" bIns="0">
-            <a:noAutofit/>
-          </a:bodyPr>
-          <a:lstStyle/>
-          <a:p>
-            <a:pPr algn="l">
-              <a:lnSpc>
-                <a:spcPct val="110000"/>
-              </a:lnSpc>
-              <a:buNone/>
-              <a:defRPr sz="2800" b="0">
-                <a:solidFill>
-                  <a:srgbClr val="303437"/>
-                </a:solidFill>
-                <a:latin typeface="Noto Sans"/>
-              </a:defRPr>
-            </a:pPr>
-            <a:r>
-              <a:rPr sz="2800" b="1" lang="ja-JP" altLang="en-US">
-                <a:solidFill>
-                  <a:srgbClr val="303437"/>
-                </a:solidFill>
-                <a:latin typeface="Noto Sans"/>
-                <a:ea typeface="Noto Sans CJK JP"/>
-                <a:cs typeface="Noto Sans"/>
-              </a:rPr>
-              <a:t>参考文献</a:t>
-            </a:r>
-          </a:p>
-        </p:txBody>
-      </p:sp>
-      <p:sp>
-        <p:nvSpPr>
-          <p:cNvPr id="3" name="Title 2"/>
-          <p:cNvSpPr>
-            <a:spLocks noGrp="1"/>
-          </p:cNvSpPr>
-          <p:nvPr>
-            <p:ph type="title" idx="2"/>
-          </p:nvPr>
-        </p:nvSpPr>
-        <p:spPr>
-          <a:xfrm>
-            <a:off x="75895" y="0"/>
-            <a:ext cx="8115300" cy="480060"/>
-          </a:xfrm>
-        </p:spPr>
-        <p:txBody>
-          <a:bodyPr wrap="square" lIns="0" rIns="0" tIns="0" bIns="0" anchor="ctr">
-            <a:noAutofit/>
-          </a:bodyPr>
-          <a:lstStyle/>
-          <a:p>
-            <a:pPr algn="l">
-              <a:lnSpc>
-                <a:spcPct val="110000"/>
-              </a:lnSpc>
-              <a:buNone/>
-              <a:defRPr sz="1400" b="0">
-                <a:solidFill>
-                  <a:srgbClr val="303437"/>
-                </a:solidFill>
-                <a:latin typeface="Noto Sans"/>
-              </a:defRPr>
-            </a:pPr>
-            <a:r>
-              <a:rPr sz="1400" b="1" lang="ja-JP" altLang="en-US">
-                <a:solidFill>
-                  <a:srgbClr val="FFFEF8"/>
-                </a:solidFill>
-                <a:latin typeface="Noto Sans"/>
-                <a:ea typeface="Noto Sans CJK JP"/>
-                <a:cs typeface="Noto Sans"/>
-              </a:rPr>
-              <a:t>Appendix: 3. 研究と参考文献</a:t>
-            </a:r>
-          </a:p>
-        </p:txBody>
-      </p:sp>
-      <p:sp>
-        <p:nvSpPr>
-          <p:cNvPr id="4" name="TextBox 3"/>
-          <p:cNvSpPr txBox="1"/>
-          <p:nvPr/>
-        </p:nvSpPr>
-        <p:spPr>
-          <a:xfrm>
-            <a:off x="548640" y="1444752"/>
-            <a:ext cx="8046720" cy="640080"/>
-          </a:xfrm>
-          <a:prstGeom prst="rect">
-            <a:avLst/>
-          </a:prstGeom>
-          <a:noFill/>
-        </p:spPr>
-        <p:txBody>
-          <a:bodyPr wrap="square" lIns="0" rIns="0" tIns="0" bIns="0">
-            <a:noAutofit/>
-          </a:bodyPr>
-          <a:lstStyle/>
-          <a:p>
-            <a:pPr algn="l">
-              <a:lnSpc>
-                <a:spcPts val="2072"/>
-              </a:lnSpc>
-              <a:spcBef>
-                <a:spcPts val="0"/>
-              </a:spcBef>
-              <a:spcAft>
-                <a:spcPts val="0"/>
-              </a:spcAft>
-              <a:buNone/>
-              <a:defRPr sz="1850" b="0">
-                <a:solidFill>
-                  <a:srgbClr val="303437"/>
-                </a:solidFill>
-                <a:latin typeface="Noto Sans"/>
-              </a:defRPr>
-            </a:pPr>
-            <a:r>
-              <a:rPr sz="1850" b="1" lang="ja-JP" altLang="en-US">
-                <a:solidFill>
-                  <a:srgbClr val="303437"/>
-                </a:solidFill>
-                <a:latin typeface="Noto Sans"/>
-                <a:ea typeface="Noto Sans CJK JP"/>
-                <a:cs typeface="Noto Sans"/>
-              </a:rPr>
-              <a:t>Multi-LexSum dataset and loader</a:t>
-            </a:r>
-          </a:p>
-        </p:txBody>
-      </p:sp>
-      <p:sp>
-        <p:nvSpPr>
-          <p:cNvPr id="5" name="TextBox 4"/>
-          <p:cNvSpPr txBox="1"/>
-          <p:nvPr/>
-        </p:nvSpPr>
-        <p:spPr>
-          <a:xfrm>
-            <a:off x="548640" y="2112264"/>
-            <a:ext cx="8046720" cy="256032"/>
-          </a:xfrm>
-          <a:prstGeom prst="rect">
-            <a:avLst/>
-          </a:prstGeom>
-          <a:noFill/>
-        </p:spPr>
-        <p:txBody>
-          <a:bodyPr wrap="square" lIns="0" rIns="0" tIns="0" bIns="0">
-            <a:noAutofit/>
-          </a:bodyPr>
-          <a:lstStyle/>
-          <a:p>
-            <a:pPr algn="l">
-              <a:lnSpc>
-                <a:spcPts val="1462"/>
-              </a:lnSpc>
-              <a:spcBef>
-                <a:spcPts val="0"/>
-              </a:spcBef>
-              <a:spcAft>
-                <a:spcPts val="0"/>
-              </a:spcAft>
-              <a:buNone/>
-              <a:defRPr sz="1250" b="0">
-                <a:solidFill>
-                  <a:srgbClr val="303437"/>
-                </a:solidFill>
-                <a:latin typeface="Noto Sans"/>
-              </a:defRPr>
-            </a:pPr>
-            <a:r>
-              <a:rPr sz="1250" b="0" lang="ja-JP" altLang="en-US">
-                <a:solidFill>
-                  <a:srgbClr val="626669"/>
-                </a:solidFill>
-                <a:latin typeface="Noto Sans"/>
-                <a:ea typeface="Noto Sans CJK JP"/>
-                <a:cs typeface="Noto Sans"/>
-              </a:rPr>
-              <a:t>Multi-LexSum team・公式GitHub</a:t>
-            </a:r>
-          </a:p>
-        </p:txBody>
-      </p:sp>
-      <p:sp>
-        <p:nvSpPr>
-          <p:cNvPr id="6" name="TextBox 5"/>
-          <p:cNvSpPr txBox="1"/>
-          <p:nvPr/>
-        </p:nvSpPr>
-        <p:spPr>
-          <a:xfrm>
-            <a:off x="548640" y="2377440"/>
-            <a:ext cx="8046720" cy="438912"/>
-          </a:xfrm>
-          <a:prstGeom prst="rect">
-            <a:avLst/>
-          </a:prstGeom>
-          <a:noFill/>
-        </p:spPr>
-        <p:txBody>
-          <a:bodyPr wrap="square" lIns="0" rIns="0" tIns="0" bIns="0">
-            <a:noAutofit/>
-          </a:bodyPr>
-          <a:lstStyle/>
-          <a:p>
-            <a:pPr algn="l">
-              <a:lnSpc>
-                <a:spcPts val="1913"/>
-              </a:lnSpc>
-              <a:spcBef>
-                <a:spcPts val="0"/>
-              </a:spcBef>
-              <a:spcAft>
-                <a:spcPts val="0"/>
-              </a:spcAft>
-              <a:buNone/>
-              <a:defRPr sz="1650" b="0">
-                <a:solidFill>
-                  <a:srgbClr val="303437"/>
-                </a:solidFill>
-                <a:latin typeface="Noto Sans"/>
-              </a:defRPr>
-            </a:pPr>
-            <a:r>
-              <a:rPr sz="1650" b="0" lang="ja-JP" altLang="en-US">
-                <a:solidFill>
-                  <a:srgbClr val="303437"/>
-                </a:solidFill>
-                <a:latin typeface="Noto Sans"/>
-                <a:ea typeface="Noto Sans CJK JP"/>
-                <a:cs typeface="Noto Sans"/>
-              </a:rPr>
-              <a:t>配布の読み込み方法と、粒度別の追加学習済みモデルを案内する。</a:t>
-            </a:r>
-          </a:p>
-        </p:txBody>
-      </p:sp>
-      <p:sp>
-        <p:nvSpPr>
-          <p:cNvPr id="7" name="TextBox 6"/>
-          <p:cNvSpPr txBox="1"/>
-          <p:nvPr/>
-        </p:nvSpPr>
-        <p:spPr>
-          <a:xfrm>
-            <a:off x="548640" y="2834640"/>
-            <a:ext cx="8046720" cy="347472"/>
-          </a:xfrm>
-          <a:prstGeom prst="rect">
-            <a:avLst/>
-          </a:prstGeom>
-          <a:noFill/>
-        </p:spPr>
-        <p:txBody>
-          <a:bodyPr wrap="square" lIns="0" rIns="0" tIns="0" bIns="0">
-            <a:noAutofit/>
-          </a:bodyPr>
-          <a:lstStyle/>
-          <a:p>
-            <a:pPr algn="l">
-              <a:lnSpc>
-                <a:spcPts val="1088"/>
-              </a:lnSpc>
-              <a:spcBef>
-                <a:spcPts val="0"/>
-              </a:spcBef>
-              <a:spcAft>
-                <a:spcPts val="0"/>
-              </a:spcAft>
-              <a:buNone/>
-              <a:defRPr sz="930" b="0">
-                <a:solidFill>
-                  <a:srgbClr val="303437"/>
-                </a:solidFill>
-                <a:latin typeface="Noto Sans"/>
-              </a:defRPr>
-            </a:pPr>
-            <a:r>
-              <a:rPr sz="930" b="0" lang="ja-JP" altLang="en-US">
-                <a:solidFill>
-                  <a:srgbClr val="2166AC"/>
-                </a:solidFill>
-                <a:latin typeface="Noto Sans"/>
-                <a:ea typeface="Noto Sans CJK JP"/>
-                <a:cs typeface="Noto Sans"/>
-                <a:hlinkClick r:id="rId2"/>
-              </a:rPr>
-              <a:t>https://github.com/multilexsum/dataset</a:t>
-            </a:r>
-          </a:p>
-        </p:txBody>
-      </p:sp>
-      <p:sp>
-        <p:nvSpPr>
-          <p:cNvPr id="8" name="TextBox 7"/>
-          <p:cNvSpPr txBox="1"/>
-          <p:nvPr/>
-        </p:nvSpPr>
-        <p:spPr>
-          <a:xfrm>
-            <a:off x="548640" y="3017520"/>
-            <a:ext cx="8046720" cy="640080"/>
-          </a:xfrm>
-          <a:prstGeom prst="rect">
-            <a:avLst/>
-          </a:prstGeom>
-          <a:noFill/>
-        </p:spPr>
-        <p:txBody>
-          <a:bodyPr wrap="square" lIns="0" rIns="0" tIns="0" bIns="0">
-            <a:noAutofit/>
-          </a:bodyPr>
-          <a:lstStyle/>
-          <a:p>
-            <a:pPr algn="l">
-              <a:lnSpc>
-                <a:spcPts val="2072"/>
-              </a:lnSpc>
-              <a:spcBef>
-                <a:spcPts val="0"/>
-              </a:spcBef>
-              <a:spcAft>
-                <a:spcPts val="0"/>
-              </a:spcAft>
-              <a:buNone/>
-              <a:defRPr sz="1850" b="0">
-                <a:solidFill>
-                  <a:srgbClr val="303437"/>
-                </a:solidFill>
-                <a:latin typeface="Noto Sans"/>
-              </a:defRPr>
-            </a:pPr>
-            <a:r>
-              <a:rPr sz="1850" b="1" lang="ja-JP" altLang="en-US">
-                <a:solidFill>
-                  <a:srgbClr val="303437"/>
-                </a:solidFill>
-                <a:latin typeface="Noto Sans"/>
-                <a:ea typeface="Noto Sans CJK JP"/>
-                <a:cs typeface="Noto Sans"/>
-              </a:rPr>
-              <a:t>allenai/multi_lexsum</a:t>
-            </a:r>
-          </a:p>
-        </p:txBody>
-      </p:sp>
-      <p:sp>
-        <p:nvSpPr>
-          <p:cNvPr id="9" name="TextBox 8"/>
-          <p:cNvSpPr txBox="1"/>
-          <p:nvPr/>
-        </p:nvSpPr>
-        <p:spPr>
-          <a:xfrm>
-            <a:off x="548640" y="3685031"/>
-            <a:ext cx="8046720" cy="256032"/>
-          </a:xfrm>
-          <a:prstGeom prst="rect">
-            <a:avLst/>
-          </a:prstGeom>
-          <a:noFill/>
-        </p:spPr>
-        <p:txBody>
-          <a:bodyPr wrap="square" lIns="0" rIns="0" tIns="0" bIns="0">
-            <a:noAutofit/>
-          </a:bodyPr>
-          <a:lstStyle/>
-          <a:p>
-            <a:pPr algn="l">
-              <a:lnSpc>
-                <a:spcPts val="1462"/>
-              </a:lnSpc>
-              <a:spcBef>
-                <a:spcPts val="0"/>
-              </a:spcBef>
-              <a:spcAft>
-                <a:spcPts val="0"/>
-              </a:spcAft>
-              <a:buNone/>
-              <a:defRPr sz="1250" b="0">
-                <a:solidFill>
-                  <a:srgbClr val="303437"/>
-                </a:solidFill>
-                <a:latin typeface="Noto Sans"/>
-              </a:defRPr>
-            </a:pPr>
-            <a:r>
-              <a:rPr sz="1250" b="0" lang="ja-JP" altLang="en-US">
-                <a:solidFill>
-                  <a:srgbClr val="626669"/>
-                </a:solidFill>
-                <a:latin typeface="Noto Sans"/>
-                <a:ea typeface="Noto Sans CJK JP"/>
-                <a:cs typeface="Noto Sans"/>
-              </a:rPr>
-              <a:t>Multi-LexSum team・v1.0 / v1.1・Hugging Face</a:t>
-            </a:r>
-          </a:p>
-        </p:txBody>
-      </p:sp>
-      <p:sp>
-        <p:nvSpPr>
-          <p:cNvPr id="10" name="TextBox 9"/>
-          <p:cNvSpPr txBox="1"/>
-          <p:nvPr/>
-        </p:nvSpPr>
-        <p:spPr>
-          <a:xfrm>
-            <a:off x="548640" y="3950208"/>
-            <a:ext cx="8046720" cy="438912"/>
-          </a:xfrm>
-          <a:prstGeom prst="rect">
-            <a:avLst/>
-          </a:prstGeom>
-          <a:noFill/>
-        </p:spPr>
-        <p:txBody>
-          <a:bodyPr wrap="square" lIns="0" rIns="0" tIns="0" bIns="0">
-            <a:noAutofit/>
-          </a:bodyPr>
-          <a:lstStyle/>
-          <a:p>
-            <a:pPr algn="l">
-              <a:lnSpc>
-                <a:spcPts val="1913"/>
-              </a:lnSpc>
-              <a:spcBef>
-                <a:spcPts val="0"/>
-              </a:spcBef>
-              <a:spcAft>
-                <a:spcPts val="0"/>
-              </a:spcAft>
-              <a:buNone/>
-              <a:defRPr sz="1650" b="0">
-                <a:solidFill>
-                  <a:srgbClr val="303437"/>
-                </a:solidFill>
-                <a:latin typeface="Noto Sans"/>
-              </a:defRPr>
-            </a:pPr>
-            <a:r>
-              <a:rPr sz="1650" b="0" lang="ja-JP" altLang="en-US">
-                <a:solidFill>
-                  <a:srgbClr val="303437"/>
-                </a:solidFill>
-                <a:latin typeface="Noto Sans"/>
-                <a:ea typeface="Noto Sans CJK JP"/>
-                <a:cs typeface="Noto Sans"/>
-              </a:rPr>
-              <a:t>要約と文書を配布し、版ごとのメタデータと利用条件を示す。</a:t>
-            </a:r>
-          </a:p>
-        </p:txBody>
-      </p:sp>
-      <p:sp>
-        <p:nvSpPr>
-          <p:cNvPr id="11" name="TextBox 10"/>
-          <p:cNvSpPr txBox="1"/>
-          <p:nvPr/>
-        </p:nvSpPr>
-        <p:spPr>
-          <a:xfrm>
-            <a:off x="548640" y="4407408"/>
-            <a:ext cx="8046720" cy="347472"/>
-          </a:xfrm>
-          <a:prstGeom prst="rect">
-            <a:avLst/>
-          </a:prstGeom>
-          <a:noFill/>
-        </p:spPr>
-        <p:txBody>
-          <a:bodyPr wrap="square" lIns="0" rIns="0" tIns="0" bIns="0">
-            <a:noAutofit/>
-          </a:bodyPr>
-          <a:lstStyle/>
-          <a:p>
-            <a:pPr algn="l">
-              <a:lnSpc>
-                <a:spcPts val="1088"/>
-              </a:lnSpc>
-              <a:spcBef>
-                <a:spcPts val="0"/>
-              </a:spcBef>
-              <a:spcAft>
-                <a:spcPts val="0"/>
-              </a:spcAft>
-              <a:buNone/>
-              <a:defRPr sz="930" b="0">
-                <a:solidFill>
-                  <a:srgbClr val="303437"/>
-                </a:solidFill>
-                <a:latin typeface="Noto Sans"/>
-              </a:defRPr>
-            </a:pPr>
-            <a:r>
-              <a:rPr sz="930" b="0" lang="ja-JP" altLang="en-US">
-                <a:solidFill>
-                  <a:srgbClr val="2166AC"/>
-                </a:solidFill>
-                <a:latin typeface="Noto Sans"/>
-                <a:ea typeface="Noto Sans CJK JP"/>
-                <a:cs typeface="Noto Sans"/>
-                <a:hlinkClick r:id="rId3"/>
-              </a:rPr>
               <a:t>https://huggingface.co/datasets/allenai/multi_lexsum</a:t>
-            </a:r>
-          </a:p>
-        </p:txBody>
-      </p:sp>
-    </p:spTree>
-  </p:cSld>
-  <p:clrMapOvr>
-    <a:masterClrMapping/>
-  </p:clrMapOvr>
-</p:sld>
-</file>
-
-<file path=ppt/slides/slide69.xml><?xml version="1.0" encoding="utf-8"?>
-<p:sld xmlns:a="http://schemas.openxmlformats.org/drawingml/2006/main" xmlns:p="http://schemas.openxmlformats.org/presentationml/2006/main" xmlns:r="http://schemas.openxmlformats.org/officeDocument/2006/relationships">
-  <p:cSld>
-    <p:spTree>
-      <p:nvGrpSpPr>
-        <p:cNvPr id="1" name=""/>
-        <p:cNvGrpSpPr/>
-        <p:nvPr/>
-      </p:nvGrpSpPr>
-      <p:grpSpPr/>
-      <p:sp>
-        <p:nvSpPr>
-          <p:cNvPr id="2" name="Title 1"/>
-          <p:cNvSpPr>
-            <a:spLocks noGrp="1"/>
-          </p:cNvSpPr>
-          <p:nvPr>
-            <p:ph type="title"/>
-          </p:nvPr>
-        </p:nvSpPr>
-        <p:spPr>
-          <a:xfrm>
-            <a:off x="468172" y="650138"/>
-            <a:ext cx="8206740" cy="616305"/>
-          </a:xfrm>
-        </p:spPr>
-        <p:txBody>
-          <a:bodyPr wrap="square" lIns="0" rIns="0" tIns="0" bIns="0">
-            <a:noAutofit/>
-          </a:bodyPr>
-          <a:lstStyle/>
-          <a:p>
-            <a:pPr algn="l">
-              <a:lnSpc>
-                <a:spcPct val="110000"/>
-              </a:lnSpc>
-              <a:buNone/>
-              <a:defRPr sz="2800" b="0">
-                <a:solidFill>
-                  <a:srgbClr val="303437"/>
-                </a:solidFill>
-                <a:latin typeface="Noto Sans"/>
-              </a:defRPr>
-            </a:pPr>
-            <a:r>
-              <a:rPr sz="2800" b="1" lang="ja-JP" altLang="en-US">
-                <a:solidFill>
-                  <a:srgbClr val="303437"/>
-                </a:solidFill>
-                <a:latin typeface="Noto Sans"/>
-                <a:ea typeface="Noto Sans CJK JP"/>
-                <a:cs typeface="Noto Sans"/>
-              </a:rPr>
-              <a:t>参考文献</a:t>
-            </a:r>
-          </a:p>
-        </p:txBody>
-      </p:sp>
-      <p:sp>
-        <p:nvSpPr>
-          <p:cNvPr id="3" name="Title 2"/>
-          <p:cNvSpPr>
-            <a:spLocks noGrp="1"/>
-          </p:cNvSpPr>
-          <p:nvPr>
-            <p:ph type="title" idx="2"/>
-          </p:nvPr>
-        </p:nvSpPr>
-        <p:spPr>
-          <a:xfrm>
-            <a:off x="75895" y="0"/>
-            <a:ext cx="8115300" cy="480060"/>
-          </a:xfrm>
-        </p:spPr>
-        <p:txBody>
-          <a:bodyPr wrap="square" lIns="0" rIns="0" tIns="0" bIns="0" anchor="ctr">
-            <a:noAutofit/>
-          </a:bodyPr>
-          <a:lstStyle/>
-          <a:p>
-            <a:pPr algn="l">
-              <a:lnSpc>
-                <a:spcPct val="110000"/>
-              </a:lnSpc>
-              <a:buNone/>
-              <a:defRPr sz="1400" b="0">
-                <a:solidFill>
-                  <a:srgbClr val="303437"/>
-                </a:solidFill>
-                <a:latin typeface="Noto Sans"/>
-              </a:defRPr>
-            </a:pPr>
-            <a:r>
-              <a:rPr sz="1400" b="1" lang="ja-JP" altLang="en-US">
-                <a:solidFill>
-                  <a:srgbClr val="FFFEF8"/>
-                </a:solidFill>
-                <a:latin typeface="Noto Sans"/>
-                <a:ea typeface="Noto Sans CJK JP"/>
-                <a:cs typeface="Noto Sans"/>
-              </a:rPr>
-              <a:t>Appendix: 3. 研究と参考文献</a:t>
-            </a:r>
-          </a:p>
-        </p:txBody>
-      </p:sp>
-      <p:sp>
-        <p:nvSpPr>
-          <p:cNvPr id="4" name="TextBox 3"/>
-          <p:cNvSpPr txBox="1"/>
-          <p:nvPr/>
-        </p:nvSpPr>
-        <p:spPr>
-          <a:xfrm>
-            <a:off x="548640" y="1444752"/>
-            <a:ext cx="8046720" cy="640080"/>
-          </a:xfrm>
-          <a:prstGeom prst="rect">
-            <a:avLst/>
-          </a:prstGeom>
-          <a:noFill/>
-        </p:spPr>
-        <p:txBody>
-          <a:bodyPr wrap="square" lIns="0" rIns="0" tIns="0" bIns="0">
-            <a:noAutofit/>
-          </a:bodyPr>
-          <a:lstStyle/>
-          <a:p>
-            <a:pPr algn="l">
-              <a:lnSpc>
-                <a:spcPts val="2072"/>
-              </a:lnSpc>
-              <a:spcBef>
-                <a:spcPts val="0"/>
-              </a:spcBef>
-              <a:spcAft>
-                <a:spcPts val="0"/>
-              </a:spcAft>
-              <a:buNone/>
-              <a:defRPr sz="1850" b="0">
-                <a:solidFill>
-                  <a:srgbClr val="303437"/>
-                </a:solidFill>
-                <a:latin typeface="Noto Sans"/>
-              </a:defRPr>
-            </a:pPr>
-            <a:r>
-              <a:rPr sz="1850" b="1" lang="ja-JP" altLang="en-US">
-                <a:solidFill>
-                  <a:srgbClr val="303437"/>
-                </a:solidFill>
-                <a:latin typeface="Noto Sans"/>
-                <a:ea typeface="Noto Sans CJK JP"/>
-                <a:cs typeface="Noto Sans"/>
-              </a:rPr>
-              <a:t>HELM LegalSummarizationScenario</a:t>
-            </a:r>
-          </a:p>
-        </p:txBody>
-      </p:sp>
-      <p:sp>
-        <p:nvSpPr>
-          <p:cNvPr id="5" name="TextBox 4"/>
-          <p:cNvSpPr txBox="1"/>
-          <p:nvPr/>
-        </p:nvSpPr>
-        <p:spPr>
-          <a:xfrm>
-            <a:off x="548640" y="2112264"/>
-            <a:ext cx="8046720" cy="256032"/>
-          </a:xfrm>
-          <a:prstGeom prst="rect">
-            <a:avLst/>
-          </a:prstGeom>
-          <a:noFill/>
-        </p:spPr>
-        <p:txBody>
-          <a:bodyPr wrap="square" lIns="0" rIns="0" tIns="0" bIns="0">
-            <a:noAutofit/>
-          </a:bodyPr>
-          <a:lstStyle/>
-          <a:p>
-            <a:pPr algn="l">
-              <a:lnSpc>
-                <a:spcPts val="1462"/>
-              </a:lnSpc>
-              <a:spcBef>
-                <a:spcPts val="0"/>
-              </a:spcBef>
-              <a:spcAft>
-                <a:spcPts val="0"/>
-              </a:spcAft>
-              <a:buNone/>
-              <a:defRPr sz="1250" b="0">
-                <a:solidFill>
-                  <a:srgbClr val="303437"/>
-                </a:solidFill>
-                <a:latin typeface="Noto Sans"/>
-              </a:defRPr>
-            </a:pPr>
-            <a:r>
-              <a:rPr sz="1250" b="0" lang="ja-JP" altLang="en-US">
-                <a:solidFill>
-                  <a:srgbClr val="626669"/>
-                </a:solidFill>
-                <a:latin typeface="Noto Sans"/>
-                <a:ea typeface="Noto Sans CJK JP"/>
-                <a:cs typeface="Noto Sans"/>
-              </a:rPr>
-              <a:t>Stanford CRFM・v0.4.0・公式実装</a:t>
-            </a:r>
-          </a:p>
-        </p:txBody>
-      </p:sp>
-      <p:sp>
-        <p:nvSpPr>
-          <p:cNvPr id="6" name="TextBox 5"/>
-          <p:cNvSpPr txBox="1"/>
-          <p:nvPr/>
-        </p:nvSpPr>
-        <p:spPr>
-          <a:xfrm>
-            <a:off x="548640" y="2377440"/>
-            <a:ext cx="8046720" cy="438912"/>
-          </a:xfrm>
-          <a:prstGeom prst="rect">
-            <a:avLst/>
-          </a:prstGeom>
-          <a:noFill/>
-        </p:spPr>
-        <p:txBody>
-          <a:bodyPr wrap="square" lIns="0" rIns="0" tIns="0" bIns="0">
-            <a:noAutofit/>
-          </a:bodyPr>
-          <a:lstStyle/>
-          <a:p>
-            <a:pPr algn="l">
-              <a:lnSpc>
-                <a:spcPts val="1913"/>
-              </a:lnSpc>
-              <a:spcBef>
-                <a:spcPts val="0"/>
-              </a:spcBef>
-              <a:spcAft>
-                <a:spcPts val="0"/>
-              </a:spcAft>
-              <a:buNone/>
-              <a:defRPr sz="1650" b="0">
-                <a:solidFill>
-                  <a:srgbClr val="303437"/>
-                </a:solidFill>
-                <a:latin typeface="Noto Sans"/>
-              </a:defRPr>
-            </a:pPr>
-            <a:r>
-              <a:rPr sz="1650" b="0" lang="ja-JP" altLang="en-US">
-                <a:solidFill>
-                  <a:srgbClr val="303437"/>
-                </a:solidFill>
-                <a:latin typeface="Noto Sans"/>
-                <a:ea typeface="Noto Sans CJK JP"/>
-                <a:cs typeface="Noto Sans"/>
-              </a:rPr>
-              <a:t>MultiLexSumのLong→Short読み込みと、空白整形・長さ条件を実装する。</a:t>
-            </a:r>
-          </a:p>
-        </p:txBody>
-      </p:sp>
-      <p:sp>
-        <p:nvSpPr>
-          <p:cNvPr id="7" name="TextBox 6"/>
-          <p:cNvSpPr txBox="1"/>
-          <p:nvPr/>
-        </p:nvSpPr>
-        <p:spPr>
-          <a:xfrm>
-            <a:off x="548640" y="2834640"/>
-            <a:ext cx="8046720" cy="347472"/>
-          </a:xfrm>
-          <a:prstGeom prst="rect">
-            <a:avLst/>
-          </a:prstGeom>
-          <a:noFill/>
-        </p:spPr>
-        <p:txBody>
-          <a:bodyPr wrap="square" lIns="0" rIns="0" tIns="0" bIns="0">
-            <a:noAutofit/>
-          </a:bodyPr>
-          <a:lstStyle/>
-          <a:p>
-            <a:pPr algn="l">
-              <a:lnSpc>
-                <a:spcPts val="1088"/>
-              </a:lnSpc>
-              <a:spcBef>
-                <a:spcPts val="0"/>
-              </a:spcBef>
-              <a:spcAft>
-                <a:spcPts val="0"/>
-              </a:spcAft>
-              <a:buNone/>
-              <a:defRPr sz="930" b="0">
-                <a:solidFill>
-                  <a:srgbClr val="303437"/>
-                </a:solidFill>
-                <a:latin typeface="Noto Sans"/>
-              </a:defRPr>
-            </a:pPr>
-            <a:r>
-              <a:rPr sz="930" b="0" lang="ja-JP" altLang="en-US">
-                <a:solidFill>
-                  <a:srgbClr val="2166AC"/>
-                </a:solidFill>
-                <a:latin typeface="Noto Sans"/>
-                <a:ea typeface="Noto Sans CJK JP"/>
-                <a:cs typeface="Noto Sans"/>
-                <a:hlinkClick r:id="rId2"/>
-              </a:rPr>
-              <a:t>https://github.com/stanford-crfm/helm/blob/v0.4.0/src/helm/benchmark/scenarios/legal_summarization_scenario.py</a:t>
-            </a:r>
-          </a:p>
-        </p:txBody>
-      </p:sp>
-      <p:sp>
-        <p:nvSpPr>
-          <p:cNvPr id="8" name="TextBox 7"/>
-          <p:cNvSpPr txBox="1"/>
-          <p:nvPr/>
-        </p:nvSpPr>
-        <p:spPr>
-          <a:xfrm>
-            <a:off x="548640" y="3017520"/>
-            <a:ext cx="8046720" cy="640080"/>
-          </a:xfrm>
-          <a:prstGeom prst="rect">
-            <a:avLst/>
-          </a:prstGeom>
-          <a:noFill/>
-        </p:spPr>
-        <p:txBody>
-          <a:bodyPr wrap="square" lIns="0" rIns="0" tIns="0" bIns="0">
-            <a:noAutofit/>
-          </a:bodyPr>
-          <a:lstStyle/>
-          <a:p>
-            <a:pPr algn="l">
-              <a:lnSpc>
-                <a:spcPts val="2072"/>
-              </a:lnSpc>
-              <a:spcBef>
-                <a:spcPts val="0"/>
-              </a:spcBef>
-              <a:spcAft>
-                <a:spcPts val="0"/>
-              </a:spcAft>
-              <a:buNone/>
-              <a:defRPr sz="1850" b="0">
-                <a:solidFill>
-                  <a:srgbClr val="303437"/>
-                </a:solidFill>
-                <a:latin typeface="Noto Sans"/>
-              </a:defRPr>
-            </a:pPr>
-            <a:r>
-              <a:rPr sz="1850" b="1" lang="ja-JP" altLang="en-US">
-                <a:solidFill>
-                  <a:srgbClr val="303437"/>
-                </a:solidFill>
-                <a:latin typeface="Noto Sans"/>
-                <a:ea typeface="Noto Sans CJK JP"/>
-                <a:cs typeface="Noto Sans"/>
-              </a:rPr>
-              <a:t>Holistic Evaluation of Language Models</a:t>
-            </a:r>
-          </a:p>
-        </p:txBody>
-      </p:sp>
-      <p:sp>
-        <p:nvSpPr>
-          <p:cNvPr id="9" name="TextBox 8"/>
-          <p:cNvSpPr txBox="1"/>
-          <p:nvPr/>
-        </p:nvSpPr>
-        <p:spPr>
-          <a:xfrm>
-            <a:off x="548640" y="3685031"/>
-            <a:ext cx="8046720" cy="256032"/>
-          </a:xfrm>
-          <a:prstGeom prst="rect">
-            <a:avLst/>
-          </a:prstGeom>
-          <a:noFill/>
-        </p:spPr>
-        <p:txBody>
-          <a:bodyPr wrap="square" lIns="0" rIns="0" tIns="0" bIns="0">
-            <a:noAutofit/>
-          </a:bodyPr>
-          <a:lstStyle/>
-          <a:p>
-            <a:pPr algn="l">
-              <a:lnSpc>
-                <a:spcPts val="1462"/>
-              </a:lnSpc>
-              <a:spcBef>
-                <a:spcPts val="0"/>
-              </a:spcBef>
-              <a:spcAft>
-                <a:spcPts val="0"/>
-              </a:spcAft>
-              <a:buNone/>
-              <a:defRPr sz="1250" b="0">
-                <a:solidFill>
-                  <a:srgbClr val="303437"/>
-                </a:solidFill>
-                <a:latin typeface="Noto Sans"/>
-              </a:defRPr>
-            </a:pPr>
-            <a:r>
-              <a:rPr sz="1250" b="0" lang="ja-JP" altLang="en-US">
-                <a:solidFill>
-                  <a:srgbClr val="626669"/>
-                </a:solidFill>
-                <a:latin typeface="Noto Sans"/>
-                <a:ea typeface="Noto Sans CJK JP"/>
-                <a:cs typeface="Noto Sans"/>
-              </a:rPr>
-              <a:t>Liang et al.・2023・TMLR</a:t>
-            </a:r>
-          </a:p>
-        </p:txBody>
-      </p:sp>
-      <p:sp>
-        <p:nvSpPr>
-          <p:cNvPr id="10" name="TextBox 9"/>
-          <p:cNvSpPr txBox="1"/>
-          <p:nvPr/>
-        </p:nvSpPr>
-        <p:spPr>
-          <a:xfrm>
-            <a:off x="548640" y="3950208"/>
-            <a:ext cx="8046720" cy="438912"/>
-          </a:xfrm>
-          <a:prstGeom prst="rect">
-            <a:avLst/>
-          </a:prstGeom>
-          <a:noFill/>
-        </p:spPr>
-        <p:txBody>
-          <a:bodyPr wrap="square" lIns="0" rIns="0" tIns="0" bIns="0">
-            <a:noAutofit/>
-          </a:bodyPr>
-          <a:lstStyle/>
-          <a:p>
-            <a:pPr algn="l">
-              <a:lnSpc>
-                <a:spcPts val="1913"/>
-              </a:lnSpc>
-              <a:spcBef>
-                <a:spcPts val="0"/>
-              </a:spcBef>
-              <a:spcAft>
-                <a:spcPts val="0"/>
-              </a:spcAft>
-              <a:buNone/>
-              <a:defRPr sz="1650" b="0">
-                <a:solidFill>
-                  <a:srgbClr val="303437"/>
-                </a:solidFill>
-                <a:latin typeface="Noto Sans"/>
-              </a:defRPr>
-            </a:pPr>
-            <a:r>
-              <a:rPr sz="1650" b="0" lang="ja-JP" altLang="en-US">
-                <a:solidFill>
-                  <a:srgbClr val="303437"/>
-                </a:solidFill>
-                <a:latin typeface="Noto Sans"/>
-                <a:ea typeface="Noto Sans CJK JP"/>
-                <a:cs typeface="Noto Sans"/>
-              </a:rPr>
-              <a:t>課題・指標・モデルを共通の条件で比較する評価基盤を提案する。</a:t>
-            </a:r>
-          </a:p>
-        </p:txBody>
-      </p:sp>
-      <p:sp>
-        <p:nvSpPr>
-          <p:cNvPr id="11" name="TextBox 10"/>
-          <p:cNvSpPr txBox="1"/>
-          <p:nvPr/>
-        </p:nvSpPr>
-        <p:spPr>
-          <a:xfrm>
-            <a:off x="548640" y="4407408"/>
-            <a:ext cx="8046720" cy="347472"/>
-          </a:xfrm>
-          <a:prstGeom prst="rect">
-            <a:avLst/>
-          </a:prstGeom>
-          <a:noFill/>
-        </p:spPr>
-        <p:txBody>
-          <a:bodyPr wrap="square" lIns="0" rIns="0" tIns="0" bIns="0">
-            <a:noAutofit/>
-          </a:bodyPr>
-          <a:lstStyle/>
-          <a:p>
-            <a:pPr algn="l">
-              <a:lnSpc>
-                <a:spcPts val="1088"/>
-              </a:lnSpc>
-              <a:spcBef>
-                <a:spcPts val="0"/>
-              </a:spcBef>
-              <a:spcAft>
-                <a:spcPts val="0"/>
-              </a:spcAft>
-              <a:buNone/>
-              <a:defRPr sz="930" b="0">
-                <a:solidFill>
-                  <a:srgbClr val="303437"/>
-                </a:solidFill>
-                <a:latin typeface="Noto Sans"/>
-              </a:defRPr>
-            </a:pPr>
-            <a:r>
-              <a:rPr sz="930" b="0" lang="ja-JP" altLang="en-US">
-                <a:solidFill>
-                  <a:srgbClr val="2166AC"/>
-                </a:solidFill>
-                <a:latin typeface="Noto Sans"/>
-                <a:ea typeface="Noto Sans CJK JP"/>
-                <a:cs typeface="Noto Sans"/>
-                <a:hlinkClick r:id="rId3"/>
-              </a:rPr>
-              <a:t>https://arxiv.org/abs/2211.09110</a:t>
             </a:r>
           </a:p>
         </p:txBody>
@@ -35128,7 +31917,7 @@
                 <a:ea typeface="Noto Sans CJK JP"/>
                 <a:cs typeface="Noto Sans"/>
               </a:rPr>
-              <a:t>本編3件と追加10件は、v20220616のtestファイルにある異なる13事件から選んだ。Shortを入力、Tinyを参照要約とする。入力と参照文はいずれも全文を示す。</a:t>
+              <a:t>本編3件と追加10件は、2022年版のtestにある異なる13事件から選んだ。Shortを入力、Tinyを参照要約とし、どちらも全文を示す。</a:t>
             </a:r>
           </a:p>
           <a:p>
@@ -35158,37 +31947,7 @@
                 <a:ea typeface="Noto Sans CJK JP"/>
                 <a:cs typeface="Noto Sans"/>
               </a:rPr>
-              <a:t>参照要約は専門家が書いた一つの表現で、唯一の正解文ではない。TinyにはSNSへの投稿を意識した文や、事件のある時点を切り取った文も含まれる。</a:t>
-            </a:r>
-          </a:p>
-          <a:p>
-            <a:pPr marL="457200" indent="-355600">
-              <a:lnSpc>
-                <a:spcPts val="2379"/>
-              </a:lnSpc>
-              <a:spcAft>
-                <a:spcPts val="0"/>
-              </a:spcAft>
-              <a:buSzPct val="66500"/>
-              <a:buFont typeface="Noto Sans CJK JP"/>
-              <a:buChar char="●"/>
-              <a:defRPr sz="2000" b="0">
-                <a:solidFill>
-                  <a:srgbClr val="303437"/>
-                </a:solidFill>
-                <a:latin typeface="Noto Sans"/>
-              </a:defRPr>
-            </a:pPr>
-            <a:r>
-              <a:rPr sz="2000" b="0" lang="ja-JP" altLang="en-US">
-                <a:solidFill>
-                  <a:srgbClr val="303437"/>
-                </a:solidFill>
-                <a:latin typeface="Noto Sans"/>
-                <a:ea typeface="Noto Sans CJK JP"/>
-                <a:cs typeface="Noto Sans"/>
-              </a:rPr>
-              <a:t>HELMの実装はLong→Shortを使う。まず短い実例で圧縮の意味を見てから、この設定の違いを扱う。</a:t>
+              <a:t>Tinyは専門家が書いた短い紹介で、SNSへの投稿を意識した表現や、事件のある時点を切り取った文も含まれる。</a:t>
             </a:r>
           </a:p>
         </p:txBody>
@@ -35290,75 +32049,7 @@
                 <a:ea typeface="Noto Sans CJK JP"/>
                 <a:cs typeface="Noto Sans"/>
               </a:rPr>
-              <a:t>[1] Shen et al. (2022). Multi-LexSum: Real-world Summaries of Civil Rights Lawsuits at Multiple Granularities. NeurIPS.</a:t>
-            </a:r>
-          </a:p>
-          <a:p>
-            <a:pPr>
-              <a:lnSpc>
-                <a:spcPts val="940"/>
-              </a:lnSpc>
-              <a:spcAft>
-                <a:spcPts val="350"/>
-              </a:spcAft>
-              <a:buNone/>
-              <a:defRPr sz="810" b="0">
-                <a:solidFill>
-                  <a:srgbClr val="303437"/>
-                </a:solidFill>
-                <a:latin typeface="Noto Sans"/>
-              </a:defRPr>
-            </a:pPr>
-            <a:r>
-              <a:rPr sz="810" b="0" lang="ja-JP" altLang="en-US">
-                <a:solidFill>
-                  <a:srgbClr val="626669"/>
-                </a:solidFill>
-                <a:latin typeface="Noto Sans"/>
-                <a:ea typeface="Noto Sans CJK JP"/>
-                <a:cs typeface="Noto Sans"/>
-                <a:hlinkClick r:id="rId2"/>
-              </a:rPr>
-              <a:t>https://doi.org/10.52202/068431-0956</a:t>
-            </a:r>
-          </a:p>
-          <a:p>
-            <a:pPr>
-              <a:lnSpc>
-                <a:spcPts val="940"/>
-              </a:lnSpc>
-              <a:spcAft>
-                <a:spcPts val="350"/>
-              </a:spcAft>
-              <a:buNone/>
-              <a:defRPr sz="810" b="0">
-                <a:solidFill>
-                  <a:srgbClr val="303437"/>
-                </a:solidFill>
-                <a:latin typeface="Noto Sans"/>
-              </a:defRPr>
-            </a:pPr>
-            <a:r>
-              <a:rPr sz="810" b="0" lang="ja-JP" altLang="en-US">
-                <a:solidFill>
-                  <a:srgbClr val="626669"/>
-                </a:solidFill>
-                <a:latin typeface="Noto Sans"/>
-                <a:ea typeface="Noto Sans CJK JP"/>
-                <a:cs typeface="Noto Sans"/>
-              </a:rPr>
-              <a:t>[2] Shen et al. Multi-LexSum v20220616, 公開testレコード。</a:t>
-            </a:r>
-            <a:r>
-              <a:rPr sz="810" b="0" lang="ja-JP" altLang="en-US">
-                <a:solidFill>
-                  <a:srgbClr val="626669"/>
-                </a:solidFill>
-                <a:latin typeface="Noto Sans"/>
-                <a:ea typeface="Noto Sans CJK JP"/>
-                <a:cs typeface="Noto Sans"/>
-              </a:rPr>
-              <a:t>  </a:t>
+              <a:t>[1] Shen et al. Multi-LexSum (2022).  </a:t>
             </a:r>
             <a:r>
               <a:rPr sz="810" b="0" lang="ja-JP" altLang="en-US">
@@ -35848,7 +32539,7 @@
                 <a:ea typeface="Noto Sans CJK JP"/>
                 <a:cs typeface="Noto Sans"/>
               </a:rPr>
-              <a:t>2012年、コロンビア特別区の連邦地裁は、民事没収手続が終わるまで私有車を押収・留置しながら、剥奪後の審理を設けない方針を違憲と判断した。</a:t>
+              <a:t>2012年、コロンビア特別区の連邦地裁は、民事没収手続が終わるまで私有車を押収・留置しながら、押収後の審理を設けない方針を違憲と判断した。</a:t>
             </a:r>
           </a:p>
         </p:txBody>
@@ -36010,18 +32701,7 @@
                 <a:ea typeface="Noto Sans CJK JP"/>
                 <a:cs typeface="Noto Sans"/>
               </a:rPr>
-              <a:t>[1] Shen et al. Multi-LexSum v20220616, 公開testレコード。 CJ-DC-0002 / test / Short→Tiny</a:t>
-            </a:r>
-            <a:r>
-              <a:rPr sz="810" b="0" lang="ja-JP" altLang="en-US">
-                <a:solidFill>
-                  <a:srgbClr val="626669"/>
-                </a:solidFill>
-                <a:latin typeface="Noto Sans"/>
-                <a:ea typeface="Noto Sans CJK JP"/>
-                <a:cs typeface="Noto Sans"/>
-              </a:rPr>
-              <a:t>  </a:t>
+              <a:t>[1] Shen et al. Multi-LexSum (2022).  </a:t>
             </a:r>
             <a:r>
               <a:rPr sz="810" b="0" lang="ja-JP" altLang="en-US">
@@ -36182,7 +32862,7 @@
                 <a:ea typeface="Noto Sans CJK JP"/>
                 <a:cs typeface="Noto Sans"/>
               </a:rPr>
-              <a:t>要約の短さだけでなく、誰が何を争い、どの結果を残すかを見る。参照文と語句が重なるだけで、必要な結末が伝わるとは限らない。</a:t>
+              <a:t>短くするときには、争点の紹介と裁判の結果のうち、どの情報を残すかが変わる。</a:t>
             </a:r>
           </a:p>
         </p:txBody>
@@ -36284,18 +32964,7 @@
                 <a:ea typeface="Noto Sans CJK JP"/>
                 <a:cs typeface="Noto Sans"/>
               </a:rPr>
-              <a:t>[1] Shen et al. Multi-LexSum v20220616, 公開testレコード。</a:t>
-            </a:r>
-            <a:r>
-              <a:rPr sz="810" b="0" lang="ja-JP" altLang="en-US">
-                <a:solidFill>
-                  <a:srgbClr val="626669"/>
-                </a:solidFill>
-                <a:latin typeface="Noto Sans"/>
-                <a:ea typeface="Noto Sans CJK JP"/>
-                <a:cs typeface="Noto Sans"/>
-              </a:rPr>
-              <a:t>  </a:t>
+              <a:t>[1] Shen et al. Multi-LexSum (2022).  </a:t>
             </a:r>
             <a:r>
               <a:rPr sz="810" b="0" lang="ja-JP" altLang="en-US">
